--- a/docs/Presentacion.pptx
+++ b/docs/Presentacion.pptx
@@ -5,27 +5,24 @@
     <p:sldMasterId id="2147483648" r:id="rId4"/>
   </p:sldMasterIdLst>
   <p:notesMasterIdLst>
-    <p:notesMasterId r:id="rId20"/>
+    <p:notesMasterId r:id="rId17"/>
   </p:notesMasterIdLst>
   <p:handoutMasterIdLst>
-    <p:handoutMasterId r:id="rId21"/>
+    <p:handoutMasterId r:id="rId18"/>
   </p:handoutMasterIdLst>
   <p:sldIdLst>
     <p:sldId id="292" r:id="rId5"/>
     <p:sldId id="275" r:id="rId6"/>
-    <p:sldId id="276" r:id="rId7"/>
-    <p:sldId id="296" r:id="rId8"/>
-    <p:sldId id="297" r:id="rId9"/>
-    <p:sldId id="298" r:id="rId10"/>
-    <p:sldId id="277" r:id="rId11"/>
-    <p:sldId id="278" r:id="rId12"/>
-    <p:sldId id="299" r:id="rId13"/>
-    <p:sldId id="279" r:id="rId14"/>
-    <p:sldId id="300" r:id="rId15"/>
-    <p:sldId id="295" r:id="rId16"/>
-    <p:sldId id="285" r:id="rId17"/>
-    <p:sldId id="288" r:id="rId18"/>
-    <p:sldId id="289" r:id="rId19"/>
+    <p:sldId id="296" r:id="rId7"/>
+    <p:sldId id="301" r:id="rId8"/>
+    <p:sldId id="276" r:id="rId9"/>
+    <p:sldId id="277" r:id="rId10"/>
+    <p:sldId id="278" r:id="rId11"/>
+    <p:sldId id="279" r:id="rId12"/>
+    <p:sldId id="295" r:id="rId13"/>
+    <p:sldId id="285" r:id="rId14"/>
+    <p:sldId id="288" r:id="rId15"/>
+    <p:sldId id="289" r:id="rId16"/>
   </p:sldIdLst>
   <p:sldSz cx="12192000" cy="6858000"/>
   <p:notesSz cx="6858000" cy="9144000"/>
@@ -248,7 +245,7 @@
             <a:pPr rtl="0"/>
             <a:fld id="{A1B39F24-D372-49FA-92C4-AB388BC5B723}" type="datetime1">
               <a:rPr lang="es-ES" smtClean="0"/>
-              <a:t>07/04/2025</a:t>
+              <a:t>08/04/2025</a:t>
             </a:fld>
             <a:endParaRPr lang="es-ES" dirty="0"/>
           </a:p>
@@ -532,7 +529,7 @@
             <a:fld id="{F56CD306-C8D1-4677-B356-29ECCA1AC9DC}" type="datetime1">
               <a:rPr lang="es-ES" smtClean="0"/>
               <a:pPr/>
-              <a:t>07/04/2025</a:t>
+              <a:t>08/04/2025</a:t>
             </a:fld>
             <a:endParaRPr lang="es-ES" dirty="0"/>
           </a:p>
@@ -989,7 +986,7 @@
             <a:pPr rtl="0"/>
             <a:fld id="{017105BD-6D6F-49DB-9DE4-D4A6452D7E5F}" type="slidenum">
               <a:rPr lang="es-ES" altLang="zh-CN" noProof="0" smtClean="0"/>
-              <a:t>13</a:t>
+              <a:t>11</a:t>
             </a:fld>
             <a:endParaRPr lang="es-ES" altLang="zh-CN" noProof="0" dirty="0"/>
           </a:p>
@@ -998,7 +995,7 @@
     </p:spTree>
     <p:extLst>
       <p:ext uri="{BB962C8B-B14F-4D97-AF65-F5344CB8AC3E}">
-        <p14:creationId xmlns:p14="http://schemas.microsoft.com/office/powerpoint/2010/main" val="4245785649"/>
+        <p14:creationId xmlns:p14="http://schemas.microsoft.com/office/powerpoint/2010/main" val="2979302097"/>
       </p:ext>
     </p:extLst>
   </p:cSld>
@@ -1107,125 +1104,7 @@
             <a:pPr rtl="0"/>
             <a:fld id="{017105BD-6D6F-49DB-9DE4-D4A6452D7E5F}" type="slidenum">
               <a:rPr lang="es-ES" altLang="zh-CN" noProof="0" smtClean="0"/>
-              <a:t>14</a:t>
-            </a:fld>
-            <a:endParaRPr lang="es-ES" altLang="zh-CN" noProof="0" dirty="0"/>
-          </a:p>
-        </p:txBody>
-      </p:sp>
-    </p:spTree>
-    <p:extLst>
-      <p:ext uri="{BB962C8B-B14F-4D97-AF65-F5344CB8AC3E}">
-        <p14:creationId xmlns:p14="http://schemas.microsoft.com/office/powerpoint/2010/main" val="2979302097"/>
-      </p:ext>
-    </p:extLst>
-  </p:cSld>
-  <p:clrMapOvr>
-    <a:masterClrMapping/>
-  </p:clrMapOvr>
-</p:notes>
-</file>
-
-<file path=ppt/notesSlides/notesSlide12.xml><?xml version="1.0" encoding="utf-8"?>
-<p:notes xmlns:a="http://schemas.openxmlformats.org/drawingml/2006/main" xmlns:r="http://schemas.openxmlformats.org/officeDocument/2006/relationships" xmlns:p="http://schemas.openxmlformats.org/presentationml/2006/main">
-  <p:cSld>
-    <p:spTree>
-      <p:nvGrpSpPr>
-        <p:cNvPr id="1" name=""/>
-        <p:cNvGrpSpPr/>
-        <p:nvPr/>
-      </p:nvGrpSpPr>
-      <p:grpSpPr>
-        <a:xfrm>
-          <a:off x="0" y="0"/>
-          <a:ext cx="0" cy="0"/>
-          <a:chOff x="0" y="0"/>
-          <a:chExt cx="0" cy="0"/>
-        </a:xfrm>
-      </p:grpSpPr>
-      <p:sp>
-        <p:nvSpPr>
-          <p:cNvPr id="2" name="Marcador de imagen de diapositiva 1"/>
-          <p:cNvSpPr>
-            <a:spLocks noGrp="1" noRot="1" noChangeAspect="1"/>
-          </p:cNvSpPr>
-          <p:nvPr>
-            <p:ph type="sldImg"/>
-          </p:nvPr>
-        </p:nvSpPr>
-        <p:spPr>
-          <a:xfrm>
-            <a:off x="685800" y="1143000"/>
-            <a:ext cx="5486400" cy="3086100"/>
-          </a:xfrm>
-          <a:prstGeom prst="rect">
-            <a:avLst/>
-          </a:prstGeom>
-        </p:spPr>
-      </p:sp>
-      <p:sp>
-        <p:nvSpPr>
-          <p:cNvPr id="3" name="Marcador de notas 2"/>
-          <p:cNvSpPr>
-            <a:spLocks noGrp="1"/>
-          </p:cNvSpPr>
-          <p:nvPr>
-            <p:ph type="body" idx="1"/>
-          </p:nvPr>
-        </p:nvSpPr>
-        <p:spPr>
-          <a:xfrm>
-            <a:off x="685800" y="4400550"/>
-            <a:ext cx="5486400" cy="3600450"/>
-          </a:xfrm>
-          <a:prstGeom prst="rect">
-            <a:avLst/>
-          </a:prstGeom>
-        </p:spPr>
-        <p:txBody>
-          <a:bodyPr rtlCol="0"/>
-          <a:lstStyle>
-            <a:defPPr>
-              <a:defRPr lang="es-ES"/>
-            </a:defPPr>
-          </a:lstStyle>
-          <a:p>
-            <a:pPr rtl="0"/>
-            <a:endParaRPr lang="es-ES" dirty="0"/>
-          </a:p>
-        </p:txBody>
-      </p:sp>
-      <p:sp>
-        <p:nvSpPr>
-          <p:cNvPr id="4" name="Marcador de número de diapositiva 3"/>
-          <p:cNvSpPr>
-            <a:spLocks noGrp="1"/>
-          </p:cNvSpPr>
-          <p:nvPr>
-            <p:ph type="sldNum" sz="quarter" idx="5"/>
-          </p:nvPr>
-        </p:nvSpPr>
-        <p:spPr>
-          <a:xfrm>
-            <a:off x="3884613" y="8685213"/>
-            <a:ext cx="2971800" cy="458787"/>
-          </a:xfrm>
-          <a:prstGeom prst="rect">
-            <a:avLst/>
-          </a:prstGeom>
-        </p:spPr>
-        <p:txBody>
-          <a:bodyPr rtlCol="0"/>
-          <a:lstStyle>
-            <a:defPPr>
-              <a:defRPr lang="es-ES"/>
-            </a:defPPr>
-          </a:lstStyle>
-          <a:p>
-            <a:pPr rtl="0"/>
-            <a:fld id="{017105BD-6D6F-49DB-9DE4-D4A6452D7E5F}" type="slidenum">
-              <a:rPr lang="es-ES" altLang="zh-CN" noProof="0" smtClean="0"/>
-              <a:t>15</a:t>
+              <a:t>12</a:t>
             </a:fld>
             <a:endParaRPr lang="es-ES" altLang="zh-CN" noProof="0" dirty="0"/>
           </a:p>
@@ -1367,124 +1246,6 @@
   <p:cSld>
     <p:spTree>
       <p:nvGrpSpPr>
-        <p:cNvPr id="1" name=""/>
-        <p:cNvGrpSpPr/>
-        <p:nvPr/>
-      </p:nvGrpSpPr>
-      <p:grpSpPr>
-        <a:xfrm>
-          <a:off x="0" y="0"/>
-          <a:ext cx="0" cy="0"/>
-          <a:chOff x="0" y="0"/>
-          <a:chExt cx="0" cy="0"/>
-        </a:xfrm>
-      </p:grpSpPr>
-      <p:sp>
-        <p:nvSpPr>
-          <p:cNvPr id="2" name="Marcador de imagen de diapositiva 1"/>
-          <p:cNvSpPr>
-            <a:spLocks noGrp="1" noRot="1" noChangeAspect="1"/>
-          </p:cNvSpPr>
-          <p:nvPr>
-            <p:ph type="sldImg"/>
-          </p:nvPr>
-        </p:nvSpPr>
-        <p:spPr>
-          <a:xfrm>
-            <a:off x="685800" y="1143000"/>
-            <a:ext cx="5486400" cy="3086100"/>
-          </a:xfrm>
-          <a:prstGeom prst="rect">
-            <a:avLst/>
-          </a:prstGeom>
-        </p:spPr>
-      </p:sp>
-      <p:sp>
-        <p:nvSpPr>
-          <p:cNvPr id="3" name="Marcador de notas 2"/>
-          <p:cNvSpPr>
-            <a:spLocks noGrp="1"/>
-          </p:cNvSpPr>
-          <p:nvPr>
-            <p:ph type="body" idx="1"/>
-          </p:nvPr>
-        </p:nvSpPr>
-        <p:spPr>
-          <a:xfrm>
-            <a:off x="685800" y="4400550"/>
-            <a:ext cx="5486400" cy="3600450"/>
-          </a:xfrm>
-          <a:prstGeom prst="rect">
-            <a:avLst/>
-          </a:prstGeom>
-        </p:spPr>
-        <p:txBody>
-          <a:bodyPr rtlCol="0"/>
-          <a:lstStyle>
-            <a:defPPr>
-              <a:defRPr lang="es-ES"/>
-            </a:defPPr>
-          </a:lstStyle>
-          <a:p>
-            <a:pPr rtl="0"/>
-            <a:endParaRPr lang="es-ES" dirty="0"/>
-          </a:p>
-        </p:txBody>
-      </p:sp>
-      <p:sp>
-        <p:nvSpPr>
-          <p:cNvPr id="4" name="Marcador de número de diapositiva 3"/>
-          <p:cNvSpPr>
-            <a:spLocks noGrp="1"/>
-          </p:cNvSpPr>
-          <p:nvPr>
-            <p:ph type="sldNum" sz="quarter" idx="5"/>
-          </p:nvPr>
-        </p:nvSpPr>
-        <p:spPr>
-          <a:xfrm>
-            <a:off x="3884613" y="8685213"/>
-            <a:ext cx="2971800" cy="458787"/>
-          </a:xfrm>
-          <a:prstGeom prst="rect">
-            <a:avLst/>
-          </a:prstGeom>
-        </p:spPr>
-        <p:txBody>
-          <a:bodyPr rtlCol="0"/>
-          <a:lstStyle>
-            <a:defPPr>
-              <a:defRPr lang="es-ES"/>
-            </a:defPPr>
-          </a:lstStyle>
-          <a:p>
-            <a:pPr rtl="0"/>
-            <a:fld id="{017105BD-6D6F-49DB-9DE4-D4A6452D7E5F}" type="slidenum">
-              <a:rPr lang="es-ES" altLang="zh-CN" noProof="0" smtClean="0"/>
-              <a:t>3</a:t>
-            </a:fld>
-            <a:endParaRPr lang="es-ES" altLang="zh-CN" noProof="0" dirty="0"/>
-          </a:p>
-        </p:txBody>
-      </p:sp>
-    </p:spTree>
-    <p:extLst>
-      <p:ext uri="{BB962C8B-B14F-4D97-AF65-F5344CB8AC3E}">
-        <p14:creationId xmlns:p14="http://schemas.microsoft.com/office/powerpoint/2010/main" val="3235818310"/>
-      </p:ext>
-    </p:extLst>
-  </p:cSld>
-  <p:clrMapOvr>
-    <a:masterClrMapping/>
-  </p:clrMapOvr>
-</p:notes>
-</file>
-
-<file path=ppt/notesSlides/notesSlide4.xml><?xml version="1.0" encoding="utf-8"?>
-<p:notes xmlns:a="http://schemas.openxmlformats.org/drawingml/2006/main" xmlns:r="http://schemas.openxmlformats.org/officeDocument/2006/relationships" xmlns:p="http://schemas.openxmlformats.org/presentationml/2006/main">
-  <p:cSld>
-    <p:spTree>
-      <p:nvGrpSpPr>
         <p:cNvPr id="1" name="">
           <a:extLst>
             <a:ext uri="{FF2B5EF4-FFF2-40B4-BE49-F238E27FC236}">
@@ -1603,7 +1364,7 @@
             <a:pPr rtl="0"/>
             <a:fld id="{017105BD-6D6F-49DB-9DE4-D4A6452D7E5F}" type="slidenum">
               <a:rPr lang="es-ES" altLang="zh-CN" noProof="0" smtClean="0"/>
-              <a:t>4</a:t>
+              <a:t>3</a:t>
             </a:fld>
             <a:endParaRPr lang="es-ES" altLang="zh-CN" noProof="0" dirty="0"/>
           </a:p>
@@ -1613,6 +1374,124 @@
     <p:extLst>
       <p:ext uri="{BB962C8B-B14F-4D97-AF65-F5344CB8AC3E}">
         <p14:creationId xmlns:p14="http://schemas.microsoft.com/office/powerpoint/2010/main" val="1240125407"/>
+      </p:ext>
+    </p:extLst>
+  </p:cSld>
+  <p:clrMapOvr>
+    <a:masterClrMapping/>
+  </p:clrMapOvr>
+</p:notes>
+</file>
+
+<file path=ppt/notesSlides/notesSlide4.xml><?xml version="1.0" encoding="utf-8"?>
+<p:notes xmlns:a="http://schemas.openxmlformats.org/drawingml/2006/main" xmlns:r="http://schemas.openxmlformats.org/officeDocument/2006/relationships" xmlns:p="http://schemas.openxmlformats.org/presentationml/2006/main">
+  <p:cSld>
+    <p:spTree>
+      <p:nvGrpSpPr>
+        <p:cNvPr id="1" name=""/>
+        <p:cNvGrpSpPr/>
+        <p:nvPr/>
+      </p:nvGrpSpPr>
+      <p:grpSpPr>
+        <a:xfrm>
+          <a:off x="0" y="0"/>
+          <a:ext cx="0" cy="0"/>
+          <a:chOff x="0" y="0"/>
+          <a:chExt cx="0" cy="0"/>
+        </a:xfrm>
+      </p:grpSpPr>
+      <p:sp>
+        <p:nvSpPr>
+          <p:cNvPr id="2" name="Marcador de imagen de diapositiva 1"/>
+          <p:cNvSpPr>
+            <a:spLocks noGrp="1" noRot="1" noChangeAspect="1"/>
+          </p:cNvSpPr>
+          <p:nvPr>
+            <p:ph type="sldImg"/>
+          </p:nvPr>
+        </p:nvSpPr>
+        <p:spPr>
+          <a:xfrm>
+            <a:off x="685800" y="1143000"/>
+            <a:ext cx="5486400" cy="3086100"/>
+          </a:xfrm>
+          <a:prstGeom prst="rect">
+            <a:avLst/>
+          </a:prstGeom>
+        </p:spPr>
+      </p:sp>
+      <p:sp>
+        <p:nvSpPr>
+          <p:cNvPr id="3" name="Marcador de notas 2"/>
+          <p:cNvSpPr>
+            <a:spLocks noGrp="1"/>
+          </p:cNvSpPr>
+          <p:nvPr>
+            <p:ph type="body" idx="1"/>
+          </p:nvPr>
+        </p:nvSpPr>
+        <p:spPr>
+          <a:xfrm>
+            <a:off x="685800" y="4400550"/>
+            <a:ext cx="5486400" cy="3600450"/>
+          </a:xfrm>
+          <a:prstGeom prst="rect">
+            <a:avLst/>
+          </a:prstGeom>
+        </p:spPr>
+        <p:txBody>
+          <a:bodyPr rtlCol="0"/>
+          <a:lstStyle>
+            <a:defPPr>
+              <a:defRPr lang="es-ES"/>
+            </a:defPPr>
+          </a:lstStyle>
+          <a:p>
+            <a:pPr rtl="0"/>
+            <a:endParaRPr lang="es-ES" dirty="0"/>
+          </a:p>
+        </p:txBody>
+      </p:sp>
+      <p:sp>
+        <p:nvSpPr>
+          <p:cNvPr id="4" name="Marcador de número de diapositiva 3"/>
+          <p:cNvSpPr>
+            <a:spLocks noGrp="1"/>
+          </p:cNvSpPr>
+          <p:nvPr>
+            <p:ph type="sldNum" sz="quarter" idx="5"/>
+          </p:nvPr>
+        </p:nvSpPr>
+        <p:spPr>
+          <a:xfrm>
+            <a:off x="3884613" y="8685213"/>
+            <a:ext cx="2971800" cy="458787"/>
+          </a:xfrm>
+          <a:prstGeom prst="rect">
+            <a:avLst/>
+          </a:prstGeom>
+        </p:spPr>
+        <p:txBody>
+          <a:bodyPr rtlCol="0"/>
+          <a:lstStyle>
+            <a:defPPr>
+              <a:defRPr lang="es-ES"/>
+            </a:defPPr>
+          </a:lstStyle>
+          <a:p>
+            <a:pPr rtl="0"/>
+            <a:fld id="{017105BD-6D6F-49DB-9DE4-D4A6452D7E5F}" type="slidenum">
+              <a:rPr lang="es-ES" altLang="zh-CN" noProof="0" smtClean="0"/>
+              <a:t>5</a:t>
+            </a:fld>
+            <a:endParaRPr lang="es-ES" altLang="zh-CN" noProof="0" dirty="0"/>
+          </a:p>
+        </p:txBody>
+      </p:sp>
+    </p:spTree>
+    <p:extLst>
+      <p:ext uri="{BB962C8B-B14F-4D97-AF65-F5344CB8AC3E}">
+        <p14:creationId xmlns:p14="http://schemas.microsoft.com/office/powerpoint/2010/main" val="3235818310"/>
       </p:ext>
     </p:extLst>
   </p:cSld>
@@ -1627,13 +1506,7 @@
   <p:cSld>
     <p:spTree>
       <p:nvGrpSpPr>
-        <p:cNvPr id="1" name="">
-          <a:extLst>
-            <a:ext uri="{FF2B5EF4-FFF2-40B4-BE49-F238E27FC236}">
-              <a16:creationId xmlns:a16="http://schemas.microsoft.com/office/drawing/2014/main" id="{8F4AC174-8CFE-E9D8-06A6-4399FAE296B9}"/>
-            </a:ext>
-          </a:extLst>
-        </p:cNvPr>
+        <p:cNvPr id="1" name=""/>
         <p:cNvGrpSpPr/>
         <p:nvPr/>
       </p:nvGrpSpPr>
@@ -1647,13 +1520,7 @@
       </p:grpSpPr>
       <p:sp>
         <p:nvSpPr>
-          <p:cNvPr id="2" name="Marcador de imagen de diapositiva 1">
-            <a:extLst>
-              <a:ext uri="{FF2B5EF4-FFF2-40B4-BE49-F238E27FC236}">
-                <a16:creationId xmlns:a16="http://schemas.microsoft.com/office/drawing/2014/main" id="{DF0D8071-D173-D4B9-97FB-7FB7F6399E5D}"/>
-              </a:ext>
-            </a:extLst>
-          </p:cNvPr>
+          <p:cNvPr id="2" name="Marcador de imagen de diapositiva 1"/>
           <p:cNvSpPr>
             <a:spLocks noGrp="1" noRot="1" noChangeAspect="1"/>
           </p:cNvSpPr>
@@ -1673,13 +1540,7 @@
       </p:sp>
       <p:sp>
         <p:nvSpPr>
-          <p:cNvPr id="3" name="Marcador de notas 2">
-            <a:extLst>
-              <a:ext uri="{FF2B5EF4-FFF2-40B4-BE49-F238E27FC236}">
-                <a16:creationId xmlns:a16="http://schemas.microsoft.com/office/drawing/2014/main" id="{7A1ED5D4-1F09-B4C4-6962-46E20B2B6CCA}"/>
-              </a:ext>
-            </a:extLst>
-          </p:cNvPr>
+          <p:cNvPr id="3" name="Marcador de notas 2"/>
           <p:cNvSpPr>
             <a:spLocks noGrp="1"/>
           </p:cNvSpPr>
@@ -1711,13 +1572,7 @@
       </p:sp>
       <p:sp>
         <p:nvSpPr>
-          <p:cNvPr id="4" name="Marcador de número de diapositiva 3">
-            <a:extLst>
-              <a:ext uri="{FF2B5EF4-FFF2-40B4-BE49-F238E27FC236}">
-                <a16:creationId xmlns:a16="http://schemas.microsoft.com/office/drawing/2014/main" id="{543A5089-50DE-625A-8155-EE1257B2AEDF}"/>
-              </a:ext>
-            </a:extLst>
-          </p:cNvPr>
+          <p:cNvPr id="4" name="Marcador de número de diapositiva 3"/>
           <p:cNvSpPr>
             <a:spLocks noGrp="1"/>
           </p:cNvSpPr>
@@ -1745,7 +1600,7 @@
             <a:pPr rtl="0"/>
             <a:fld id="{017105BD-6D6F-49DB-9DE4-D4A6452D7E5F}" type="slidenum">
               <a:rPr lang="es-ES" altLang="zh-CN" noProof="0" smtClean="0"/>
-              <a:t>5</a:t>
+              <a:t>6</a:t>
             </a:fld>
             <a:endParaRPr lang="es-ES" altLang="zh-CN" noProof="0" dirty="0"/>
           </a:p>
@@ -1754,7 +1609,7 @@
     </p:spTree>
     <p:extLst>
       <p:ext uri="{BB962C8B-B14F-4D97-AF65-F5344CB8AC3E}">
-        <p14:creationId xmlns:p14="http://schemas.microsoft.com/office/powerpoint/2010/main" val="1972761553"/>
+        <p14:creationId xmlns:p14="http://schemas.microsoft.com/office/powerpoint/2010/main" val="961386619"/>
       </p:ext>
     </p:extLst>
   </p:cSld>
@@ -1872,7 +1727,7 @@
     </p:spTree>
     <p:extLst>
       <p:ext uri="{BB962C8B-B14F-4D97-AF65-F5344CB8AC3E}">
-        <p14:creationId xmlns:p14="http://schemas.microsoft.com/office/powerpoint/2010/main" val="961386619"/>
+        <p14:creationId xmlns:p14="http://schemas.microsoft.com/office/powerpoint/2010/main" val="464007827"/>
       </p:ext>
     </p:extLst>
   </p:cSld>
@@ -1980,17 +1835,17 @@
           <a:p>
             <a:pPr rtl="0"/>
             <a:fld id="{017105BD-6D6F-49DB-9DE4-D4A6452D7E5F}" type="slidenum">
-              <a:rPr lang="es-ES" altLang="zh-CN" noProof="0" smtClean="0"/>
+              <a:rPr lang="es-ES" altLang="zh-CN" smtClean="0"/>
               <a:t>8</a:t>
             </a:fld>
-            <a:endParaRPr lang="es-ES" altLang="zh-CN" noProof="0" dirty="0"/>
+            <a:endParaRPr lang="es-ES" altLang="zh-CN" dirty="0"/>
           </a:p>
         </p:txBody>
       </p:sp>
     </p:spTree>
     <p:extLst>
       <p:ext uri="{BB962C8B-B14F-4D97-AF65-F5344CB8AC3E}">
-        <p14:creationId xmlns:p14="http://schemas.microsoft.com/office/powerpoint/2010/main" val="464007827"/>
+        <p14:creationId xmlns:p14="http://schemas.microsoft.com/office/powerpoint/2010/main" val="2880906100"/>
       </p:ext>
     </p:extLst>
   </p:cSld>
@@ -2099,7 +1954,7 @@
             <a:pPr rtl="0"/>
             <a:fld id="{017105BD-6D6F-49DB-9DE4-D4A6452D7E5F}" type="slidenum">
               <a:rPr lang="es-ES" altLang="zh-CN" smtClean="0"/>
-              <a:t>10</a:t>
+              <a:t>9</a:t>
             </a:fld>
             <a:endParaRPr lang="es-ES" altLang="zh-CN" dirty="0"/>
           </a:p>
@@ -2108,7 +1963,7 @@
     </p:spTree>
     <p:extLst>
       <p:ext uri="{BB962C8B-B14F-4D97-AF65-F5344CB8AC3E}">
-        <p14:creationId xmlns:p14="http://schemas.microsoft.com/office/powerpoint/2010/main" val="2880906100"/>
+        <p14:creationId xmlns:p14="http://schemas.microsoft.com/office/powerpoint/2010/main" val="2424331431"/>
       </p:ext>
     </p:extLst>
   </p:cSld>
@@ -2216,17 +2071,17 @@
           <a:p>
             <a:pPr rtl="0"/>
             <a:fld id="{017105BD-6D6F-49DB-9DE4-D4A6452D7E5F}" type="slidenum">
-              <a:rPr lang="es-ES" altLang="zh-CN" smtClean="0"/>
-              <a:t>12</a:t>
+              <a:rPr lang="es-ES" altLang="zh-CN" noProof="0" smtClean="0"/>
+              <a:t>10</a:t>
             </a:fld>
-            <a:endParaRPr lang="es-ES" altLang="zh-CN" dirty="0"/>
+            <a:endParaRPr lang="es-ES" altLang="zh-CN" noProof="0" dirty="0"/>
           </a:p>
         </p:txBody>
       </p:sp>
     </p:spTree>
     <p:extLst>
       <p:ext uri="{BB962C8B-B14F-4D97-AF65-F5344CB8AC3E}">
-        <p14:creationId xmlns:p14="http://schemas.microsoft.com/office/powerpoint/2010/main" val="2424331431"/>
+        <p14:creationId xmlns:p14="http://schemas.microsoft.com/office/powerpoint/2010/main" val="4245785649"/>
       </p:ext>
     </p:extLst>
   </p:cSld>
@@ -24647,10 +24502,10 @@
       </p:grpSpPr>
       <p:sp>
         <p:nvSpPr>
-          <p:cNvPr id="7" name="Marcador de número de diapositiva 6">
-            <a:extLst>
-              <a:ext uri="{FF2B5EF4-FFF2-40B4-BE49-F238E27FC236}">
-                <a16:creationId xmlns:a16="http://schemas.microsoft.com/office/drawing/2014/main" id="{8EA25C86-7BE3-4BC6-C0B8-7F7D7C3EC286}"/>
+          <p:cNvPr id="17" name="Título 16">
+            <a:extLst>
+              <a:ext uri="{FF2B5EF4-FFF2-40B4-BE49-F238E27FC236}">
+                <a16:creationId xmlns:a16="http://schemas.microsoft.com/office/drawing/2014/main" id="{E17942FE-65D3-7C03-B361-8DF125B81DC1}"/>
               </a:ext>
             </a:extLst>
           </p:cNvPr>
@@ -24658,7 +24513,515 @@
             <a:spLocks noGrp="1"/>
           </p:cNvSpPr>
           <p:nvPr>
-            <p:ph type="sldNum" sz="quarter" idx="29"/>
+            <p:ph type="title"/>
+          </p:nvPr>
+        </p:nvSpPr>
+        <p:spPr/>
+        <p:txBody>
+          <a:bodyPr rtlCol="0"/>
+          <a:lstStyle>
+            <a:defPPr>
+              <a:defRPr lang="es-ES"/>
+            </a:defPPr>
+          </a:lstStyle>
+          <a:p>
+            <a:pPr rtl="0"/>
+            <a:r>
+              <a:rPr lang="es-MX" sz="3200" dirty="0"/>
+              <a:t>Estimaciones 2018 a 2022</a:t>
+            </a:r>
+            <a:endParaRPr lang="es-ES" sz="3200" dirty="0"/>
+          </a:p>
+        </p:txBody>
+      </p:sp>
+      <p:sp>
+        <p:nvSpPr>
+          <p:cNvPr id="63" name="Marcador de texto 62">
+            <a:extLst>
+              <a:ext uri="{FF2B5EF4-FFF2-40B4-BE49-F238E27FC236}">
+                <a16:creationId xmlns:a16="http://schemas.microsoft.com/office/drawing/2014/main" id="{22D79EB2-B914-5355-4D75-3AC59F0DCCC3}"/>
+              </a:ext>
+            </a:extLst>
+          </p:cNvPr>
+          <p:cNvSpPr>
+            <a:spLocks noGrp="1"/>
+          </p:cNvSpPr>
+          <p:nvPr>
+            <p:ph type="body" sz="quarter" idx="27"/>
+          </p:nvPr>
+        </p:nvSpPr>
+        <p:spPr>
+          <a:xfrm>
+            <a:off x="1507136" y="3630706"/>
+            <a:ext cx="1877575" cy="506399"/>
+          </a:xfrm>
+        </p:spPr>
+        <p:txBody>
+          <a:bodyPr rtlCol="0"/>
+          <a:lstStyle>
+            <a:defPPr>
+              <a:defRPr lang="es-ES"/>
+            </a:defPPr>
+          </a:lstStyle>
+          <a:p>
+            <a:pPr rtl="0"/>
+            <a:r>
+              <a:rPr lang="es-MX" dirty="0"/>
+              <a:t>New York</a:t>
+            </a:r>
+            <a:endParaRPr lang="es-ES" dirty="0"/>
+          </a:p>
+        </p:txBody>
+      </p:sp>
+      <p:sp>
+        <p:nvSpPr>
+          <p:cNvPr id="16" name="Marcador de posición de imagen 15">
+            <a:extLst>
+              <a:ext uri="{FF2B5EF4-FFF2-40B4-BE49-F238E27FC236}">
+                <a16:creationId xmlns:a16="http://schemas.microsoft.com/office/drawing/2014/main" id="{7BD10CEB-2241-4246-B0F4-96E0DB642C4C}"/>
+              </a:ext>
+            </a:extLst>
+          </p:cNvPr>
+          <p:cNvSpPr>
+            <a:spLocks noGrp="1"/>
+          </p:cNvSpPr>
+          <p:nvPr>
+            <p:ph type="body" sz="quarter" idx="28"/>
+          </p:nvPr>
+        </p:nvSpPr>
+        <p:spPr>
+          <a:xfrm>
+            <a:off x="1507135" y="4296932"/>
+            <a:ext cx="1877575" cy="1135574"/>
+          </a:xfrm>
+        </p:spPr>
+        <p:txBody>
+          <a:bodyPr rtlCol="0"/>
+          <a:lstStyle>
+            <a:defPPr>
+              <a:defRPr lang="es-ES"/>
+            </a:defPPr>
+          </a:lstStyle>
+          <a:p>
+            <a:pPr rtl="0"/>
+            <a:r>
+              <a:rPr lang="es-ES" noProof="0" dirty="0"/>
+              <a:t>Aumento exponencial desde 2,816,217 a 3,180,696</a:t>
+            </a:r>
+          </a:p>
+          <a:p>
+            <a:pPr rtl="0"/>
+            <a:endParaRPr lang="es-ES" dirty="0"/>
+          </a:p>
+          <a:p>
+            <a:pPr rtl="0"/>
+            <a:r>
+              <a:rPr lang="es-ES" noProof="0" dirty="0"/>
+              <a:t>R2: 88%</a:t>
+            </a:r>
+          </a:p>
+          <a:p>
+            <a:pPr rtl="0"/>
+            <a:endParaRPr lang="es-ES" altLang="en-US" dirty="0"/>
+          </a:p>
+        </p:txBody>
+      </p:sp>
+      <p:sp>
+        <p:nvSpPr>
+          <p:cNvPr id="65" name="Marcador de texto 64">
+            <a:extLst>
+              <a:ext uri="{FF2B5EF4-FFF2-40B4-BE49-F238E27FC236}">
+                <a16:creationId xmlns:a16="http://schemas.microsoft.com/office/drawing/2014/main" id="{0ECD9490-0BE0-6A65-01CD-D54CAB839511}"/>
+              </a:ext>
+            </a:extLst>
+          </p:cNvPr>
+          <p:cNvSpPr>
+            <a:spLocks noGrp="1"/>
+          </p:cNvSpPr>
+          <p:nvPr>
+            <p:ph type="body" sz="quarter" idx="38"/>
+          </p:nvPr>
+        </p:nvSpPr>
+        <p:spPr>
+          <a:xfrm>
+            <a:off x="3902350" y="2181541"/>
+            <a:ext cx="1877575" cy="506399"/>
+          </a:xfrm>
+        </p:spPr>
+        <p:txBody>
+          <a:bodyPr rtlCol="0"/>
+          <a:lstStyle>
+            <a:defPPr>
+              <a:defRPr lang="es-ES"/>
+            </a:defPPr>
+          </a:lstStyle>
+          <a:p>
+            <a:pPr rtl="0"/>
+            <a:r>
+              <a:rPr lang="es-ES" dirty="0"/>
+              <a:t>Charleston</a:t>
+            </a:r>
+          </a:p>
+        </p:txBody>
+      </p:sp>
+      <p:sp>
+        <p:nvSpPr>
+          <p:cNvPr id="19" name="Marcador de posición de imagen 18">
+            <a:extLst>
+              <a:ext uri="{FF2B5EF4-FFF2-40B4-BE49-F238E27FC236}">
+                <a16:creationId xmlns:a16="http://schemas.microsoft.com/office/drawing/2014/main" id="{78038ACE-740A-4AE7-A0B3-BEEA90495BDD}"/>
+              </a:ext>
+            </a:extLst>
+          </p:cNvPr>
+          <p:cNvSpPr>
+            <a:spLocks noGrp="1"/>
+          </p:cNvSpPr>
+          <p:nvPr>
+            <p:ph type="body" sz="quarter" idx="39"/>
+          </p:nvPr>
+        </p:nvSpPr>
+        <p:spPr>
+          <a:xfrm>
+            <a:off x="3902349" y="2789693"/>
+            <a:ext cx="1877575" cy="1058240"/>
+          </a:xfrm>
+        </p:spPr>
+        <p:txBody>
+          <a:bodyPr rtlCol="0"/>
+          <a:lstStyle>
+            <a:defPPr>
+              <a:defRPr lang="es-ES"/>
+            </a:defPPr>
+          </a:lstStyle>
+          <a:p>
+            <a:pPr lvl="0" rtl="0"/>
+            <a:r>
+              <a:rPr lang="es-ES" noProof="0" dirty="0"/>
+              <a:t>Modelo Holt-</a:t>
+            </a:r>
+            <a:r>
+              <a:rPr lang="es-ES" noProof="0" dirty="0" err="1"/>
+              <a:t>Winters</a:t>
+            </a:r>
+            <a:r>
+              <a:rPr lang="es-ES" noProof="0" dirty="0"/>
+              <a:t>.</a:t>
+            </a:r>
+          </a:p>
+          <a:p>
+            <a:pPr lvl="0" rtl="0"/>
+            <a:r>
+              <a:rPr lang="es-ES" noProof="0" dirty="0"/>
+              <a:t>Varia entre 7,401,470 y 8,060,011</a:t>
+            </a:r>
+          </a:p>
+        </p:txBody>
+      </p:sp>
+      <p:sp>
+        <p:nvSpPr>
+          <p:cNvPr id="67" name="Marcador de texto 66">
+            <a:extLst>
+              <a:ext uri="{FF2B5EF4-FFF2-40B4-BE49-F238E27FC236}">
+                <a16:creationId xmlns:a16="http://schemas.microsoft.com/office/drawing/2014/main" id="{CEEED1DD-BCBD-5246-2A2C-BCED87782D53}"/>
+              </a:ext>
+            </a:extLst>
+          </p:cNvPr>
+          <p:cNvSpPr>
+            <a:spLocks noGrp="1"/>
+          </p:cNvSpPr>
+          <p:nvPr>
+            <p:ph type="body" sz="quarter" idx="40"/>
+          </p:nvPr>
+        </p:nvSpPr>
+        <p:spPr>
+          <a:xfrm>
+            <a:off x="5107230" y="4297868"/>
+            <a:ext cx="1877575" cy="506399"/>
+          </a:xfrm>
+        </p:spPr>
+        <p:txBody>
+          <a:bodyPr rtlCol="0"/>
+          <a:lstStyle>
+            <a:defPPr>
+              <a:defRPr lang="es-ES"/>
+            </a:defPPr>
+          </a:lstStyle>
+          <a:p>
+            <a:pPr rtl="0"/>
+            <a:r>
+              <a:rPr lang="es-ES" dirty="0"/>
+              <a:t>Savannah</a:t>
+            </a:r>
+          </a:p>
+        </p:txBody>
+      </p:sp>
+      <p:sp>
+        <p:nvSpPr>
+          <p:cNvPr id="21" name="Marcador de posición de imagen 20">
+            <a:extLst>
+              <a:ext uri="{FF2B5EF4-FFF2-40B4-BE49-F238E27FC236}">
+                <a16:creationId xmlns:a16="http://schemas.microsoft.com/office/drawing/2014/main" id="{DD441F7A-4624-45D2-AE88-EEBA65185E6D}"/>
+              </a:ext>
+            </a:extLst>
+          </p:cNvPr>
+          <p:cNvSpPr>
+            <a:spLocks noGrp="1"/>
+          </p:cNvSpPr>
+          <p:nvPr>
+            <p:ph type="body" sz="quarter" idx="41"/>
+          </p:nvPr>
+        </p:nvSpPr>
+        <p:spPr>
+          <a:xfrm>
+            <a:off x="5107230" y="4926238"/>
+            <a:ext cx="2015465" cy="1055197"/>
+          </a:xfrm>
+        </p:spPr>
+        <p:txBody>
+          <a:bodyPr rtlCol="0"/>
+          <a:lstStyle>
+            <a:defPPr>
+              <a:defRPr lang="es-ES"/>
+            </a:defPPr>
+          </a:lstStyle>
+          <a:p>
+            <a:pPr rtl="0"/>
+            <a:r>
+              <a:rPr lang="es-ES" noProof="0" dirty="0"/>
+              <a:t>Crecimiento Exponencial. R2: 94%</a:t>
+            </a:r>
+          </a:p>
+          <a:p>
+            <a:pPr rtl="0"/>
+            <a:r>
+              <a:rPr lang="es-ES" noProof="0" dirty="0"/>
+              <a:t>1,445,465 al 2,018,848</a:t>
+            </a:r>
+          </a:p>
+          <a:p>
+            <a:pPr rtl="0"/>
+            <a:endParaRPr lang="es-ES" altLang="en-US" dirty="0"/>
+          </a:p>
+        </p:txBody>
+      </p:sp>
+      <p:sp>
+        <p:nvSpPr>
+          <p:cNvPr id="69" name="Marcador de texto 68">
+            <a:extLst>
+              <a:ext uri="{FF2B5EF4-FFF2-40B4-BE49-F238E27FC236}">
+                <a16:creationId xmlns:a16="http://schemas.microsoft.com/office/drawing/2014/main" id="{868536F0-BECB-41C2-208F-CAAC89E244FF}"/>
+              </a:ext>
+            </a:extLst>
+          </p:cNvPr>
+          <p:cNvSpPr>
+            <a:spLocks noGrp="1"/>
+          </p:cNvSpPr>
+          <p:nvPr>
+            <p:ph type="body" sz="quarter" idx="42"/>
+          </p:nvPr>
+        </p:nvSpPr>
+        <p:spPr/>
+        <p:txBody>
+          <a:bodyPr rtlCol="0"/>
+          <a:lstStyle>
+            <a:defPPr>
+              <a:defRPr lang="es-ES"/>
+            </a:defPPr>
+          </a:lstStyle>
+          <a:p>
+            <a:pPr rtl="0"/>
+            <a:r>
+              <a:rPr lang="es-ES" dirty="0"/>
+              <a:t>Miami, FL</a:t>
+            </a:r>
+          </a:p>
+        </p:txBody>
+      </p:sp>
+      <p:sp>
+        <p:nvSpPr>
+          <p:cNvPr id="23" name="Marcador de posición de imagen 22">
+            <a:extLst>
+              <a:ext uri="{FF2B5EF4-FFF2-40B4-BE49-F238E27FC236}">
+                <a16:creationId xmlns:a16="http://schemas.microsoft.com/office/drawing/2014/main" id="{4EF68FE0-ADE3-4AB5-AC04-6C029B601AB2}"/>
+              </a:ext>
+            </a:extLst>
+          </p:cNvPr>
+          <p:cNvSpPr>
+            <a:spLocks noGrp="1"/>
+          </p:cNvSpPr>
+          <p:nvPr>
+            <p:ph type="body" sz="quarter" idx="43"/>
+          </p:nvPr>
+        </p:nvSpPr>
+        <p:spPr>
+          <a:xfrm>
+            <a:off x="7501941" y="5051156"/>
+            <a:ext cx="1877575" cy="930279"/>
+          </a:xfrm>
+        </p:spPr>
+        <p:txBody>
+          <a:bodyPr rtlCol="0"/>
+          <a:lstStyle>
+            <a:defPPr>
+              <a:defRPr lang="es-ES"/>
+            </a:defPPr>
+          </a:lstStyle>
+          <a:p>
+            <a:pPr rtl="0"/>
+            <a:r>
+              <a:rPr lang="es-ES" dirty="0"/>
+              <a:t>Periodicidad de 5 y estacionalidad aditiva.</a:t>
+            </a:r>
+          </a:p>
+          <a:p>
+            <a:pPr rtl="0"/>
+            <a:r>
+              <a:rPr lang="es-ES" dirty="0"/>
+              <a:t>De 3,871,869 a 4,367,544</a:t>
+            </a:r>
+          </a:p>
+          <a:p>
+            <a:pPr rtl="0"/>
+            <a:endParaRPr lang="es-ES" altLang="en-US" dirty="0"/>
+          </a:p>
+        </p:txBody>
+      </p:sp>
+      <p:sp>
+        <p:nvSpPr>
+          <p:cNvPr id="71" name="Marcador de texto 70">
+            <a:extLst>
+              <a:ext uri="{FF2B5EF4-FFF2-40B4-BE49-F238E27FC236}">
+                <a16:creationId xmlns:a16="http://schemas.microsoft.com/office/drawing/2014/main" id="{FAFB92ED-EE9E-1E13-228D-2A33EE0B2FC2}"/>
+              </a:ext>
+            </a:extLst>
+          </p:cNvPr>
+          <p:cNvSpPr>
+            <a:spLocks noGrp="1"/>
+          </p:cNvSpPr>
+          <p:nvPr>
+            <p:ph type="body" sz="quarter" idx="44"/>
+          </p:nvPr>
+        </p:nvSpPr>
+        <p:spPr>
+          <a:xfrm>
+            <a:off x="8686592" y="1992322"/>
+            <a:ext cx="1877575" cy="506399"/>
+          </a:xfrm>
+        </p:spPr>
+        <p:txBody>
+          <a:bodyPr rtlCol="0"/>
+          <a:lstStyle>
+            <a:defPPr>
+              <a:defRPr lang="es-ES"/>
+            </a:defPPr>
+          </a:lstStyle>
+          <a:p>
+            <a:pPr rtl="0"/>
+            <a:r>
+              <a:rPr lang="es-ES" dirty="0"/>
+              <a:t>Los Ángeles</a:t>
+            </a:r>
+          </a:p>
+        </p:txBody>
+      </p:sp>
+      <p:sp>
+        <p:nvSpPr>
+          <p:cNvPr id="25" name="Marcador de posición de imagen 24">
+            <a:extLst>
+              <a:ext uri="{FF2B5EF4-FFF2-40B4-BE49-F238E27FC236}">
+                <a16:creationId xmlns:a16="http://schemas.microsoft.com/office/drawing/2014/main" id="{5140B95D-A59E-4E6C-BF07-5DD5E0E818A0}"/>
+              </a:ext>
+            </a:extLst>
+          </p:cNvPr>
+          <p:cNvSpPr>
+            <a:spLocks noGrp="1"/>
+          </p:cNvSpPr>
+          <p:nvPr>
+            <p:ph type="body" sz="quarter" idx="45"/>
+          </p:nvPr>
+        </p:nvSpPr>
+        <p:spPr>
+          <a:xfrm>
+            <a:off x="8686592" y="2570550"/>
+            <a:ext cx="1877575" cy="1379417"/>
+          </a:xfrm>
+        </p:spPr>
+        <p:txBody>
+          <a:bodyPr rtlCol="0"/>
+          <a:lstStyle>
+            <a:defPPr>
+              <a:defRPr lang="es-ES"/>
+            </a:defPPr>
+          </a:lstStyle>
+          <a:p>
+            <a:pPr rtl="0"/>
+            <a:r>
+              <a:rPr lang="es-MX" dirty="0"/>
+              <a:t>Cuando aumentan las importaciones en Los </a:t>
+            </a:r>
+            <a:r>
+              <a:rPr lang="es-MX" dirty="0" err="1"/>
+              <a:t>Angeles</a:t>
+            </a:r>
+            <a:r>
+              <a:rPr lang="es-MX" dirty="0"/>
+              <a:t>, generalmente también aumentan en New York</a:t>
+            </a:r>
+            <a:endParaRPr lang="es-ES" altLang="en-US" dirty="0"/>
+          </a:p>
+        </p:txBody>
+      </p:sp>
+      <p:sp>
+        <p:nvSpPr>
+          <p:cNvPr id="4" name="Marcador de pie de página 3">
+            <a:extLst>
+              <a:ext uri="{FF2B5EF4-FFF2-40B4-BE49-F238E27FC236}">
+                <a16:creationId xmlns:a16="http://schemas.microsoft.com/office/drawing/2014/main" id="{36404519-33C1-DA61-9858-3858F30C7808}"/>
+              </a:ext>
+            </a:extLst>
+          </p:cNvPr>
+          <p:cNvSpPr>
+            <a:spLocks noGrp="1"/>
+          </p:cNvSpPr>
+          <p:nvPr>
+            <p:ph type="ftr" sz="quarter" idx="46"/>
+          </p:nvPr>
+        </p:nvSpPr>
+        <p:spPr/>
+        <p:txBody>
+          <a:bodyPr rtlCol="0"/>
+          <a:lstStyle>
+            <a:defPPr>
+              <a:defRPr lang="es-ES"/>
+            </a:defPPr>
+          </a:lstStyle>
+          <a:p>
+            <a:pPr rtl="0"/>
+            <a:r>
+              <a:rPr lang="es-ES" dirty="0"/>
+              <a:t>Valores en </a:t>
+            </a:r>
+            <a:r>
+              <a:rPr lang="es-ES" b="1" dirty="0"/>
+              <a:t>Toneladas Métricas</a:t>
+            </a:r>
+          </a:p>
+        </p:txBody>
+      </p:sp>
+      <p:sp>
+        <p:nvSpPr>
+          <p:cNvPr id="5" name="Marcador de número de diapositiva 4">
+            <a:extLst>
+              <a:ext uri="{FF2B5EF4-FFF2-40B4-BE49-F238E27FC236}">
+                <a16:creationId xmlns:a16="http://schemas.microsoft.com/office/drawing/2014/main" id="{302DD1EA-9A0C-9303-AD79-5DAF401390EB}"/>
+              </a:ext>
+            </a:extLst>
+          </p:cNvPr>
+          <p:cNvSpPr>
+            <a:spLocks noGrp="1"/>
+          </p:cNvSpPr>
+          <p:nvPr>
+            <p:ph type="sldNum" sz="quarter" idx="47"/>
           </p:nvPr>
         </p:nvSpPr>
         <p:spPr/>
@@ -24680,70 +25043,10 @@
           </a:p>
         </p:txBody>
       </p:sp>
-      <p:pic>
-        <p:nvPicPr>
-          <p:cNvPr id="9" name="Picture 8">
-            <a:extLst>
-              <a:ext uri="{FF2B5EF4-FFF2-40B4-BE49-F238E27FC236}">
-                <a16:creationId xmlns:a16="http://schemas.microsoft.com/office/drawing/2014/main" id="{6D25DC0E-B6BA-518F-2EE8-F88B0E7FB79E}"/>
-              </a:ext>
-            </a:extLst>
-          </p:cNvPr>
-          <p:cNvPicPr>
-            <a:picLocks noChangeAspect="1"/>
-          </p:cNvPicPr>
-          <p:nvPr/>
-        </p:nvPicPr>
-        <p:blipFill>
-          <a:blip r:embed="rId3"/>
-          <a:stretch>
-            <a:fillRect/>
-          </a:stretch>
-        </p:blipFill>
-        <p:spPr>
-          <a:xfrm>
-            <a:off x="145576" y="206970"/>
-            <a:ext cx="11900848" cy="1760406"/>
-          </a:xfrm>
-          <a:prstGeom prst="rect">
-            <a:avLst/>
-          </a:prstGeom>
-        </p:spPr>
-      </p:pic>
-      <p:pic>
-        <p:nvPicPr>
-          <p:cNvPr id="12" name="Picture 11">
-            <a:extLst>
-              <a:ext uri="{FF2B5EF4-FFF2-40B4-BE49-F238E27FC236}">
-                <a16:creationId xmlns:a16="http://schemas.microsoft.com/office/drawing/2014/main" id="{95D5CD4E-FF87-46D5-8EBA-75738BCE53CE}"/>
-              </a:ext>
-            </a:extLst>
-          </p:cNvPr>
-          <p:cNvPicPr>
-            <a:picLocks noChangeAspect="1"/>
-          </p:cNvPicPr>
-          <p:nvPr/>
-        </p:nvPicPr>
-        <p:blipFill>
-          <a:blip r:embed="rId4"/>
-          <a:stretch>
-            <a:fillRect/>
-          </a:stretch>
-        </p:blipFill>
-        <p:spPr>
-          <a:xfrm>
-            <a:off x="145576" y="2359447"/>
-            <a:ext cx="8583166" cy="4291583"/>
-          </a:xfrm>
-          <a:prstGeom prst="rect">
-            <a:avLst/>
-          </a:prstGeom>
-        </p:spPr>
-      </p:pic>
     </p:spTree>
     <p:extLst>
       <p:ext uri="{BB962C8B-B14F-4D97-AF65-F5344CB8AC3E}">
-        <p14:creationId xmlns:p14="http://schemas.microsoft.com/office/powerpoint/2010/main" val="1246021298"/>
+        <p14:creationId xmlns:p14="http://schemas.microsoft.com/office/powerpoint/2010/main" val="3760906987"/>
       </p:ext>
     </p:extLst>
   </p:cSld>
@@ -24754,137 +25057,6 @@
 </file>
 
 <file path=ppt/slides/slide11.xml><?xml version="1.0" encoding="utf-8"?>
-<p:sld xmlns:a="http://schemas.openxmlformats.org/drawingml/2006/main" xmlns:r="http://schemas.openxmlformats.org/officeDocument/2006/relationships" xmlns:p="http://schemas.openxmlformats.org/presentationml/2006/main">
-  <p:cSld>
-    <p:spTree>
-      <p:nvGrpSpPr>
-        <p:cNvPr id="1" name="">
-          <a:extLst>
-            <a:ext uri="{FF2B5EF4-FFF2-40B4-BE49-F238E27FC236}">
-              <a16:creationId xmlns:a16="http://schemas.microsoft.com/office/drawing/2014/main" id="{51882D53-0323-EC95-6D78-A6B0325A5DD5}"/>
-            </a:ext>
-          </a:extLst>
-        </p:cNvPr>
-        <p:cNvGrpSpPr/>
-        <p:nvPr/>
-      </p:nvGrpSpPr>
-      <p:grpSpPr>
-        <a:xfrm>
-          <a:off x="0" y="0"/>
-          <a:ext cx="0" cy="0"/>
-          <a:chOff x="0" y="0"/>
-          <a:chExt cx="0" cy="0"/>
-        </a:xfrm>
-      </p:grpSpPr>
-      <p:sp>
-        <p:nvSpPr>
-          <p:cNvPr id="2" name="Title 1">
-            <a:extLst>
-              <a:ext uri="{FF2B5EF4-FFF2-40B4-BE49-F238E27FC236}">
-                <a16:creationId xmlns:a16="http://schemas.microsoft.com/office/drawing/2014/main" id="{2628ADD7-96F0-B8F2-B6A1-993D988D5F18}"/>
-              </a:ext>
-            </a:extLst>
-          </p:cNvPr>
-          <p:cNvSpPr>
-            <a:spLocks noGrp="1"/>
-          </p:cNvSpPr>
-          <p:nvPr>
-            <p:ph type="title"/>
-          </p:nvPr>
-        </p:nvSpPr>
-        <p:spPr>
-          <a:xfrm>
-            <a:off x="5961888" y="1358649"/>
-            <a:ext cx="4969974" cy="2120242"/>
-          </a:xfrm>
-        </p:spPr>
-        <p:txBody>
-          <a:bodyPr/>
-          <a:lstStyle/>
-          <a:p>
-            <a:r>
-              <a:rPr lang="es-MX" sz="4000" dirty="0"/>
-              <a:t>¿Qué descubrió de la investigación?</a:t>
-            </a:r>
-            <a:endParaRPr lang="es-PA" sz="4000" dirty="0"/>
-          </a:p>
-        </p:txBody>
-      </p:sp>
-      <p:sp>
-        <p:nvSpPr>
-          <p:cNvPr id="4" name="Footer Placeholder 3">
-            <a:extLst>
-              <a:ext uri="{FF2B5EF4-FFF2-40B4-BE49-F238E27FC236}">
-                <a16:creationId xmlns:a16="http://schemas.microsoft.com/office/drawing/2014/main" id="{5F12CB42-CE7E-A859-E4BA-68C535D78FB6}"/>
-              </a:ext>
-            </a:extLst>
-          </p:cNvPr>
-          <p:cNvSpPr>
-            <a:spLocks noGrp="1"/>
-          </p:cNvSpPr>
-          <p:nvPr>
-            <p:ph type="ftr" sz="quarter" idx="30"/>
-          </p:nvPr>
-        </p:nvSpPr>
-        <p:spPr/>
-        <p:txBody>
-          <a:bodyPr/>
-          <a:lstStyle/>
-          <a:p>
-            <a:pPr rtl="0"/>
-            <a:r>
-              <a:rPr lang="es-ES" noProof="0"/>
-              <a:t>Título de la presentación</a:t>
-            </a:r>
-            <a:endParaRPr lang="es-ES" noProof="0" dirty="0"/>
-          </a:p>
-        </p:txBody>
-      </p:sp>
-      <p:sp>
-        <p:nvSpPr>
-          <p:cNvPr id="5" name="Slide Number Placeholder 4">
-            <a:extLst>
-              <a:ext uri="{FF2B5EF4-FFF2-40B4-BE49-F238E27FC236}">
-                <a16:creationId xmlns:a16="http://schemas.microsoft.com/office/drawing/2014/main" id="{E608BEDE-5531-82F2-7E4F-50F41D63AAB3}"/>
-              </a:ext>
-            </a:extLst>
-          </p:cNvPr>
-          <p:cNvSpPr>
-            <a:spLocks noGrp="1"/>
-          </p:cNvSpPr>
-          <p:nvPr>
-            <p:ph type="sldNum" sz="quarter" idx="31"/>
-          </p:nvPr>
-        </p:nvSpPr>
-        <p:spPr/>
-        <p:txBody>
-          <a:bodyPr/>
-          <a:lstStyle/>
-          <a:p>
-            <a:pPr rtl="0"/>
-            <a:fld id="{47FEACEE-25B4-4A2D-B147-27296E36371D}" type="slidenum">
-              <a:rPr lang="es-ES" altLang="zh-CN" noProof="0" smtClean="0"/>
-              <a:pPr rtl="0"/>
-              <a:t>11</a:t>
-            </a:fld>
-            <a:endParaRPr lang="es-ES" altLang="zh-CN" noProof="0" dirty="0"/>
-          </a:p>
-        </p:txBody>
-      </p:sp>
-    </p:spTree>
-    <p:extLst>
-      <p:ext uri="{BB962C8B-B14F-4D97-AF65-F5344CB8AC3E}">
-        <p14:creationId xmlns:p14="http://schemas.microsoft.com/office/powerpoint/2010/main" val="573478233"/>
-      </p:ext>
-    </p:extLst>
-  </p:cSld>
-  <p:clrMapOvr>
-    <a:masterClrMapping/>
-  </p:clrMapOvr>
-</p:sld>
-</file>
-
-<file path=ppt/slides/slide12.xml><?xml version="1.0" encoding="utf-8"?>
 <p:sld xmlns:a="http://schemas.openxmlformats.org/drawingml/2006/main" xmlns:r="http://schemas.openxmlformats.org/officeDocument/2006/relationships" xmlns:p="http://schemas.openxmlformats.org/presentationml/2006/main">
   <p:cSld>
     <p:spTree>
@@ -24903,10 +25075,10 @@
       </p:grpSpPr>
       <p:sp>
         <p:nvSpPr>
-          <p:cNvPr id="8" name="Título 7">
-            <a:extLst>
-              <a:ext uri="{FF2B5EF4-FFF2-40B4-BE49-F238E27FC236}">
-                <a16:creationId xmlns:a16="http://schemas.microsoft.com/office/drawing/2014/main" id="{721E73BA-53B9-C0C1-476A-00736A64AB79}"/>
+          <p:cNvPr id="6" name="Título 5">
+            <a:extLst>
+              <a:ext uri="{FF2B5EF4-FFF2-40B4-BE49-F238E27FC236}">
+                <a16:creationId xmlns:a16="http://schemas.microsoft.com/office/drawing/2014/main" id="{4EFA9173-F892-5C7D-99AF-4C5FFB1532B4}"/>
               </a:ext>
             </a:extLst>
           </p:cNvPr>
@@ -24928,86 +25100,18 @@
           <a:p>
             <a:pPr rtl="0"/>
             <a:r>
-              <a:rPr lang="es-MX" sz="2400" dirty="0"/>
-              <a:t>¿Si fuese a hacer este estudio de nuevo ¿qué haría mejor?</a:t>
+              <a:rPr lang="es-ES" dirty="0"/>
+              <a:t>Conclusión</a:t>
             </a:r>
-            <a:endParaRPr lang="es-ES" sz="2400" dirty="0"/>
-          </a:p>
-        </p:txBody>
-      </p:sp>
-      <p:pic>
-        <p:nvPicPr>
-          <p:cNvPr id="192" name="Marcador de posición de imagen 191" descr="Ábaco con relleno sólido">
-            <a:extLst>
-              <a:ext uri="{FF2B5EF4-FFF2-40B4-BE49-F238E27FC236}">
-                <a16:creationId xmlns:a16="http://schemas.microsoft.com/office/drawing/2014/main" id="{03D5E3D1-D423-EF5A-EE43-00CF1BD7FF63}"/>
-              </a:ext>
-            </a:extLst>
-          </p:cNvPr>
-          <p:cNvPicPr>
-            <a:picLocks noGrp="1" noChangeAspect="1"/>
-          </p:cNvPicPr>
-          <p:nvPr>
-            <p:ph type="pic" sz="quarter" idx="36"/>
-          </p:nvPr>
-        </p:nvPicPr>
-        <p:blipFill>
-          <a:blip r:embed="rId3" cstate="print">
-            <a:extLst>
-              <a:ext uri="{28A0092B-C50C-407E-A947-70E740481C1C}">
-                <a14:useLocalDpi xmlns:a14="http://schemas.microsoft.com/office/drawing/2010/main"/>
-              </a:ext>
-              <a:ext uri="{96DAC541-7B7A-43D3-8B79-37D633B846F1}">
-                <asvg:svgBlip xmlns:asvg="http://schemas.microsoft.com/office/drawing/2016/SVG/main" r:embed="rId4"/>
-              </a:ext>
-            </a:extLst>
-          </a:blip>
-          <a:srcRect l="5182" r="5182"/>
-          <a:stretch>
-            <a:fillRect/>
-          </a:stretch>
-        </p:blipFill>
-        <p:spPr/>
-      </p:pic>
-      <p:sp>
-        <p:nvSpPr>
-          <p:cNvPr id="9" name="Marcador de texto 8">
-            <a:extLst>
-              <a:ext uri="{FF2B5EF4-FFF2-40B4-BE49-F238E27FC236}">
-                <a16:creationId xmlns:a16="http://schemas.microsoft.com/office/drawing/2014/main" id="{FA96FE97-5E27-FC36-5E3A-511A31E6C789}"/>
-              </a:ext>
-            </a:extLst>
-          </p:cNvPr>
-          <p:cNvSpPr>
-            <a:spLocks noGrp="1"/>
-          </p:cNvSpPr>
-          <p:nvPr>
-            <p:ph type="body" sz="quarter" idx="27"/>
-          </p:nvPr>
-        </p:nvSpPr>
-        <p:spPr/>
-        <p:txBody>
-          <a:bodyPr rtlCol="0"/>
-          <a:lstStyle>
-            <a:defPPr>
-              <a:defRPr lang="es-ES"/>
-            </a:defPPr>
-          </a:lstStyle>
-          <a:p>
-            <a:pPr rtl="0"/>
-            <a:r>
-              <a:rPr lang="es-ES" dirty="0"/>
-              <a:t>Retorno sobre la inversión (ROI)</a:t>
-            </a:r>
-          </a:p>
-        </p:txBody>
-      </p:sp>
-      <p:sp>
-        <p:nvSpPr>
-          <p:cNvPr id="10" name="Marcador de texto 9">
-            <a:extLst>
-              <a:ext uri="{FF2B5EF4-FFF2-40B4-BE49-F238E27FC236}">
-                <a16:creationId xmlns:a16="http://schemas.microsoft.com/office/drawing/2014/main" id="{4CE5DE1C-24E7-3841-9376-89E91B4A4762}"/>
+          </a:p>
+        </p:txBody>
+      </p:sp>
+      <p:sp>
+        <p:nvSpPr>
+          <p:cNvPr id="29" name="Marcador de texto 28">
+            <a:extLst>
+              <a:ext uri="{FF2B5EF4-FFF2-40B4-BE49-F238E27FC236}">
+                <a16:creationId xmlns:a16="http://schemas.microsoft.com/office/drawing/2014/main" id="{52FD53DB-CD39-2575-F8BA-63488E81091E}"/>
               </a:ext>
             </a:extLst>
           </p:cNvPr>
@@ -25029,885 +25133,9 @@
           <a:p>
             <a:pPr rtl="0"/>
             <a:r>
-              <a:rPr lang="es-ES" dirty="0"/>
-              <a:t>Previsión de conocimientos basados en los medios de comunicación y las estrategias de crecimiento en diversos medios</a:t>
+              <a:rPr lang="es-MX" dirty="0"/>
+              <a:t>El análisis de las importaciones en los principales puertos de la costa este de Estados Unidos entre 2000 y 2017 revela una tendencia de crecimiento sostenido, reflejo del fortalecimiento del comercio internacional y del rol estratégico que estos puertos desempeñan en la logística global. Puertos como New York, NY, Savannah, GA y Charleston, SC han mostrado aumentos significativos en el volumen de mercancías recibidas, impulsados por la creciente demanda de bienes de consumo, maquinaria y productos electrónicos, en su mayoría provenientes de Asia.</a:t>
             </a:r>
-          </a:p>
-          <a:p>
-            <a:pPr rtl="0"/>
-            <a:r>
-              <a:rPr lang="es-ES" dirty="0"/>
-              <a:t>Visualización del capital intelectual de calidad</a:t>
-            </a:r>
-          </a:p>
-          <a:p>
-            <a:pPr rtl="0"/>
-            <a:r>
-              <a:rPr lang="es-ES" dirty="0"/>
-              <a:t>Incorporación de metodologías internacionales con tecnologías habilitadas para Web</a:t>
-            </a:r>
-          </a:p>
-          <a:p>
-            <a:pPr rtl="0"/>
-            <a:endParaRPr lang="es-ES" dirty="0"/>
-          </a:p>
-        </p:txBody>
-      </p:sp>
-      <p:pic>
-        <p:nvPicPr>
-          <p:cNvPr id="194" name="Marcador de posición de imagen 193" descr="Gráfico de barras con tendencia ascendente con relleno sólido">
-            <a:extLst>
-              <a:ext uri="{FF2B5EF4-FFF2-40B4-BE49-F238E27FC236}">
-                <a16:creationId xmlns:a16="http://schemas.microsoft.com/office/drawing/2014/main" id="{FAB9DE8A-4935-A3E0-0122-F76CDEAC29D1}"/>
-              </a:ext>
-            </a:extLst>
-          </p:cNvPr>
-          <p:cNvPicPr>
-            <a:picLocks noGrp="1" noChangeAspect="1"/>
-          </p:cNvPicPr>
-          <p:nvPr>
-            <p:ph type="pic" sz="quarter" idx="37"/>
-          </p:nvPr>
-        </p:nvPicPr>
-        <p:blipFill>
-          <a:blip r:embed="rId5" cstate="print">
-            <a:extLst>
-              <a:ext uri="{28A0092B-C50C-407E-A947-70E740481C1C}">
-                <a14:useLocalDpi xmlns:a14="http://schemas.microsoft.com/office/drawing/2010/main"/>
-              </a:ext>
-              <a:ext uri="{96DAC541-7B7A-43D3-8B79-37D633B846F1}">
-                <asvg:svgBlip xmlns:asvg="http://schemas.microsoft.com/office/drawing/2016/SVG/main" r:embed="rId6"/>
-              </a:ext>
-            </a:extLst>
-          </a:blip>
-          <a:srcRect l="2661" r="2661"/>
-          <a:stretch>
-            <a:fillRect/>
-          </a:stretch>
-        </p:blipFill>
-        <p:spPr/>
-      </p:pic>
-      <p:sp>
-        <p:nvSpPr>
-          <p:cNvPr id="11" name="Marcador de texto 10">
-            <a:extLst>
-              <a:ext uri="{FF2B5EF4-FFF2-40B4-BE49-F238E27FC236}">
-                <a16:creationId xmlns:a16="http://schemas.microsoft.com/office/drawing/2014/main" id="{DC774673-50D8-2D6F-C339-6E4B0A126B06}"/>
-              </a:ext>
-            </a:extLst>
-          </p:cNvPr>
-          <p:cNvSpPr>
-            <a:spLocks noGrp="1"/>
-          </p:cNvSpPr>
-          <p:nvPr>
-            <p:ph type="body" sz="quarter" idx="29"/>
-          </p:nvPr>
-        </p:nvSpPr>
-        <p:spPr/>
-        <p:txBody>
-          <a:bodyPr rtlCol="0"/>
-          <a:lstStyle>
-            <a:defPPr>
-              <a:defRPr lang="es-ES"/>
-            </a:defPPr>
-          </a:lstStyle>
-          <a:p>
-            <a:pPr rtl="0"/>
-            <a:r>
-              <a:rPr lang="es-ES"/>
-              <a:t>Nichos de mercado</a:t>
-            </a:r>
-          </a:p>
-        </p:txBody>
-      </p:sp>
-      <p:sp>
-        <p:nvSpPr>
-          <p:cNvPr id="13" name="Marcador de texto 12">
-            <a:extLst>
-              <a:ext uri="{FF2B5EF4-FFF2-40B4-BE49-F238E27FC236}">
-                <a16:creationId xmlns:a16="http://schemas.microsoft.com/office/drawing/2014/main" id="{DEB5763E-8BC0-F6C3-3814-6649A828C000}"/>
-              </a:ext>
-            </a:extLst>
-          </p:cNvPr>
-          <p:cNvSpPr>
-            <a:spLocks noGrp="1"/>
-          </p:cNvSpPr>
-          <p:nvPr>
-            <p:ph type="body" sz="quarter" idx="34"/>
-          </p:nvPr>
-        </p:nvSpPr>
-        <p:spPr/>
-        <p:txBody>
-          <a:bodyPr rtlCol="0"/>
-          <a:lstStyle>
-            <a:defPPr>
-              <a:defRPr lang="es-ES"/>
-            </a:defPPr>
-          </a:lstStyle>
-          <a:p>
-            <a:pPr rtl="0"/>
-            <a:r>
-              <a:rPr lang="es-ES"/>
-              <a:t>Búsqueda de un servicio de atención al cliente escalable a través de estrategias sostenibles</a:t>
-            </a:r>
-          </a:p>
-          <a:p>
-            <a:pPr rtl="0"/>
-            <a:r>
-              <a:rPr lang="es-ES"/>
-              <a:t>Incorporación de servicios web de primera con entregas punteras</a:t>
-            </a:r>
-          </a:p>
-          <a:p>
-            <a:pPr rtl="0"/>
-            <a:endParaRPr lang="es-ES" dirty="0"/>
-          </a:p>
-        </p:txBody>
-      </p:sp>
-      <p:pic>
-        <p:nvPicPr>
-          <p:cNvPr id="196" name="Marcador de posición de imagen 195" descr="Vínculo con relleno sólido">
-            <a:extLst>
-              <a:ext uri="{FF2B5EF4-FFF2-40B4-BE49-F238E27FC236}">
-                <a16:creationId xmlns:a16="http://schemas.microsoft.com/office/drawing/2014/main" id="{B21D7164-3991-2960-0F80-CB302359CD8D}"/>
-              </a:ext>
-            </a:extLst>
-          </p:cNvPr>
-          <p:cNvPicPr>
-            <a:picLocks noGrp="1" noChangeAspect="1"/>
-          </p:cNvPicPr>
-          <p:nvPr>
-            <p:ph type="pic" sz="quarter" idx="38"/>
-          </p:nvPr>
-        </p:nvPicPr>
-        <p:blipFill>
-          <a:blip r:embed="rId7" cstate="print">
-            <a:extLst>
-              <a:ext uri="{28A0092B-C50C-407E-A947-70E740481C1C}">
-                <a14:useLocalDpi xmlns:a14="http://schemas.microsoft.com/office/drawing/2010/main"/>
-              </a:ext>
-              <a:ext uri="{96DAC541-7B7A-43D3-8B79-37D633B846F1}">
-                <asvg:svgBlip xmlns:asvg="http://schemas.microsoft.com/office/drawing/2016/SVG/main" r:embed="rId8"/>
-              </a:ext>
-            </a:extLst>
-          </a:blip>
-          <a:srcRect l="2528" r="2528"/>
-          <a:stretch>
-            <a:fillRect/>
-          </a:stretch>
-        </p:blipFill>
-        <p:spPr/>
-      </p:pic>
-      <p:sp>
-        <p:nvSpPr>
-          <p:cNvPr id="12" name="Marcador de texto 11">
-            <a:extLst>
-              <a:ext uri="{FF2B5EF4-FFF2-40B4-BE49-F238E27FC236}">
-                <a16:creationId xmlns:a16="http://schemas.microsoft.com/office/drawing/2014/main" id="{D3E02E0C-26E8-8160-D35F-2398015C051B}"/>
-              </a:ext>
-            </a:extLst>
-          </p:cNvPr>
-          <p:cNvSpPr>
-            <a:spLocks noGrp="1"/>
-          </p:cNvSpPr>
-          <p:nvPr>
-            <p:ph type="body" sz="quarter" idx="31"/>
-          </p:nvPr>
-        </p:nvSpPr>
-        <p:spPr/>
-        <p:txBody>
-          <a:bodyPr rtlCol="0"/>
-          <a:lstStyle>
-            <a:defPPr>
-              <a:defRPr lang="es-ES"/>
-            </a:defPPr>
-          </a:lstStyle>
-          <a:p>
-            <a:pPr rtl="0"/>
-            <a:r>
-              <a:rPr lang="es-ES"/>
-              <a:t>Cadenas de suministro</a:t>
-            </a:r>
-          </a:p>
-        </p:txBody>
-      </p:sp>
-      <p:sp>
-        <p:nvSpPr>
-          <p:cNvPr id="14" name="Marcador de texto 13">
-            <a:extLst>
-              <a:ext uri="{FF2B5EF4-FFF2-40B4-BE49-F238E27FC236}">
-                <a16:creationId xmlns:a16="http://schemas.microsoft.com/office/drawing/2014/main" id="{C78180D0-1AB6-8416-0EB1-10648E1A6050}"/>
-              </a:ext>
-            </a:extLst>
-          </p:cNvPr>
-          <p:cNvSpPr>
-            <a:spLocks noGrp="1"/>
-          </p:cNvSpPr>
-          <p:nvPr>
-            <p:ph type="body" sz="quarter" idx="35"/>
-          </p:nvPr>
-        </p:nvSpPr>
-        <p:spPr/>
-        <p:txBody>
-          <a:bodyPr rtlCol="0"/>
-          <a:lstStyle>
-            <a:defPPr>
-              <a:defRPr lang="es-ES"/>
-            </a:defPPr>
-          </a:lstStyle>
-          <a:p>
-            <a:pPr rtl="0"/>
-            <a:r>
-              <a:rPr lang="es-ES"/>
-              <a:t>Fomento de un servicio de atención al cliente cercano con ideas sólidas</a:t>
-            </a:r>
-          </a:p>
-          <a:p>
-            <a:pPr rtl="0"/>
-            <a:r>
-              <a:rPr lang="es-ES"/>
-              <a:t>Aumento de las entregas oportunas para esquemas en tiempo real</a:t>
-            </a:r>
-          </a:p>
-        </p:txBody>
-      </p:sp>
-      <p:sp>
-        <p:nvSpPr>
-          <p:cNvPr id="5" name="Marcador de número de diapositiva 4">
-            <a:extLst>
-              <a:ext uri="{FF2B5EF4-FFF2-40B4-BE49-F238E27FC236}">
-                <a16:creationId xmlns:a16="http://schemas.microsoft.com/office/drawing/2014/main" id="{FD96C503-BABC-632E-06CA-12C8474920EB}"/>
-              </a:ext>
-            </a:extLst>
-          </p:cNvPr>
-          <p:cNvSpPr>
-            <a:spLocks noGrp="1"/>
-          </p:cNvSpPr>
-          <p:nvPr>
-            <p:ph type="sldNum" sz="quarter" idx="40"/>
-          </p:nvPr>
-        </p:nvSpPr>
-        <p:spPr/>
-        <p:txBody>
-          <a:bodyPr rtlCol="0"/>
-          <a:lstStyle>
-            <a:defPPr>
-              <a:defRPr lang="es-ES"/>
-            </a:defPPr>
-          </a:lstStyle>
-          <a:p>
-            <a:pPr rtl="0"/>
-            <a:fld id="{47FEACEE-25B4-4A2D-B147-27296E36371D}" type="slidenum">
-              <a:rPr lang="es-ES" altLang="zh-CN" smtClean="0"/>
-              <a:pPr rtl="0"/>
-              <a:t>12</a:t>
-            </a:fld>
-            <a:endParaRPr lang="es-ES" altLang="zh-CN" dirty="0"/>
-          </a:p>
-        </p:txBody>
-      </p:sp>
-    </p:spTree>
-    <p:extLst>
-      <p:ext uri="{BB962C8B-B14F-4D97-AF65-F5344CB8AC3E}">
-        <p14:creationId xmlns:p14="http://schemas.microsoft.com/office/powerpoint/2010/main" val="2519727083"/>
-      </p:ext>
-    </p:extLst>
-  </p:cSld>
-  <p:clrMapOvr>
-    <a:masterClrMapping/>
-  </p:clrMapOvr>
-</p:sld>
-</file>
-
-<file path=ppt/slides/slide13.xml><?xml version="1.0" encoding="utf-8"?>
-<p:sld xmlns:a="http://schemas.openxmlformats.org/drawingml/2006/main" xmlns:r="http://schemas.openxmlformats.org/officeDocument/2006/relationships" xmlns:p="http://schemas.openxmlformats.org/presentationml/2006/main">
-  <p:cSld>
-    <p:spTree>
-      <p:nvGrpSpPr>
-        <p:cNvPr id="1" name=""/>
-        <p:cNvGrpSpPr/>
-        <p:nvPr/>
-      </p:nvGrpSpPr>
-      <p:grpSpPr>
-        <a:xfrm>
-          <a:off x="0" y="0"/>
-          <a:ext cx="0" cy="0"/>
-          <a:chOff x="0" y="0"/>
-          <a:chExt cx="0" cy="0"/>
-        </a:xfrm>
-      </p:grpSpPr>
-      <p:sp>
-        <p:nvSpPr>
-          <p:cNvPr id="17" name="Título 16">
-            <a:extLst>
-              <a:ext uri="{FF2B5EF4-FFF2-40B4-BE49-F238E27FC236}">
-                <a16:creationId xmlns:a16="http://schemas.microsoft.com/office/drawing/2014/main" id="{E17942FE-65D3-7C03-B361-8DF125B81DC1}"/>
-              </a:ext>
-            </a:extLst>
-          </p:cNvPr>
-          <p:cNvSpPr>
-            <a:spLocks noGrp="1"/>
-          </p:cNvSpPr>
-          <p:nvPr>
-            <p:ph type="title"/>
-          </p:nvPr>
-        </p:nvSpPr>
-        <p:spPr/>
-        <p:txBody>
-          <a:bodyPr rtlCol="0"/>
-          <a:lstStyle>
-            <a:defPPr>
-              <a:defRPr lang="es-ES"/>
-            </a:defPPr>
-          </a:lstStyle>
-          <a:p>
-            <a:pPr rtl="0"/>
-            <a:r>
-              <a:rPr lang="es-MX" sz="3200" dirty="0"/>
-              <a:t>¿Qué descubrió de si mismo?</a:t>
-            </a:r>
-            <a:endParaRPr lang="es-ES" sz="3200" dirty="0"/>
-          </a:p>
-        </p:txBody>
-      </p:sp>
-      <p:sp>
-        <p:nvSpPr>
-          <p:cNvPr id="63" name="Marcador de texto 62">
-            <a:extLst>
-              <a:ext uri="{FF2B5EF4-FFF2-40B4-BE49-F238E27FC236}">
-                <a16:creationId xmlns:a16="http://schemas.microsoft.com/office/drawing/2014/main" id="{22D79EB2-B914-5355-4D75-3AC59F0DCCC3}"/>
-              </a:ext>
-            </a:extLst>
-          </p:cNvPr>
-          <p:cNvSpPr>
-            <a:spLocks noGrp="1"/>
-          </p:cNvSpPr>
-          <p:nvPr>
-            <p:ph type="body" sz="quarter" idx="27"/>
-          </p:nvPr>
-        </p:nvSpPr>
-        <p:spPr/>
-        <p:txBody>
-          <a:bodyPr rtlCol="0"/>
-          <a:lstStyle>
-            <a:defPPr>
-              <a:defRPr lang="es-ES"/>
-            </a:defPPr>
-          </a:lstStyle>
-          <a:p>
-            <a:pPr rtl="0"/>
-            <a:r>
-              <a:rPr lang="es-ES"/>
-              <a:t>Sep. 20XX</a:t>
-            </a:r>
-          </a:p>
-        </p:txBody>
-      </p:sp>
-      <p:sp>
-        <p:nvSpPr>
-          <p:cNvPr id="16" name="Marcador de posición de imagen 15">
-            <a:extLst>
-              <a:ext uri="{FF2B5EF4-FFF2-40B4-BE49-F238E27FC236}">
-                <a16:creationId xmlns:a16="http://schemas.microsoft.com/office/drawing/2014/main" id="{7BD10CEB-2241-4246-B0F4-96E0DB642C4C}"/>
-              </a:ext>
-            </a:extLst>
-          </p:cNvPr>
-          <p:cNvSpPr>
-            <a:spLocks noGrp="1"/>
-          </p:cNvSpPr>
-          <p:nvPr>
-            <p:ph type="body" sz="quarter" idx="28"/>
-          </p:nvPr>
-        </p:nvSpPr>
-        <p:spPr/>
-        <p:txBody>
-          <a:bodyPr rtlCol="0"/>
-          <a:lstStyle>
-            <a:defPPr>
-              <a:defRPr lang="es-ES"/>
-            </a:defPPr>
-          </a:lstStyle>
-          <a:p>
-            <a:pPr rtl="0"/>
-            <a:r>
-              <a:rPr lang="es-ES" noProof="0"/>
-              <a:t>Sinergia escalable</a:t>
-            </a:r>
-          </a:p>
-          <a:p>
-            <a:pPr rtl="0"/>
-            <a:r>
-              <a:rPr lang="es-ES" noProof="0"/>
-              <a:t>Comercio electrónico</a:t>
-            </a:r>
-          </a:p>
-          <a:p>
-            <a:pPr rtl="0"/>
-            <a:endParaRPr lang="es-ES" altLang="en-US"/>
-          </a:p>
-        </p:txBody>
-      </p:sp>
-      <p:sp>
-        <p:nvSpPr>
-          <p:cNvPr id="65" name="Marcador de texto 64">
-            <a:extLst>
-              <a:ext uri="{FF2B5EF4-FFF2-40B4-BE49-F238E27FC236}">
-                <a16:creationId xmlns:a16="http://schemas.microsoft.com/office/drawing/2014/main" id="{0ECD9490-0BE0-6A65-01CD-D54CAB839511}"/>
-              </a:ext>
-            </a:extLst>
-          </p:cNvPr>
-          <p:cNvSpPr>
-            <a:spLocks noGrp="1"/>
-          </p:cNvSpPr>
-          <p:nvPr>
-            <p:ph type="body" sz="quarter" idx="38"/>
-          </p:nvPr>
-        </p:nvSpPr>
-        <p:spPr/>
-        <p:txBody>
-          <a:bodyPr rtlCol="0"/>
-          <a:lstStyle>
-            <a:defPPr>
-              <a:defRPr lang="es-ES"/>
-            </a:defPPr>
-          </a:lstStyle>
-          <a:p>
-            <a:pPr rtl="0"/>
-            <a:r>
-              <a:rPr lang="es-ES"/>
-              <a:t>Nov. 20XX</a:t>
-            </a:r>
-          </a:p>
-        </p:txBody>
-      </p:sp>
-      <p:sp>
-        <p:nvSpPr>
-          <p:cNvPr id="19" name="Marcador de posición de imagen 18">
-            <a:extLst>
-              <a:ext uri="{FF2B5EF4-FFF2-40B4-BE49-F238E27FC236}">
-                <a16:creationId xmlns:a16="http://schemas.microsoft.com/office/drawing/2014/main" id="{78038ACE-740A-4AE7-A0B3-BEEA90495BDD}"/>
-              </a:ext>
-            </a:extLst>
-          </p:cNvPr>
-          <p:cNvSpPr>
-            <a:spLocks noGrp="1"/>
-          </p:cNvSpPr>
-          <p:nvPr>
-            <p:ph type="body" sz="quarter" idx="39"/>
-          </p:nvPr>
-        </p:nvSpPr>
-        <p:spPr>
-          <a:xfrm>
-            <a:off x="3889942" y="2937719"/>
-            <a:ext cx="1877575" cy="692987"/>
-          </a:xfrm>
-        </p:spPr>
-        <p:txBody>
-          <a:bodyPr rtlCol="0"/>
-          <a:lstStyle>
-            <a:defPPr>
-              <a:defRPr lang="es-ES"/>
-            </a:defPPr>
-          </a:lstStyle>
-          <a:p>
-            <a:pPr lvl="0" rtl="0"/>
-            <a:r>
-              <a:rPr lang="es-ES" noProof="0" dirty="0"/>
-              <a:t>Divulgación de métricas estandarizadas</a:t>
-            </a:r>
-          </a:p>
-        </p:txBody>
-      </p:sp>
-      <p:sp>
-        <p:nvSpPr>
-          <p:cNvPr id="67" name="Marcador de texto 66">
-            <a:extLst>
-              <a:ext uri="{FF2B5EF4-FFF2-40B4-BE49-F238E27FC236}">
-                <a16:creationId xmlns:a16="http://schemas.microsoft.com/office/drawing/2014/main" id="{CEEED1DD-BCBD-5246-2A2C-BCED87782D53}"/>
-              </a:ext>
-            </a:extLst>
-          </p:cNvPr>
-          <p:cNvSpPr>
-            <a:spLocks noGrp="1"/>
-          </p:cNvSpPr>
-          <p:nvPr>
-            <p:ph type="body" sz="quarter" idx="40"/>
-          </p:nvPr>
-        </p:nvSpPr>
-        <p:spPr/>
-        <p:txBody>
-          <a:bodyPr rtlCol="0"/>
-          <a:lstStyle>
-            <a:defPPr>
-              <a:defRPr lang="es-ES"/>
-            </a:defPPr>
-          </a:lstStyle>
-          <a:p>
-            <a:pPr rtl="0"/>
-            <a:r>
-              <a:rPr lang="es-ES"/>
-              <a:t>Ene. 20XX</a:t>
-            </a:r>
-          </a:p>
-        </p:txBody>
-      </p:sp>
-      <p:sp>
-        <p:nvSpPr>
-          <p:cNvPr id="21" name="Marcador de posición de imagen 20">
-            <a:extLst>
-              <a:ext uri="{FF2B5EF4-FFF2-40B4-BE49-F238E27FC236}">
-                <a16:creationId xmlns:a16="http://schemas.microsoft.com/office/drawing/2014/main" id="{DD441F7A-4624-45D2-AE88-EEBA65185E6D}"/>
-              </a:ext>
-            </a:extLst>
-          </p:cNvPr>
-          <p:cNvSpPr>
-            <a:spLocks noGrp="1"/>
-          </p:cNvSpPr>
-          <p:nvPr>
-            <p:ph type="body" sz="quarter" idx="41"/>
-          </p:nvPr>
-        </p:nvSpPr>
-        <p:spPr>
-          <a:xfrm>
-            <a:off x="5107230" y="5051157"/>
-            <a:ext cx="1877575" cy="762698"/>
-          </a:xfrm>
-        </p:spPr>
-        <p:txBody>
-          <a:bodyPr rtlCol="0"/>
-          <a:lstStyle>
-            <a:defPPr>
-              <a:defRPr lang="es-ES"/>
-            </a:defPPr>
-          </a:lstStyle>
-          <a:p>
-            <a:pPr rtl="0"/>
-            <a:r>
-              <a:rPr lang="es-ES" noProof="0" dirty="0"/>
-              <a:t>Coordinación de aplicaciones para el negocio electrónico</a:t>
-            </a:r>
-          </a:p>
-          <a:p>
-            <a:pPr rtl="0"/>
-            <a:endParaRPr lang="es-ES" altLang="en-US" dirty="0"/>
-          </a:p>
-        </p:txBody>
-      </p:sp>
-      <p:sp>
-        <p:nvSpPr>
-          <p:cNvPr id="69" name="Marcador de texto 68">
-            <a:extLst>
-              <a:ext uri="{FF2B5EF4-FFF2-40B4-BE49-F238E27FC236}">
-                <a16:creationId xmlns:a16="http://schemas.microsoft.com/office/drawing/2014/main" id="{868536F0-BECB-41C2-208F-CAAC89E244FF}"/>
-              </a:ext>
-            </a:extLst>
-          </p:cNvPr>
-          <p:cNvSpPr>
-            <a:spLocks noGrp="1"/>
-          </p:cNvSpPr>
-          <p:nvPr>
-            <p:ph type="body" sz="quarter" idx="42"/>
-          </p:nvPr>
-        </p:nvSpPr>
-        <p:spPr/>
-        <p:txBody>
-          <a:bodyPr rtlCol="0"/>
-          <a:lstStyle>
-            <a:defPPr>
-              <a:defRPr lang="es-ES"/>
-            </a:defPPr>
-          </a:lstStyle>
-          <a:p>
-            <a:pPr rtl="0"/>
-            <a:r>
-              <a:rPr lang="es-ES"/>
-              <a:t>Mar. 20XX</a:t>
-            </a:r>
-          </a:p>
-        </p:txBody>
-      </p:sp>
-      <p:sp>
-        <p:nvSpPr>
-          <p:cNvPr id="23" name="Marcador de posición de imagen 22">
-            <a:extLst>
-              <a:ext uri="{FF2B5EF4-FFF2-40B4-BE49-F238E27FC236}">
-                <a16:creationId xmlns:a16="http://schemas.microsoft.com/office/drawing/2014/main" id="{4EF68FE0-ADE3-4AB5-AC04-6C029B601AB2}"/>
-              </a:ext>
-            </a:extLst>
-          </p:cNvPr>
-          <p:cNvSpPr>
-            <a:spLocks noGrp="1"/>
-          </p:cNvSpPr>
-          <p:nvPr>
-            <p:ph type="body" sz="quarter" idx="43"/>
-          </p:nvPr>
-        </p:nvSpPr>
-        <p:spPr>
-          <a:xfrm>
-            <a:off x="7501941" y="5051156"/>
-            <a:ext cx="1877575" cy="930279"/>
-          </a:xfrm>
-        </p:spPr>
-        <p:txBody>
-          <a:bodyPr rtlCol="0"/>
-          <a:lstStyle>
-            <a:defPPr>
-              <a:defRPr lang="es-ES"/>
-            </a:defPPr>
-          </a:lstStyle>
-          <a:p>
-            <a:pPr rtl="0"/>
-            <a:r>
-              <a:rPr lang="es-ES" dirty="0"/>
-              <a:t>Fomento de metodologías holísticamente superiores</a:t>
-            </a:r>
-          </a:p>
-          <a:p>
-            <a:pPr rtl="0"/>
-            <a:endParaRPr lang="es-ES" altLang="en-US" dirty="0"/>
-          </a:p>
-        </p:txBody>
-      </p:sp>
-      <p:sp>
-        <p:nvSpPr>
-          <p:cNvPr id="71" name="Marcador de texto 70">
-            <a:extLst>
-              <a:ext uri="{FF2B5EF4-FFF2-40B4-BE49-F238E27FC236}">
-                <a16:creationId xmlns:a16="http://schemas.microsoft.com/office/drawing/2014/main" id="{FAFB92ED-EE9E-1E13-228D-2A33EE0B2FC2}"/>
-              </a:ext>
-            </a:extLst>
-          </p:cNvPr>
-          <p:cNvSpPr>
-            <a:spLocks noGrp="1"/>
-          </p:cNvSpPr>
-          <p:nvPr>
-            <p:ph type="body" sz="quarter" idx="44"/>
-          </p:nvPr>
-        </p:nvSpPr>
-        <p:spPr/>
-        <p:txBody>
-          <a:bodyPr rtlCol="0"/>
-          <a:lstStyle>
-            <a:defPPr>
-              <a:defRPr lang="es-ES"/>
-            </a:defPPr>
-          </a:lstStyle>
-          <a:p>
-            <a:pPr rtl="0"/>
-            <a:r>
-              <a:rPr lang="es-ES"/>
-              <a:t>Mayo 20XX</a:t>
-            </a:r>
-          </a:p>
-        </p:txBody>
-      </p:sp>
-      <p:sp>
-        <p:nvSpPr>
-          <p:cNvPr id="25" name="Marcador de posición de imagen 24">
-            <a:extLst>
-              <a:ext uri="{FF2B5EF4-FFF2-40B4-BE49-F238E27FC236}">
-                <a16:creationId xmlns:a16="http://schemas.microsoft.com/office/drawing/2014/main" id="{5140B95D-A59E-4E6C-BF07-5DD5E0E818A0}"/>
-              </a:ext>
-            </a:extLst>
-          </p:cNvPr>
-          <p:cNvSpPr>
-            <a:spLocks noGrp="1"/>
-          </p:cNvSpPr>
-          <p:nvPr>
-            <p:ph type="body" sz="quarter" idx="45"/>
-          </p:nvPr>
-        </p:nvSpPr>
-        <p:spPr>
-          <a:xfrm>
-            <a:off x="8734718" y="2937719"/>
-            <a:ext cx="1877575" cy="1058240"/>
-          </a:xfrm>
-        </p:spPr>
-        <p:txBody>
-          <a:bodyPr rtlCol="0"/>
-          <a:lstStyle>
-            <a:defPPr>
-              <a:defRPr lang="es-ES"/>
-            </a:defPPr>
-          </a:lstStyle>
-          <a:p>
-            <a:pPr rtl="0"/>
-            <a:r>
-              <a:rPr lang="es-ES" dirty="0"/>
-              <a:t>Implementación de redes estratégicas con necesidades de negocio electrónico atractivas</a:t>
-            </a:r>
-          </a:p>
-          <a:p>
-            <a:pPr rtl="0"/>
-            <a:endParaRPr lang="es-ES" altLang="en-US" dirty="0"/>
-          </a:p>
-        </p:txBody>
-      </p:sp>
-      <p:sp>
-        <p:nvSpPr>
-          <p:cNvPr id="4" name="Marcador de pie de página 3">
-            <a:extLst>
-              <a:ext uri="{FF2B5EF4-FFF2-40B4-BE49-F238E27FC236}">
-                <a16:creationId xmlns:a16="http://schemas.microsoft.com/office/drawing/2014/main" id="{36404519-33C1-DA61-9858-3858F30C7808}"/>
-              </a:ext>
-            </a:extLst>
-          </p:cNvPr>
-          <p:cNvSpPr>
-            <a:spLocks noGrp="1"/>
-          </p:cNvSpPr>
-          <p:nvPr>
-            <p:ph type="ftr" sz="quarter" idx="46"/>
-          </p:nvPr>
-        </p:nvSpPr>
-        <p:spPr/>
-        <p:txBody>
-          <a:bodyPr rtlCol="0"/>
-          <a:lstStyle>
-            <a:defPPr>
-              <a:defRPr lang="es-ES"/>
-            </a:defPPr>
-          </a:lstStyle>
-          <a:p>
-            <a:pPr rtl="0"/>
-            <a:r>
-              <a:rPr lang="es-ES"/>
-              <a:t>Título de la presentación</a:t>
-            </a:r>
-            <a:endParaRPr lang="es-ES" dirty="0"/>
-          </a:p>
-        </p:txBody>
-      </p:sp>
-      <p:sp>
-        <p:nvSpPr>
-          <p:cNvPr id="5" name="Marcador de número de diapositiva 4">
-            <a:extLst>
-              <a:ext uri="{FF2B5EF4-FFF2-40B4-BE49-F238E27FC236}">
-                <a16:creationId xmlns:a16="http://schemas.microsoft.com/office/drawing/2014/main" id="{302DD1EA-9A0C-9303-AD79-5DAF401390EB}"/>
-              </a:ext>
-            </a:extLst>
-          </p:cNvPr>
-          <p:cNvSpPr>
-            <a:spLocks noGrp="1"/>
-          </p:cNvSpPr>
-          <p:nvPr>
-            <p:ph type="sldNum" sz="quarter" idx="47"/>
-          </p:nvPr>
-        </p:nvSpPr>
-        <p:spPr/>
-        <p:txBody>
-          <a:bodyPr rtlCol="0"/>
-          <a:lstStyle>
-            <a:defPPr>
-              <a:defRPr lang="es-ES"/>
-            </a:defPPr>
-          </a:lstStyle>
-          <a:p>
-            <a:pPr rtl="0"/>
-            <a:fld id="{47FEACEE-25B4-4A2D-B147-27296E36371D}" type="slidenum">
-              <a:rPr lang="es-ES" altLang="zh-CN" smtClean="0"/>
-              <a:pPr rtl="0"/>
-              <a:t>13</a:t>
-            </a:fld>
-            <a:endParaRPr lang="es-ES" altLang="zh-CN" dirty="0"/>
-          </a:p>
-        </p:txBody>
-      </p:sp>
-    </p:spTree>
-    <p:extLst>
-      <p:ext uri="{BB962C8B-B14F-4D97-AF65-F5344CB8AC3E}">
-        <p14:creationId xmlns:p14="http://schemas.microsoft.com/office/powerpoint/2010/main" val="3760906987"/>
-      </p:ext>
-    </p:extLst>
-  </p:cSld>
-  <p:clrMapOvr>
-    <a:masterClrMapping/>
-  </p:clrMapOvr>
-</p:sld>
-</file>
-
-<file path=ppt/slides/slide14.xml><?xml version="1.0" encoding="utf-8"?>
-<p:sld xmlns:a="http://schemas.openxmlformats.org/drawingml/2006/main" xmlns:r="http://schemas.openxmlformats.org/officeDocument/2006/relationships" xmlns:p="http://schemas.openxmlformats.org/presentationml/2006/main">
-  <p:cSld>
-    <p:spTree>
-      <p:nvGrpSpPr>
-        <p:cNvPr id="1" name=""/>
-        <p:cNvGrpSpPr/>
-        <p:nvPr/>
-      </p:nvGrpSpPr>
-      <p:grpSpPr>
-        <a:xfrm>
-          <a:off x="0" y="0"/>
-          <a:ext cx="0" cy="0"/>
-          <a:chOff x="0" y="0"/>
-          <a:chExt cx="0" cy="0"/>
-        </a:xfrm>
-      </p:grpSpPr>
-      <p:sp>
-        <p:nvSpPr>
-          <p:cNvPr id="6" name="Título 5">
-            <a:extLst>
-              <a:ext uri="{FF2B5EF4-FFF2-40B4-BE49-F238E27FC236}">
-                <a16:creationId xmlns:a16="http://schemas.microsoft.com/office/drawing/2014/main" id="{4EFA9173-F892-5C7D-99AF-4C5FFB1532B4}"/>
-              </a:ext>
-            </a:extLst>
-          </p:cNvPr>
-          <p:cNvSpPr>
-            <a:spLocks noGrp="1"/>
-          </p:cNvSpPr>
-          <p:nvPr>
-            <p:ph type="title"/>
-          </p:nvPr>
-        </p:nvSpPr>
-        <p:spPr/>
-        <p:txBody>
-          <a:bodyPr rtlCol="0"/>
-          <a:lstStyle>
-            <a:defPPr>
-              <a:defRPr lang="es-ES"/>
-            </a:defPPr>
-          </a:lstStyle>
-          <a:p>
-            <a:pPr rtl="0"/>
-            <a:r>
-              <a:rPr lang="es-ES" dirty="0"/>
-              <a:t>Conclusión</a:t>
-            </a:r>
-          </a:p>
-        </p:txBody>
-      </p:sp>
-      <p:sp>
-        <p:nvSpPr>
-          <p:cNvPr id="29" name="Marcador de texto 28">
-            <a:extLst>
-              <a:ext uri="{FF2B5EF4-FFF2-40B4-BE49-F238E27FC236}">
-                <a16:creationId xmlns:a16="http://schemas.microsoft.com/office/drawing/2014/main" id="{52FD53DB-CD39-2575-F8BA-63488E81091E}"/>
-              </a:ext>
-            </a:extLst>
-          </p:cNvPr>
-          <p:cNvSpPr>
-            <a:spLocks noGrp="1"/>
-          </p:cNvSpPr>
-          <p:nvPr>
-            <p:ph type="body" sz="quarter" idx="28"/>
-          </p:nvPr>
-        </p:nvSpPr>
-        <p:spPr/>
-        <p:txBody>
-          <a:bodyPr rtlCol="0"/>
-          <a:lstStyle>
-            <a:defPPr>
-              <a:defRPr lang="es-ES"/>
-            </a:defPPr>
-          </a:lstStyle>
-          <a:p>
-            <a:pPr rtl="0"/>
-            <a:r>
-              <a:rPr lang="es-ES" dirty="0"/>
-              <a:t>En Contoso, creemos en dar el 110 %. Con nuestra arquitectura de datos de próxima generación, ayudamos a las empresas a administrar virtualmente flujos de trabajo ágiles. Progresamos gracias a nuestro conocimiento del mercado y al excelente equipo que hay detrás de nuestro producto. Como dice nuestro director general, "La eficiencia llegará al transformar de forma proactiva la forma en que hacemos negocios".</a:t>
-            </a:r>
-          </a:p>
-          <a:p>
-            <a:pPr rtl="0"/>
             <a:endParaRPr lang="es-ES" dirty="0"/>
           </a:p>
         </p:txBody>
@@ -26166,40 +25394,6 @@
       </p:pic>
       <p:sp>
         <p:nvSpPr>
-          <p:cNvPr id="4" name="Marcador de pie de página 3">
-            <a:extLst>
-              <a:ext uri="{FF2B5EF4-FFF2-40B4-BE49-F238E27FC236}">
-                <a16:creationId xmlns:a16="http://schemas.microsoft.com/office/drawing/2014/main" id="{8E531165-F745-171F-F6EC-07FDD4E3E06C}"/>
-              </a:ext>
-            </a:extLst>
-          </p:cNvPr>
-          <p:cNvSpPr>
-            <a:spLocks noGrp="1"/>
-          </p:cNvSpPr>
-          <p:nvPr>
-            <p:ph type="ftr" sz="quarter" idx="49"/>
-          </p:nvPr>
-        </p:nvSpPr>
-        <p:spPr/>
-        <p:txBody>
-          <a:bodyPr rtlCol="0"/>
-          <a:lstStyle>
-            <a:defPPr>
-              <a:defRPr lang="es-ES"/>
-            </a:defPPr>
-          </a:lstStyle>
-          <a:p>
-            <a:pPr rtl="0"/>
-            <a:r>
-              <a:rPr lang="es-ES"/>
-              <a:t>Título de la presentación</a:t>
-            </a:r>
-            <a:endParaRPr lang="es-ES" dirty="0"/>
-          </a:p>
-        </p:txBody>
-      </p:sp>
-      <p:sp>
-        <p:nvSpPr>
           <p:cNvPr id="5" name="Marcador de número de diapositiva 4">
             <a:extLst>
               <a:ext uri="{FF2B5EF4-FFF2-40B4-BE49-F238E27FC236}">
@@ -26227,7 +25421,7 @@
             <a:fld id="{47FEACEE-25B4-4A2D-B147-27296E36371D}" type="slidenum">
               <a:rPr lang="es-ES" altLang="zh-CN" smtClean="0"/>
               <a:pPr rtl="0"/>
-              <a:t>14</a:t>
+              <a:t>11</a:t>
             </a:fld>
             <a:endParaRPr lang="es-ES" altLang="zh-CN" dirty="0"/>
           </a:p>
@@ -26246,7 +25440,7 @@
 </p:sld>
 </file>
 
-<file path=ppt/slides/slide15.xml><?xml version="1.0" encoding="utf-8"?>
+<file path=ppt/slides/slide12.xml><?xml version="1.0" encoding="utf-8"?>
 <p:sld xmlns:a="http://schemas.openxmlformats.org/drawingml/2006/main" xmlns:r="http://schemas.openxmlformats.org/officeDocument/2006/relationships" xmlns:p="http://schemas.openxmlformats.org/presentationml/2006/main">
   <p:cSld>
     <p:spTree>
@@ -26550,7 +25744,7 @@
             <a:pPr rtl="0"/>
             <a:r>
               <a:rPr lang="es-ES" dirty="0"/>
-              <a:t>Introducción</a:t>
+              <a:t>Motivación</a:t>
             </a:r>
           </a:p>
         </p:txBody>
@@ -26583,7 +25777,7 @@
             <a:pPr rtl="0"/>
             <a:r>
               <a:rPr lang="es-ES" dirty="0"/>
-              <a:t>Motivación</a:t>
+              <a:t>Introducción</a:t>
             </a:r>
           </a:p>
         </p:txBody>
@@ -26909,7 +26103,7 @@
             <a:pPr rtl="0"/>
             <a:fld id="{47FEACEE-25B4-4A2D-B147-27296E36371D}" type="slidenum">
               <a:rPr lang="es-ES" altLang="zh-CN" smtClean="0"/>
-              <a:pPr/>
+              <a:pPr rtl="0"/>
               <a:t>2</a:t>
             </a:fld>
             <a:endParaRPr lang="es-ES" altLang="zh-CN" dirty="0"/>
@@ -26930,424 +26124,6 @@
 </file>
 
 <file path=ppt/slides/slide3.xml><?xml version="1.0" encoding="utf-8"?>
-<p:sld xmlns:a="http://schemas.openxmlformats.org/drawingml/2006/main" xmlns:r="http://schemas.openxmlformats.org/officeDocument/2006/relationships" xmlns:p="http://schemas.openxmlformats.org/presentationml/2006/main">
-  <p:cSld>
-    <p:spTree>
-      <p:nvGrpSpPr>
-        <p:cNvPr id="1" name=""/>
-        <p:cNvGrpSpPr/>
-        <p:nvPr/>
-      </p:nvGrpSpPr>
-      <p:grpSpPr>
-        <a:xfrm>
-          <a:off x="0" y="0"/>
-          <a:ext cx="0" cy="0"/>
-          <a:chOff x="0" y="0"/>
-          <a:chExt cx="0" cy="0"/>
-        </a:xfrm>
-      </p:grpSpPr>
-      <p:sp>
-        <p:nvSpPr>
-          <p:cNvPr id="5" name="Título 4">
-            <a:extLst>
-              <a:ext uri="{FF2B5EF4-FFF2-40B4-BE49-F238E27FC236}">
-                <a16:creationId xmlns:a16="http://schemas.microsoft.com/office/drawing/2014/main" id="{81D18537-D028-9E9C-FB87-93F24955DFC7}"/>
-              </a:ext>
-            </a:extLst>
-          </p:cNvPr>
-          <p:cNvSpPr>
-            <a:spLocks noGrp="1"/>
-          </p:cNvSpPr>
-          <p:nvPr>
-            <p:ph type="title"/>
-          </p:nvPr>
-        </p:nvSpPr>
-        <p:spPr>
-          <a:xfrm>
-            <a:off x="509574" y="977571"/>
-            <a:ext cx="5117162" cy="1325563"/>
-          </a:xfrm>
-        </p:spPr>
-        <p:txBody>
-          <a:bodyPr rtlCol="0"/>
-          <a:lstStyle>
-            <a:defPPr>
-              <a:defRPr lang="es-ES"/>
-            </a:defPPr>
-          </a:lstStyle>
-          <a:p>
-            <a:pPr rtl="0"/>
-            <a:r>
-              <a:rPr lang="es-ES" dirty="0"/>
-              <a:t>Introducción</a:t>
-            </a:r>
-          </a:p>
-        </p:txBody>
-      </p:sp>
-      <p:sp>
-        <p:nvSpPr>
-          <p:cNvPr id="20" name="Marcador de texto 19">
-            <a:extLst>
-              <a:ext uri="{FF2B5EF4-FFF2-40B4-BE49-F238E27FC236}">
-                <a16:creationId xmlns:a16="http://schemas.microsoft.com/office/drawing/2014/main" id="{CC0093B1-77CC-1E61-FB22-E136F94EABD2}"/>
-              </a:ext>
-            </a:extLst>
-          </p:cNvPr>
-          <p:cNvSpPr>
-            <a:spLocks noGrp="1"/>
-          </p:cNvSpPr>
-          <p:nvPr>
-            <p:ph type="body" sz="quarter" idx="28"/>
-          </p:nvPr>
-        </p:nvSpPr>
-        <p:spPr>
-          <a:xfrm>
-            <a:off x="509574" y="2047568"/>
-            <a:ext cx="4260180" cy="1843112"/>
-          </a:xfrm>
-        </p:spPr>
-        <p:txBody>
-          <a:bodyPr rtlCol="0"/>
-          <a:lstStyle>
-            <a:defPPr>
-              <a:defRPr lang="es-ES"/>
-            </a:defPPr>
-          </a:lstStyle>
-          <a:p>
-            <a:pPr marL="285750" indent="-285750" rtl="0">
-              <a:buFont typeface="Arial" panose="020B0604020202020204" pitchFamily="34" charset="0"/>
-              <a:buChar char="•"/>
-            </a:pPr>
-            <a:r>
-              <a:rPr lang="es-MX" dirty="0"/>
-              <a:t>Este proyecto se enfoca en el análisis del comportamiento histórico de las importaciones en toneladas métricas registradas en puertos de Estados Unidos entre los años 2000 y 2017, utilizando un conjunto de datos obtenido de la plataforma </a:t>
-            </a:r>
-            <a:r>
-              <a:rPr lang="es-MX" dirty="0" err="1"/>
-              <a:t>Kaggle</a:t>
-            </a:r>
-            <a:r>
-              <a:rPr lang="es-MX" dirty="0"/>
-              <a:t>.</a:t>
-            </a:r>
-            <a:endParaRPr lang="es-ES" dirty="0"/>
-          </a:p>
-          <a:p>
-            <a:pPr rtl="0"/>
-            <a:endParaRPr lang="es-ES" dirty="0"/>
-          </a:p>
-        </p:txBody>
-      </p:sp>
-      <p:sp>
-        <p:nvSpPr>
-          <p:cNvPr id="4" name="Marcador de pie de página 3">
-            <a:extLst>
-              <a:ext uri="{FF2B5EF4-FFF2-40B4-BE49-F238E27FC236}">
-                <a16:creationId xmlns:a16="http://schemas.microsoft.com/office/drawing/2014/main" id="{0A01EC1F-42C9-66C4-9D49-F6AF79D5BE91}"/>
-              </a:ext>
-            </a:extLst>
-          </p:cNvPr>
-          <p:cNvSpPr>
-            <a:spLocks noGrp="1"/>
-          </p:cNvSpPr>
-          <p:nvPr>
-            <p:ph type="ftr" sz="quarter" idx="52"/>
-          </p:nvPr>
-        </p:nvSpPr>
-        <p:spPr/>
-        <p:txBody>
-          <a:bodyPr rtlCol="0"/>
-          <a:lstStyle>
-            <a:defPPr>
-              <a:defRPr lang="es-ES"/>
-            </a:defPPr>
-          </a:lstStyle>
-          <a:p>
-            <a:pPr rtl="0"/>
-            <a:r>
-              <a:rPr lang="es-ES"/>
-              <a:t>Título de la presentación</a:t>
-            </a:r>
-            <a:endParaRPr lang="es-ES" dirty="0"/>
-          </a:p>
-        </p:txBody>
-      </p:sp>
-      <p:pic>
-        <p:nvPicPr>
-          <p:cNvPr id="12" name="Marcador de posición de imagen 11" descr="Personas alrededor de una mesa con sus portátiles">
-            <a:extLst>
-              <a:ext uri="{FF2B5EF4-FFF2-40B4-BE49-F238E27FC236}">
-                <a16:creationId xmlns:a16="http://schemas.microsoft.com/office/drawing/2014/main" id="{8C4B5C6A-45B4-1976-622A-4CEB4E3211BC}"/>
-              </a:ext>
-            </a:extLst>
-          </p:cNvPr>
-          <p:cNvPicPr>
-            <a:picLocks noGrp="1" noChangeAspect="1"/>
-          </p:cNvPicPr>
-          <p:nvPr>
-            <p:ph type="pic" sz="quarter" idx="51"/>
-          </p:nvPr>
-        </p:nvPicPr>
-        <p:blipFill rotWithShape="1">
-          <a:blip r:embed="rId3" cstate="print">
-            <a:extLst>
-              <a:ext uri="{28A0092B-C50C-407E-A947-70E740481C1C}">
-                <a14:useLocalDpi xmlns:a14="http://schemas.microsoft.com/office/drawing/2010/main"/>
-              </a:ext>
-            </a:extLst>
-          </a:blip>
-          <a:srcRect/>
-          <a:stretch/>
-        </p:blipFill>
-        <p:spPr/>
-      </p:pic>
-      <p:sp>
-        <p:nvSpPr>
-          <p:cNvPr id="6" name="Forma libre: Forma 5">
-            <a:extLst>
-              <a:ext uri="{FF2B5EF4-FFF2-40B4-BE49-F238E27FC236}">
-                <a16:creationId xmlns:a16="http://schemas.microsoft.com/office/drawing/2014/main" id="{D91FB993-29E1-3DBD-8335-7970016F8DE7}"/>
-              </a:ext>
-              <a:ext uri="{C183D7F6-B498-43B3-948B-1728B52AA6E4}">
-                <adec:decorative xmlns:adec="http://schemas.microsoft.com/office/drawing/2017/decorative" val="1"/>
-              </a:ext>
-            </a:extLst>
-          </p:cNvPr>
-          <p:cNvSpPr/>
-          <p:nvPr/>
-        </p:nvSpPr>
-        <p:spPr>
-          <a:xfrm>
-            <a:off x="4584821" y="311581"/>
-            <a:ext cx="1896941" cy="2171612"/>
-          </a:xfrm>
-          <a:custGeom>
-            <a:avLst/>
-            <a:gdLst>
-              <a:gd name="connsiteX0" fmla="*/ 2187388 w 4398682"/>
-              <a:gd name="connsiteY0" fmla="*/ 0 h 5032188"/>
-              <a:gd name="connsiteX1" fmla="*/ 4386729 w 4398682"/>
-              <a:gd name="connsiteY1" fmla="*/ 1261035 h 5032188"/>
-              <a:gd name="connsiteX2" fmla="*/ 4398682 w 4398682"/>
-              <a:gd name="connsiteY2" fmla="*/ 3789083 h 5032188"/>
-              <a:gd name="connsiteX3" fmla="*/ 2193365 w 4398682"/>
-              <a:gd name="connsiteY3" fmla="*/ 5032188 h 5032188"/>
-              <a:gd name="connsiteX4" fmla="*/ 0 w 4398682"/>
-              <a:gd name="connsiteY4" fmla="*/ 3783106 h 5032188"/>
-              <a:gd name="connsiteX5" fmla="*/ 0 w 4398682"/>
-              <a:gd name="connsiteY5" fmla="*/ 1267012 h 5032188"/>
-              <a:gd name="connsiteX6" fmla="*/ 2187388 w 4398682"/>
-              <a:gd name="connsiteY6" fmla="*/ 0 h 5032188"/>
-            </a:gdLst>
-            <a:ahLst/>
-            <a:cxnLst>
-              <a:cxn ang="0">
-                <a:pos x="connsiteX0" y="connsiteY0"/>
-              </a:cxn>
-              <a:cxn ang="0">
-                <a:pos x="connsiteX1" y="connsiteY1"/>
-              </a:cxn>
-              <a:cxn ang="0">
-                <a:pos x="connsiteX2" y="connsiteY2"/>
-              </a:cxn>
-              <a:cxn ang="0">
-                <a:pos x="connsiteX3" y="connsiteY3"/>
-              </a:cxn>
-              <a:cxn ang="0">
-                <a:pos x="connsiteX4" y="connsiteY4"/>
-              </a:cxn>
-              <a:cxn ang="0">
-                <a:pos x="connsiteX5" y="connsiteY5"/>
-              </a:cxn>
-              <a:cxn ang="0">
-                <a:pos x="connsiteX6" y="connsiteY6"/>
-              </a:cxn>
-            </a:cxnLst>
-            <a:rect l="l" t="t" r="r" b="b"/>
-            <a:pathLst>
-              <a:path w="4398682" h="5032188">
-                <a:moveTo>
-                  <a:pt x="2187388" y="0"/>
-                </a:moveTo>
-                <a:lnTo>
-                  <a:pt x="4386729" y="1261035"/>
-                </a:lnTo>
-                <a:cubicBezTo>
-                  <a:pt x="4390713" y="2103718"/>
-                  <a:pt x="4394698" y="2946400"/>
-                  <a:pt x="4398682" y="3789083"/>
-                </a:cubicBezTo>
-                <a:lnTo>
-                  <a:pt x="2193365" y="5032188"/>
-                </a:lnTo>
-                <a:lnTo>
-                  <a:pt x="0" y="3783106"/>
-                </a:lnTo>
-                <a:lnTo>
-                  <a:pt x="0" y="1267012"/>
-                </a:lnTo>
-                <a:lnTo>
-                  <a:pt x="2187388" y="0"/>
-                </a:lnTo>
-                <a:close/>
-              </a:path>
-            </a:pathLst>
-          </a:custGeom>
-          <a:noFill/>
-          <a:ln w="19050" cap="flat" cmpd="sng" algn="ctr">
-            <a:solidFill>
-              <a:srgbClr val="C95B3A"/>
-            </a:solidFill>
-            <a:prstDash val="solid"/>
-            <a:miter lim="800000"/>
-          </a:ln>
-          <a:effectLst/>
-        </p:spPr>
-        <p:txBody>
-          <a:bodyPr rtlCol="0" anchor="ctr"/>
-          <a:lstStyle>
-            <a:defPPr>
-              <a:defRPr lang="es-ES"/>
-            </a:defPPr>
-          </a:lstStyle>
-          <a:p>
-            <a:pPr marL="0" marR="0" lvl="0" indent="0" algn="ctr" defTabSz="914400" rtl="0" eaLnBrk="1" fontAlgn="auto" latinLnBrk="0" hangingPunct="1">
-              <a:lnSpc>
-                <a:spcPct val="100000"/>
-              </a:lnSpc>
-              <a:spcBef>
-                <a:spcPts val="0"/>
-              </a:spcBef>
-              <a:spcAft>
-                <a:spcPts val="0"/>
-              </a:spcAft>
-              <a:buClrTx/>
-              <a:buSzTx/>
-              <a:buFontTx/>
-              <a:buNone/>
-              <a:tabLst/>
-              <a:defRPr lang="es-ES"/>
-            </a:pPr>
-            <a:endParaRPr kumimoji="0" lang="es-ES" sz="1800" b="0" i="0" u="none" strike="noStrike" kern="0" cap="none" spc="0" normalizeH="0" baseline="0" noProof="0" dirty="0">
-              <a:ln>
-                <a:noFill/>
-              </a:ln>
-              <a:solidFill>
-                <a:srgbClr val="F7D952"/>
-              </a:solidFill>
-              <a:effectLst/>
-              <a:uLnTx/>
-              <a:uFillTx/>
-              <a:latin typeface="Posterama Text SemiBold"/>
-              <a:ea typeface="+mn-ea"/>
-              <a:cs typeface="+mn-cs"/>
-            </a:endParaRPr>
-          </a:p>
-        </p:txBody>
-      </p:sp>
-      <p:sp>
-        <p:nvSpPr>
-          <p:cNvPr id="7" name="Marcador de número de diapositiva 6">
-            <a:extLst>
-              <a:ext uri="{FF2B5EF4-FFF2-40B4-BE49-F238E27FC236}">
-                <a16:creationId xmlns:a16="http://schemas.microsoft.com/office/drawing/2014/main" id="{7D6767F8-4670-E83D-85F4-1446B8B9D466}"/>
-              </a:ext>
-            </a:extLst>
-          </p:cNvPr>
-          <p:cNvSpPr>
-            <a:spLocks noGrp="1"/>
-          </p:cNvSpPr>
-          <p:nvPr>
-            <p:ph type="sldNum" sz="quarter" idx="53"/>
-          </p:nvPr>
-        </p:nvSpPr>
-        <p:spPr/>
-        <p:txBody>
-          <a:bodyPr rtlCol="0"/>
-          <a:lstStyle>
-            <a:defPPr>
-              <a:defRPr lang="es-ES"/>
-            </a:defPPr>
-          </a:lstStyle>
-          <a:p>
-            <a:pPr rtl="0"/>
-            <a:fld id="{47FEACEE-25B4-4A2D-B147-27296E36371D}" type="slidenum">
-              <a:rPr lang="es-ES" altLang="zh-CN" smtClean="0"/>
-              <a:pPr/>
-              <a:t>3</a:t>
-            </a:fld>
-            <a:endParaRPr lang="es-ES" altLang="zh-CN" dirty="0"/>
-          </a:p>
-        </p:txBody>
-      </p:sp>
-      <p:sp>
-        <p:nvSpPr>
-          <p:cNvPr id="3" name="TextBox 2">
-            <a:extLst>
-              <a:ext uri="{FF2B5EF4-FFF2-40B4-BE49-F238E27FC236}">
-                <a16:creationId xmlns:a16="http://schemas.microsoft.com/office/drawing/2014/main" id="{CEC0FFF5-C0F1-8A21-FC11-33CCECB870E8}"/>
-              </a:ext>
-            </a:extLst>
-          </p:cNvPr>
-          <p:cNvSpPr txBox="1"/>
-          <p:nvPr/>
-        </p:nvSpPr>
-        <p:spPr>
-          <a:xfrm>
-            <a:off x="509574" y="4098594"/>
-            <a:ext cx="4114800" cy="664187"/>
-          </a:xfrm>
-          <a:prstGeom prst="rect">
-            <a:avLst/>
-          </a:prstGeom>
-          <a:noFill/>
-        </p:spPr>
-        <p:txBody>
-          <a:bodyPr wrap="square">
-            <a:spAutoFit/>
-          </a:bodyPr>
-          <a:lstStyle/>
-          <a:p>
-            <a:pPr marL="285750" indent="-285750">
-              <a:buFont typeface="Arial" panose="020B0604020202020204" pitchFamily="34" charset="0"/>
-              <a:buChar char="•"/>
-            </a:pPr>
-            <a:r>
-              <a:rPr lang="es-PA" sz="1800" dirty="0">
-                <a:effectLst/>
-                <a:latin typeface="Aptos" panose="020B0004020202020204" pitchFamily="34" charset="0"/>
-                <a:ea typeface="Aptos" panose="020B0004020202020204" pitchFamily="34" charset="0"/>
-                <a:cs typeface="Times New Roman" panose="02020603050405020304" pitchFamily="18" charset="0"/>
-              </a:rPr>
-              <a:t>El objetivo principal es identificar patrones </a:t>
-            </a:r>
-            <a:r>
-              <a:rPr lang="es-MX" sz="1800" dirty="0">
-                <a:effectLst/>
-                <a:latin typeface="Aptos" panose="020B0004020202020204" pitchFamily="34" charset="0"/>
-                <a:ea typeface="Aptos" panose="020B0004020202020204" pitchFamily="34" charset="0"/>
-                <a:cs typeface="Times New Roman" panose="02020603050405020304" pitchFamily="18" charset="0"/>
-              </a:rPr>
-              <a:t>y realizar proyecciones</a:t>
-            </a:r>
-            <a:endParaRPr lang="es-PA" dirty="0"/>
-          </a:p>
-        </p:txBody>
-      </p:sp>
-    </p:spTree>
-    <p:extLst>
-      <p:ext uri="{BB962C8B-B14F-4D97-AF65-F5344CB8AC3E}">
-        <p14:creationId xmlns:p14="http://schemas.microsoft.com/office/powerpoint/2010/main" val="77554804"/>
-      </p:ext>
-    </p:extLst>
-  </p:cSld>
-  <p:clrMapOvr>
-    <a:masterClrMapping/>
-  </p:clrMapOvr>
-</p:sld>
-</file>
-
-<file path=ppt/slides/slide4.xml><?xml version="1.0" encoding="utf-8"?>
 <p:sld xmlns:a="http://schemas.openxmlformats.org/drawingml/2006/main" xmlns:r="http://schemas.openxmlformats.org/officeDocument/2006/relationships" xmlns:p="http://schemas.openxmlformats.org/presentationml/2006/main">
   <p:cSld>
     <p:spTree>
@@ -27388,92 +26164,25 @@
         </p:nvSpPr>
         <p:spPr>
           <a:xfrm>
-            <a:off x="5710279" y="568799"/>
-            <a:ext cx="4518122" cy="600301"/>
+            <a:off x="509574" y="2096892"/>
+            <a:ext cx="5117162" cy="1325563"/>
           </a:xfrm>
         </p:spPr>
         <p:txBody>
-          <a:bodyPr rtlCol="0"/>
+          <a:bodyPr vert="horz" lIns="91440" tIns="45720" rIns="91440" bIns="45720" rtlCol="0" anchor="ctr">
+            <a:normAutofit/>
+          </a:bodyPr>
           <a:lstStyle>
             <a:defPPr>
               <a:defRPr lang="es-ES"/>
             </a:defPPr>
           </a:lstStyle>
           <a:p>
-            <a:pPr rtl="0"/>
             <a:r>
               <a:rPr lang="es-ES" dirty="0"/>
               <a:t>Motivación:</a:t>
             </a:r>
-          </a:p>
-        </p:txBody>
-      </p:sp>
-      <p:sp>
-        <p:nvSpPr>
-          <p:cNvPr id="4" name="Marcador de pie de página 3">
-            <a:extLst>
-              <a:ext uri="{FF2B5EF4-FFF2-40B4-BE49-F238E27FC236}">
-                <a16:creationId xmlns:a16="http://schemas.microsoft.com/office/drawing/2014/main" id="{B85111F9-0675-C5D7-7F0E-4830489376ED}"/>
-              </a:ext>
-            </a:extLst>
-          </p:cNvPr>
-          <p:cNvSpPr>
-            <a:spLocks noGrp="1"/>
-          </p:cNvSpPr>
-          <p:nvPr>
-            <p:ph type="ftr" sz="quarter" idx="30"/>
-          </p:nvPr>
-        </p:nvSpPr>
-        <p:spPr/>
-        <p:txBody>
-          <a:bodyPr rtlCol="0"/>
-          <a:lstStyle>
-            <a:defPPr>
-              <a:defRPr lang="es-ES"/>
-            </a:defPPr>
-          </a:lstStyle>
-          <a:p>
-            <a:pPr rtl="0"/>
-            <a:r>
-              <a:rPr lang="es-ES" noProof="0"/>
-              <a:t>Título de la presentación</a:t>
-            </a:r>
-            <a:endParaRPr lang="es-ES" noProof="0" dirty="0"/>
-          </a:p>
-        </p:txBody>
-      </p:sp>
-      <p:sp>
-        <p:nvSpPr>
-          <p:cNvPr id="5" name="Marcador de número de diapositiva 4">
-            <a:extLst>
-              <a:ext uri="{FF2B5EF4-FFF2-40B4-BE49-F238E27FC236}">
-                <a16:creationId xmlns:a16="http://schemas.microsoft.com/office/drawing/2014/main" id="{34E5D756-3921-1479-2131-6D068B5C737D}"/>
-              </a:ext>
-            </a:extLst>
-          </p:cNvPr>
-          <p:cNvSpPr>
-            <a:spLocks noGrp="1"/>
-          </p:cNvSpPr>
-          <p:nvPr>
-            <p:ph type="sldNum" sz="quarter" idx="31"/>
-          </p:nvPr>
-        </p:nvSpPr>
-        <p:spPr/>
-        <p:txBody>
-          <a:bodyPr rtlCol="0"/>
-          <a:lstStyle>
-            <a:defPPr>
-              <a:defRPr lang="es-ES"/>
-            </a:defPPr>
-          </a:lstStyle>
-          <a:p>
-            <a:pPr rtl="0"/>
-            <a:fld id="{47FEACEE-25B4-4A2D-B147-27296E36371D}" type="slidenum">
-              <a:rPr lang="es-ES" altLang="zh-CN" noProof="0" smtClean="0"/>
-              <a:pPr rtl="0"/>
-              <a:t>4</a:t>
-            </a:fld>
-            <a:endParaRPr lang="es-ES" altLang="zh-CN" noProof="0" dirty="0"/>
+            <a:endParaRPr lang="es-ES"/>
           </a:p>
         </p:txBody>
       </p:sp>
@@ -27493,15 +26202,17 @@
         </p:nvSpPr>
         <p:spPr>
           <a:xfrm>
-            <a:off x="5556868" y="1576232"/>
-            <a:ext cx="4940826" cy="2923579"/>
+            <a:off x="509574" y="3435546"/>
+            <a:ext cx="4260850" cy="2051050"/>
           </a:xfrm>
           <a:prstGeom prst="rect">
             <a:avLst/>
           </a:prstGeom>
         </p:spPr>
         <p:txBody>
-          <a:bodyPr rtlCol="0"/>
+          <a:bodyPr vert="horz" lIns="91440" tIns="45720" rIns="91440" bIns="45720" rtlCol="0">
+            <a:normAutofit/>
+          </a:bodyPr>
           <a:lstStyle>
             <a:defPPr>
               <a:defRPr lang="es-ES"/>
@@ -27670,16 +26381,154 @@
             </a:lvl9pPr>
           </a:lstStyle>
           <a:p>
+            <a:pPr marL="0" indent="0">
+              <a:lnSpc>
+                <a:spcPct val="100000"/>
+              </a:lnSpc>
+              <a:buNone/>
+            </a:pPr>
             <a:r>
-              <a:rPr lang="es-MX" sz="2400" dirty="0">
+              <a:rPr lang="es-ES" sz="1500" b="0" kern="1200">
                 <a:effectLst/>
-                <a:latin typeface="Aptos" panose="020B0004020202020204" pitchFamily="34" charset="0"/>
-                <a:ea typeface="Aptos" panose="020B0004020202020204" pitchFamily="34" charset="0"/>
-                <a:cs typeface="Times New Roman" panose="02020603050405020304" pitchFamily="18" charset="0"/>
+                <a:latin typeface="+mn-lt"/>
+                <a:ea typeface="+mn-ea"/>
+                <a:cs typeface="+mn-cs"/>
               </a:rPr>
               <a:t>Este estudio cobra particular relevancia desde la perspectiva del Canal de Panamá, entidad clave en la cadena logística mundial y directamente conectada con los principales puertos de Estados Unidos y China.</a:t>
             </a:r>
-            <a:endParaRPr lang="es-MX" sz="2800" dirty="0"/>
+            <a:endParaRPr lang="es-ES" sz="1500" b="0" kern="1200">
+              <a:latin typeface="+mn-lt"/>
+              <a:ea typeface="+mn-ea"/>
+              <a:cs typeface="+mn-cs"/>
+            </a:endParaRPr>
+          </a:p>
+        </p:txBody>
+      </p:sp>
+      <p:pic>
+        <p:nvPicPr>
+          <p:cNvPr id="3" name="Picture Placeholder 2" descr="A ship in the water&#10;&#10;AI-generated content may be incorrect.">
+            <a:extLst>
+              <a:ext uri="{FF2B5EF4-FFF2-40B4-BE49-F238E27FC236}">
+                <a16:creationId xmlns:a16="http://schemas.microsoft.com/office/drawing/2014/main" id="{242A9942-D511-50E3-95E6-336CED7079F9}"/>
+              </a:ext>
+            </a:extLst>
+          </p:cNvPr>
+          <p:cNvPicPr>
+            <a:picLocks noGrp="1" noChangeAspect="1"/>
+          </p:cNvPicPr>
+          <p:nvPr>
+            <p:ph type="pic" sz="quarter" idx="51"/>
+          </p:nvPr>
+        </p:nvPicPr>
+        <p:blipFill>
+          <a:blip r:embed="rId3"/>
+          <a:srcRect l="38249" r="38249"/>
+          <a:stretch>
+            <a:fillRect/>
+          </a:stretch>
+        </p:blipFill>
+        <p:spPr>
+          <a:xfrm>
+            <a:off x="5745163" y="0"/>
+            <a:ext cx="6446837" cy="6858000"/>
+          </a:xfrm>
+        </p:spPr>
+      </p:pic>
+      <p:sp>
+        <p:nvSpPr>
+          <p:cNvPr id="4" name="Marcador de pie de página 3">
+            <a:extLst>
+              <a:ext uri="{FF2B5EF4-FFF2-40B4-BE49-F238E27FC236}">
+                <a16:creationId xmlns:a16="http://schemas.microsoft.com/office/drawing/2014/main" id="{B85111F9-0675-C5D7-7F0E-4830489376ED}"/>
+              </a:ext>
+            </a:extLst>
+          </p:cNvPr>
+          <p:cNvSpPr>
+            <a:spLocks noGrp="1"/>
+          </p:cNvSpPr>
+          <p:nvPr>
+            <p:ph type="ftr" sz="quarter" idx="52"/>
+          </p:nvPr>
+        </p:nvSpPr>
+        <p:spPr>
+          <a:xfrm>
+            <a:off x="484632" y="6217920"/>
+            <a:ext cx="4114800" cy="365125"/>
+          </a:xfrm>
+        </p:spPr>
+        <p:txBody>
+          <a:bodyPr vert="horz" lIns="91440" tIns="45720" rIns="91440" bIns="45720" rtlCol="0" anchor="ctr">
+            <a:normAutofit/>
+          </a:bodyPr>
+          <a:lstStyle>
+            <a:defPPr>
+              <a:defRPr lang="es-ES"/>
+            </a:defPPr>
+          </a:lstStyle>
+          <a:p>
+            <a:pPr>
+              <a:spcAft>
+                <a:spcPts val="600"/>
+              </a:spcAft>
+            </a:pPr>
+            <a:r>
+              <a:rPr lang="es-ES" kern="1200" noProof="0">
+                <a:latin typeface="+mn-lt"/>
+                <a:ea typeface="+mn-ea"/>
+                <a:cs typeface="+mn-cs"/>
+              </a:rPr>
+              <a:t>Título de la presentación</a:t>
+            </a:r>
+          </a:p>
+        </p:txBody>
+      </p:sp>
+      <p:sp>
+        <p:nvSpPr>
+          <p:cNvPr id="5" name="Marcador de número de diapositiva 4">
+            <a:extLst>
+              <a:ext uri="{FF2B5EF4-FFF2-40B4-BE49-F238E27FC236}">
+                <a16:creationId xmlns:a16="http://schemas.microsoft.com/office/drawing/2014/main" id="{34E5D756-3921-1479-2131-6D068B5C737D}"/>
+              </a:ext>
+            </a:extLst>
+          </p:cNvPr>
+          <p:cNvSpPr>
+            <a:spLocks noGrp="1"/>
+          </p:cNvSpPr>
+          <p:nvPr>
+            <p:ph type="sldNum" sz="quarter" idx="53"/>
+          </p:nvPr>
+        </p:nvSpPr>
+        <p:spPr>
+          <a:xfrm>
+            <a:off x="11194169" y="6217920"/>
+            <a:ext cx="458592" cy="365125"/>
+          </a:xfrm>
+        </p:spPr>
+        <p:txBody>
+          <a:bodyPr vert="horz" lIns="91440" tIns="45720" rIns="91440" bIns="45720" rtlCol="0" anchor="ctr">
+            <a:normAutofit/>
+          </a:bodyPr>
+          <a:lstStyle>
+            <a:defPPr>
+              <a:defRPr lang="es-ES"/>
+            </a:defPPr>
+          </a:lstStyle>
+          <a:p>
+            <a:pPr>
+              <a:spcAft>
+                <a:spcPts val="600"/>
+              </a:spcAft>
+            </a:pPr>
+            <a:fld id="{47FEACEE-25B4-4A2D-B147-27296E36371D}" type="slidenum">
+              <a:rPr lang="es-ES" altLang="zh-CN" noProof="0" smtClean="0"/>
+              <a:pPr>
+                <a:spcAft>
+                  <a:spcPts val="600"/>
+                </a:spcAft>
+              </a:pPr>
+              <a:t>3</a:t>
+            </a:fld>
+            <a:endParaRPr lang="es-ES" altLang="zh-CN" noProof="0"/>
           </a:p>
         </p:txBody>
       </p:sp>
@@ -27696,446 +26545,7 @@
 </p:sld>
 </file>
 
-<file path=ppt/slides/slide5.xml><?xml version="1.0" encoding="utf-8"?>
-<p:sld xmlns:a="http://schemas.openxmlformats.org/drawingml/2006/main" xmlns:r="http://schemas.openxmlformats.org/officeDocument/2006/relationships" xmlns:p="http://schemas.openxmlformats.org/presentationml/2006/main">
-  <p:cSld>
-    <p:spTree>
-      <p:nvGrpSpPr>
-        <p:cNvPr id="1" name="">
-          <a:extLst>
-            <a:ext uri="{FF2B5EF4-FFF2-40B4-BE49-F238E27FC236}">
-              <a16:creationId xmlns:a16="http://schemas.microsoft.com/office/drawing/2014/main" id="{3FF972F2-68D9-8D4F-7564-3D94FA73E27D}"/>
-            </a:ext>
-          </a:extLst>
-        </p:cNvPr>
-        <p:cNvGrpSpPr/>
-        <p:nvPr/>
-      </p:nvGrpSpPr>
-      <p:grpSpPr>
-        <a:xfrm>
-          <a:off x="0" y="0"/>
-          <a:ext cx="0" cy="0"/>
-          <a:chOff x="0" y="0"/>
-          <a:chExt cx="0" cy="0"/>
-        </a:xfrm>
-      </p:grpSpPr>
-      <p:sp>
-        <p:nvSpPr>
-          <p:cNvPr id="6" name="Título 5">
-            <a:extLst>
-              <a:ext uri="{FF2B5EF4-FFF2-40B4-BE49-F238E27FC236}">
-                <a16:creationId xmlns:a16="http://schemas.microsoft.com/office/drawing/2014/main" id="{84B9F123-B527-6D89-FC83-302342941E68}"/>
-              </a:ext>
-            </a:extLst>
-          </p:cNvPr>
-          <p:cNvSpPr>
-            <a:spLocks noGrp="1"/>
-          </p:cNvSpPr>
-          <p:nvPr>
-            <p:ph type="title"/>
-          </p:nvPr>
-        </p:nvSpPr>
-        <p:spPr>
-          <a:xfrm>
-            <a:off x="5710279" y="568799"/>
-            <a:ext cx="4518122" cy="600301"/>
-          </a:xfrm>
-        </p:spPr>
-        <p:txBody>
-          <a:bodyPr rtlCol="0"/>
-          <a:lstStyle>
-            <a:defPPr>
-              <a:defRPr lang="es-ES"/>
-            </a:defPPr>
-          </a:lstStyle>
-          <a:p>
-            <a:pPr rtl="0"/>
-            <a:r>
-              <a:rPr lang="es-ES" dirty="0"/>
-              <a:t>Problema:</a:t>
-            </a:r>
-          </a:p>
-        </p:txBody>
-      </p:sp>
-      <p:sp>
-        <p:nvSpPr>
-          <p:cNvPr id="4" name="Marcador de pie de página 3">
-            <a:extLst>
-              <a:ext uri="{FF2B5EF4-FFF2-40B4-BE49-F238E27FC236}">
-                <a16:creationId xmlns:a16="http://schemas.microsoft.com/office/drawing/2014/main" id="{638C24D7-D02A-5F8A-968A-9322C1343602}"/>
-              </a:ext>
-            </a:extLst>
-          </p:cNvPr>
-          <p:cNvSpPr>
-            <a:spLocks noGrp="1"/>
-          </p:cNvSpPr>
-          <p:nvPr>
-            <p:ph type="ftr" sz="quarter" idx="30"/>
-          </p:nvPr>
-        </p:nvSpPr>
-        <p:spPr/>
-        <p:txBody>
-          <a:bodyPr rtlCol="0"/>
-          <a:lstStyle>
-            <a:defPPr>
-              <a:defRPr lang="es-ES"/>
-            </a:defPPr>
-          </a:lstStyle>
-          <a:p>
-            <a:pPr rtl="0"/>
-            <a:r>
-              <a:rPr lang="es-ES" noProof="0"/>
-              <a:t>Título de la presentación</a:t>
-            </a:r>
-            <a:endParaRPr lang="es-ES" noProof="0" dirty="0"/>
-          </a:p>
-        </p:txBody>
-      </p:sp>
-      <p:sp>
-        <p:nvSpPr>
-          <p:cNvPr id="5" name="Marcador de número de diapositiva 4">
-            <a:extLst>
-              <a:ext uri="{FF2B5EF4-FFF2-40B4-BE49-F238E27FC236}">
-                <a16:creationId xmlns:a16="http://schemas.microsoft.com/office/drawing/2014/main" id="{1ED5924C-2087-0B4C-C0AE-E380A9A581BA}"/>
-              </a:ext>
-            </a:extLst>
-          </p:cNvPr>
-          <p:cNvSpPr>
-            <a:spLocks noGrp="1"/>
-          </p:cNvSpPr>
-          <p:nvPr>
-            <p:ph type="sldNum" sz="quarter" idx="31"/>
-          </p:nvPr>
-        </p:nvSpPr>
-        <p:spPr/>
-        <p:txBody>
-          <a:bodyPr rtlCol="0"/>
-          <a:lstStyle>
-            <a:defPPr>
-              <a:defRPr lang="es-ES"/>
-            </a:defPPr>
-          </a:lstStyle>
-          <a:p>
-            <a:pPr rtl="0"/>
-            <a:fld id="{47FEACEE-25B4-4A2D-B147-27296E36371D}" type="slidenum">
-              <a:rPr lang="es-ES" altLang="zh-CN" noProof="0" smtClean="0"/>
-              <a:pPr rtl="0"/>
-              <a:t>5</a:t>
-            </a:fld>
-            <a:endParaRPr lang="es-ES" altLang="zh-CN" noProof="0" dirty="0"/>
-          </a:p>
-        </p:txBody>
-      </p:sp>
-      <p:sp>
-        <p:nvSpPr>
-          <p:cNvPr id="7" name="Marcador de texto 19">
-            <a:extLst>
-              <a:ext uri="{FF2B5EF4-FFF2-40B4-BE49-F238E27FC236}">
-                <a16:creationId xmlns:a16="http://schemas.microsoft.com/office/drawing/2014/main" id="{1BD0CC90-0922-3787-3C2E-58909572D38F}"/>
-              </a:ext>
-            </a:extLst>
-          </p:cNvPr>
-          <p:cNvSpPr txBox="1">
-            <a:spLocks/>
-          </p:cNvSpPr>
-          <p:nvPr/>
-        </p:nvSpPr>
-        <p:spPr>
-          <a:xfrm>
-            <a:off x="5556867" y="1576231"/>
-            <a:ext cx="5637301" cy="4156815"/>
-          </a:xfrm>
-          <a:prstGeom prst="rect">
-            <a:avLst/>
-          </a:prstGeom>
-        </p:spPr>
-        <p:txBody>
-          <a:bodyPr rtlCol="0"/>
-          <a:lstStyle>
-            <a:defPPr>
-              <a:defRPr lang="es-ES"/>
-            </a:defPPr>
-            <a:lvl1pPr marL="228600" indent="-228600" algn="l" defTabSz="914400" rtl="0" eaLnBrk="1" latinLnBrk="0" hangingPunct="1">
-              <a:lnSpc>
-                <a:spcPct val="90000"/>
-              </a:lnSpc>
-              <a:spcBef>
-                <a:spcPts val="1000"/>
-              </a:spcBef>
-              <a:buFont typeface="Arial" panose="020B0604020202020204" pitchFamily="34" charset="0"/>
-              <a:buChar char="•"/>
-              <a:defRPr lang="es-ES" sz="2000" kern="1200">
-                <a:solidFill>
-                  <a:schemeClr val="accent6"/>
-                </a:solidFill>
-                <a:latin typeface="+mn-lt"/>
-                <a:ea typeface="+mn-ea"/>
-                <a:cs typeface="+mn-cs"/>
-              </a:defRPr>
-            </a:lvl1pPr>
-            <a:lvl2pPr marL="685800" indent="-228600" algn="l" defTabSz="914400" rtl="0" eaLnBrk="1" latinLnBrk="0" hangingPunct="1">
-              <a:lnSpc>
-                <a:spcPct val="90000"/>
-              </a:lnSpc>
-              <a:spcBef>
-                <a:spcPts val="500"/>
-              </a:spcBef>
-              <a:buFont typeface="Arial" panose="020B0604020202020204" pitchFamily="34" charset="0"/>
-              <a:buChar char="•"/>
-              <a:defRPr lang="es-ES" sz="2000" kern="1200">
-                <a:solidFill>
-                  <a:schemeClr val="accent6"/>
-                </a:solidFill>
-                <a:latin typeface="+mn-lt"/>
-                <a:ea typeface="+mn-ea"/>
-                <a:cs typeface="+mn-cs"/>
-              </a:defRPr>
-            </a:lvl2pPr>
-            <a:lvl3pPr marL="1143000" indent="-228600" algn="l" defTabSz="914400" rtl="0" eaLnBrk="1" latinLnBrk="0" hangingPunct="1">
-              <a:lnSpc>
-                <a:spcPct val="90000"/>
-              </a:lnSpc>
-              <a:spcBef>
-                <a:spcPts val="500"/>
-              </a:spcBef>
-              <a:buFont typeface="Arial" panose="020B0604020202020204" pitchFamily="34" charset="0"/>
-              <a:buChar char="•"/>
-              <a:defRPr lang="es-ES" sz="2000" kern="1200">
-                <a:solidFill>
-                  <a:schemeClr val="accent6"/>
-                </a:solidFill>
-                <a:latin typeface="+mn-lt"/>
-                <a:ea typeface="+mn-ea"/>
-                <a:cs typeface="+mn-cs"/>
-              </a:defRPr>
-            </a:lvl3pPr>
-            <a:lvl4pPr marL="1600200" indent="-228600" algn="l" defTabSz="914400" rtl="0" eaLnBrk="1" latinLnBrk="0" hangingPunct="1">
-              <a:lnSpc>
-                <a:spcPct val="90000"/>
-              </a:lnSpc>
-              <a:spcBef>
-                <a:spcPts val="500"/>
-              </a:spcBef>
-              <a:buFont typeface="Arial" panose="020B0604020202020204" pitchFamily="34" charset="0"/>
-              <a:buChar char="•"/>
-              <a:defRPr lang="es-ES" sz="2000" kern="1200">
-                <a:solidFill>
-                  <a:schemeClr val="accent6"/>
-                </a:solidFill>
-                <a:latin typeface="+mn-lt"/>
-                <a:ea typeface="+mn-ea"/>
-                <a:cs typeface="+mn-cs"/>
-              </a:defRPr>
-            </a:lvl4pPr>
-            <a:lvl5pPr marL="2057400" indent="-228600" algn="l" defTabSz="914400" rtl="0" eaLnBrk="1" latinLnBrk="0" hangingPunct="1">
-              <a:lnSpc>
-                <a:spcPct val="90000"/>
-              </a:lnSpc>
-              <a:spcBef>
-                <a:spcPts val="500"/>
-              </a:spcBef>
-              <a:buFont typeface="Arial" panose="020B0604020202020204" pitchFamily="34" charset="0"/>
-              <a:buChar char="•"/>
-              <a:defRPr lang="es-ES" sz="2000" kern="1200">
-                <a:solidFill>
-                  <a:schemeClr val="accent6"/>
-                </a:solidFill>
-                <a:latin typeface="+mn-lt"/>
-                <a:ea typeface="+mn-ea"/>
-                <a:cs typeface="+mn-cs"/>
-              </a:defRPr>
-            </a:lvl5pPr>
-            <a:lvl6pPr marL="2514600" indent="-228600" algn="l" defTabSz="914400" rtl="0" eaLnBrk="1" latinLnBrk="0" hangingPunct="1">
-              <a:lnSpc>
-                <a:spcPct val="90000"/>
-              </a:lnSpc>
-              <a:spcBef>
-                <a:spcPts val="500"/>
-              </a:spcBef>
-              <a:buFont typeface="Arial" panose="020B0604020202020204" pitchFamily="34" charset="0"/>
-              <a:buChar char="•"/>
-              <a:defRPr lang="es-ES" sz="1800" kern="1200">
-                <a:solidFill>
-                  <a:schemeClr val="tx1"/>
-                </a:solidFill>
-                <a:latin typeface="+mn-lt"/>
-                <a:ea typeface="+mn-ea"/>
-                <a:cs typeface="+mn-cs"/>
-              </a:defRPr>
-            </a:lvl6pPr>
-            <a:lvl7pPr marL="2971800" indent="-228600" algn="l" defTabSz="914400" rtl="0" eaLnBrk="1" latinLnBrk="0" hangingPunct="1">
-              <a:lnSpc>
-                <a:spcPct val="90000"/>
-              </a:lnSpc>
-              <a:spcBef>
-                <a:spcPts val="500"/>
-              </a:spcBef>
-              <a:buFont typeface="Arial" panose="020B0604020202020204" pitchFamily="34" charset="0"/>
-              <a:buChar char="•"/>
-              <a:defRPr lang="es-ES" sz="1800" kern="1200">
-                <a:solidFill>
-                  <a:schemeClr val="tx1"/>
-                </a:solidFill>
-                <a:latin typeface="+mn-lt"/>
-                <a:ea typeface="+mn-ea"/>
-                <a:cs typeface="+mn-cs"/>
-              </a:defRPr>
-            </a:lvl7pPr>
-            <a:lvl8pPr marL="3429000" indent="-228600" algn="l" defTabSz="914400" rtl="0" eaLnBrk="1" latinLnBrk="0" hangingPunct="1">
-              <a:lnSpc>
-                <a:spcPct val="90000"/>
-              </a:lnSpc>
-              <a:spcBef>
-                <a:spcPts val="500"/>
-              </a:spcBef>
-              <a:buFont typeface="Arial" panose="020B0604020202020204" pitchFamily="34" charset="0"/>
-              <a:buChar char="•"/>
-              <a:defRPr lang="es-ES" sz="1800" kern="1200">
-                <a:solidFill>
-                  <a:schemeClr val="tx1"/>
-                </a:solidFill>
-                <a:latin typeface="+mn-lt"/>
-                <a:ea typeface="+mn-ea"/>
-                <a:cs typeface="+mn-cs"/>
-              </a:defRPr>
-            </a:lvl8pPr>
-            <a:lvl9pPr marL="3886200" indent="-228600" algn="l" defTabSz="914400" rtl="0" eaLnBrk="1" latinLnBrk="0" hangingPunct="1">
-              <a:lnSpc>
-                <a:spcPct val="90000"/>
-              </a:lnSpc>
-              <a:spcBef>
-                <a:spcPts val="500"/>
-              </a:spcBef>
-              <a:buFont typeface="Arial" panose="020B0604020202020204" pitchFamily="34" charset="0"/>
-              <a:buChar char="•"/>
-              <a:defRPr lang="es-ES" sz="1800" kern="1200">
-                <a:solidFill>
-                  <a:schemeClr val="tx1"/>
-                </a:solidFill>
-                <a:latin typeface="+mn-lt"/>
-                <a:ea typeface="+mn-ea"/>
-                <a:cs typeface="+mn-cs"/>
-              </a:defRPr>
-            </a:lvl9pPr>
-          </a:lstStyle>
-          <a:p>
-            <a:r>
-              <a:rPr lang="es-MX" sz="2400" dirty="0">
-                <a:effectLst/>
-                <a:latin typeface="Aptos" panose="020B0004020202020204" pitchFamily="34" charset="0"/>
-                <a:ea typeface="Aptos" panose="020B0004020202020204" pitchFamily="34" charset="0"/>
-                <a:cs typeface="Times New Roman" panose="02020603050405020304" pitchFamily="18" charset="0"/>
-              </a:rPr>
-              <a:t>Este proyecto busca analizar el comportamiento histórico de las importaciones en toneladas métricas desde el año </a:t>
-            </a:r>
-            <a:r>
-              <a:rPr lang="es-MX" sz="2400" b="1" dirty="0">
-                <a:effectLst/>
-                <a:latin typeface="Aptos" panose="020B0004020202020204" pitchFamily="34" charset="0"/>
-                <a:ea typeface="Aptos" panose="020B0004020202020204" pitchFamily="34" charset="0"/>
-                <a:cs typeface="Times New Roman" panose="02020603050405020304" pitchFamily="18" charset="0"/>
-              </a:rPr>
-              <a:t>2000</a:t>
-            </a:r>
-            <a:r>
-              <a:rPr lang="es-MX" sz="2400" dirty="0">
-                <a:effectLst/>
-                <a:latin typeface="Aptos" panose="020B0004020202020204" pitchFamily="34" charset="0"/>
-                <a:ea typeface="Aptos" panose="020B0004020202020204" pitchFamily="34" charset="0"/>
-                <a:cs typeface="Times New Roman" panose="02020603050405020304" pitchFamily="18" charset="0"/>
-              </a:rPr>
-              <a:t> al </a:t>
-            </a:r>
-            <a:r>
-              <a:rPr lang="es-MX" sz="2400" b="1" dirty="0">
-                <a:effectLst/>
-                <a:latin typeface="Aptos" panose="020B0004020202020204" pitchFamily="34" charset="0"/>
-                <a:ea typeface="Aptos" panose="020B0004020202020204" pitchFamily="34" charset="0"/>
-                <a:cs typeface="Times New Roman" panose="02020603050405020304" pitchFamily="18" charset="0"/>
-              </a:rPr>
-              <a:t>2017</a:t>
-            </a:r>
-            <a:r>
-              <a:rPr lang="es-MX" sz="2400" dirty="0">
-                <a:effectLst/>
-                <a:latin typeface="Aptos" panose="020B0004020202020204" pitchFamily="34" charset="0"/>
-                <a:ea typeface="Aptos" panose="020B0004020202020204" pitchFamily="34" charset="0"/>
-                <a:cs typeface="Times New Roman" panose="02020603050405020304" pitchFamily="18" charset="0"/>
-              </a:rPr>
-              <a:t> en los principales puertos de Estados Unidos como </a:t>
-            </a:r>
-            <a:r>
-              <a:rPr lang="es-MX" sz="2400" b="1" dirty="0">
-                <a:effectLst/>
-                <a:latin typeface="Aptos" panose="020B0004020202020204" pitchFamily="34" charset="0"/>
-                <a:ea typeface="Aptos" panose="020B0004020202020204" pitchFamily="34" charset="0"/>
-                <a:cs typeface="Times New Roman" panose="02020603050405020304" pitchFamily="18" charset="0"/>
-              </a:rPr>
-              <a:t>Nueva York</a:t>
-            </a:r>
-            <a:r>
-              <a:rPr lang="es-MX" sz="2400" dirty="0">
-                <a:effectLst/>
-                <a:latin typeface="Aptos" panose="020B0004020202020204" pitchFamily="34" charset="0"/>
-                <a:ea typeface="Aptos" panose="020B0004020202020204" pitchFamily="34" charset="0"/>
-                <a:cs typeface="Times New Roman" panose="02020603050405020304" pitchFamily="18" charset="0"/>
-              </a:rPr>
-              <a:t>, </a:t>
-            </a:r>
-            <a:r>
-              <a:rPr lang="es-MX" sz="2400" b="1" dirty="0">
-                <a:effectLst/>
-                <a:latin typeface="Aptos" panose="020B0004020202020204" pitchFamily="34" charset="0"/>
-                <a:ea typeface="Aptos" panose="020B0004020202020204" pitchFamily="34" charset="0"/>
-                <a:cs typeface="Times New Roman" panose="02020603050405020304" pitchFamily="18" charset="0"/>
-              </a:rPr>
-              <a:t>Savannah</a:t>
-            </a:r>
-            <a:r>
-              <a:rPr lang="es-MX" sz="2400" dirty="0">
-                <a:effectLst/>
-                <a:latin typeface="Aptos" panose="020B0004020202020204" pitchFamily="34" charset="0"/>
-                <a:ea typeface="Aptos" panose="020B0004020202020204" pitchFamily="34" charset="0"/>
-                <a:cs typeface="Times New Roman" panose="02020603050405020304" pitchFamily="18" charset="0"/>
-              </a:rPr>
-              <a:t> y </a:t>
-            </a:r>
-            <a:r>
-              <a:rPr lang="es-MX" sz="2400" b="1" dirty="0">
-                <a:effectLst/>
-                <a:latin typeface="Aptos" panose="020B0004020202020204" pitchFamily="34" charset="0"/>
-                <a:ea typeface="Aptos" panose="020B0004020202020204" pitchFamily="34" charset="0"/>
-                <a:cs typeface="Times New Roman" panose="02020603050405020304" pitchFamily="18" charset="0"/>
-              </a:rPr>
-              <a:t>Miami</a:t>
-            </a:r>
-            <a:r>
-              <a:rPr lang="es-MX" sz="2400" dirty="0">
-                <a:effectLst/>
-                <a:latin typeface="Aptos" panose="020B0004020202020204" pitchFamily="34" charset="0"/>
-                <a:ea typeface="Aptos" panose="020B0004020202020204" pitchFamily="34" charset="0"/>
-                <a:cs typeface="Times New Roman" panose="02020603050405020304" pitchFamily="18" charset="0"/>
-              </a:rPr>
-              <a:t> ya que como mencioné anteriormente forman parte de una de las principales rutas comerciales que transitan por el Canal De Panamá. </a:t>
-            </a:r>
-            <a:endParaRPr lang="es-MX" sz="2800" dirty="0"/>
-          </a:p>
-        </p:txBody>
-      </p:sp>
-    </p:spTree>
-    <p:extLst>
-      <p:ext uri="{BB962C8B-B14F-4D97-AF65-F5344CB8AC3E}">
-        <p14:creationId xmlns:p14="http://schemas.microsoft.com/office/powerpoint/2010/main" val="3950721384"/>
-      </p:ext>
-    </p:extLst>
-  </p:cSld>
-  <p:clrMapOvr>
-    <a:masterClrMapping/>
-  </p:clrMapOvr>
-</p:sld>
-</file>
-
-<file path=ppt/slides/slide6.xml><?xml version="1.0" encoding="utf-8"?>
+<file path=ppt/slides/slide4.xml><?xml version="1.0" encoding="utf-8"?>
 <p:sld xmlns:a="http://schemas.openxmlformats.org/drawingml/2006/main" xmlns:r="http://schemas.openxmlformats.org/officeDocument/2006/relationships" xmlns:p="http://schemas.openxmlformats.org/presentationml/2006/main">
   <p:cSld>
     <p:spTree>
@@ -28154,10 +26564,10 @@
       </p:grpSpPr>
       <p:sp>
         <p:nvSpPr>
-          <p:cNvPr id="2" name="Title 1">
-            <a:extLst>
-              <a:ext uri="{FF2B5EF4-FFF2-40B4-BE49-F238E27FC236}">
-                <a16:creationId xmlns:a16="http://schemas.microsoft.com/office/drawing/2014/main" id="{12C9A2AA-C586-DF88-B502-8CC7547736FC}"/>
+          <p:cNvPr id="11" name="Title 1">
+            <a:extLst>
+              <a:ext uri="{FF2B5EF4-FFF2-40B4-BE49-F238E27FC236}">
+                <a16:creationId xmlns:a16="http://schemas.microsoft.com/office/drawing/2014/main" id="{B2368DCE-3BEC-10F3-19B4-D9E46EB4B07A}"/>
               </a:ext>
             </a:extLst>
           </p:cNvPr>
@@ -28170,28 +26580,24 @@
         </p:nvSpPr>
         <p:spPr>
           <a:xfrm>
-            <a:off x="6099079" y="1856195"/>
-            <a:ext cx="4969974" cy="2120242"/>
+            <a:off x="581709" y="721538"/>
+            <a:ext cx="10889796" cy="1418998"/>
           </a:xfrm>
         </p:spPr>
         <p:txBody>
           <a:bodyPr/>
           <a:lstStyle/>
           <a:p>
-            <a:r>
-              <a:rPr lang="es-MX" sz="3200" dirty="0"/>
-              <a:t>¿Cómo fue su experiencia buscando y seleccionando la data?</a:t>
-            </a:r>
-            <a:endParaRPr lang="es-PA" sz="3200" dirty="0"/>
-          </a:p>
-        </p:txBody>
-      </p:sp>
-      <p:sp>
-        <p:nvSpPr>
-          <p:cNvPr id="4" name="Footer Placeholder 3">
-            <a:extLst>
-              <a:ext uri="{FF2B5EF4-FFF2-40B4-BE49-F238E27FC236}">
-                <a16:creationId xmlns:a16="http://schemas.microsoft.com/office/drawing/2014/main" id="{22C6F1E2-53EF-B5CD-800C-4B759647BEEC}"/>
+            <a:endParaRPr lang="en-US"/>
+          </a:p>
+        </p:txBody>
+      </p:sp>
+      <p:sp>
+        <p:nvSpPr>
+          <p:cNvPr id="13" name="Table Placeholder 2">
+            <a:extLst>
+              <a:ext uri="{FF2B5EF4-FFF2-40B4-BE49-F238E27FC236}">
+                <a16:creationId xmlns:a16="http://schemas.microsoft.com/office/drawing/2014/main" id="{19F496B5-2904-A16E-47C4-13507019543F}"/>
               </a:ext>
             </a:extLst>
           </p:cNvPr>
@@ -28199,29 +26605,29 @@
             <a:spLocks noGrp="1"/>
           </p:cNvSpPr>
           <p:nvPr>
-            <p:ph type="ftr" sz="quarter" idx="30"/>
+            <p:ph type="tbl" sz="quarter" idx="27"/>
           </p:nvPr>
         </p:nvSpPr>
-        <p:spPr/>
+        <p:spPr>
+          <a:xfrm>
+            <a:off x="581709" y="1614198"/>
+            <a:ext cx="10889796" cy="4317856"/>
+          </a:xfrm>
+        </p:spPr>
         <p:txBody>
           <a:bodyPr/>
           <a:lstStyle/>
           <a:p>
-            <a:pPr rtl="0"/>
-            <a:r>
-              <a:rPr lang="es-ES" noProof="0"/>
-              <a:t>Título de la presentación</a:t>
-            </a:r>
-            <a:endParaRPr lang="es-ES" noProof="0" dirty="0"/>
-          </a:p>
-        </p:txBody>
-      </p:sp>
-      <p:sp>
-        <p:nvSpPr>
-          <p:cNvPr id="5" name="Slide Number Placeholder 4">
-            <a:extLst>
-              <a:ext uri="{FF2B5EF4-FFF2-40B4-BE49-F238E27FC236}">
-                <a16:creationId xmlns:a16="http://schemas.microsoft.com/office/drawing/2014/main" id="{BFB424EF-1A31-66B3-5A3E-F4188811EF6E}"/>
+            <a:endParaRPr lang="es-PA"/>
+          </a:p>
+        </p:txBody>
+      </p:sp>
+      <p:sp>
+        <p:nvSpPr>
+          <p:cNvPr id="5" name="Footer Placeholder 4">
+            <a:extLst>
+              <a:ext uri="{FF2B5EF4-FFF2-40B4-BE49-F238E27FC236}">
+                <a16:creationId xmlns:a16="http://schemas.microsoft.com/office/drawing/2014/main" id="{5D78AED1-C8CA-0E79-27FA-26D25D2D2422}"/>
               </a:ext>
             </a:extLst>
           </p:cNvPr>
@@ -28229,28 +26635,113 @@
             <a:spLocks noGrp="1"/>
           </p:cNvSpPr>
           <p:nvPr>
-            <p:ph type="sldNum" sz="quarter" idx="31"/>
+            <p:ph type="ftr" sz="quarter" idx="28"/>
           </p:nvPr>
         </p:nvSpPr>
-        <p:spPr/>
-        <p:txBody>
-          <a:bodyPr/>
+        <p:spPr>
+          <a:xfrm>
+            <a:off x="484632" y="6217920"/>
+            <a:ext cx="4114800" cy="365125"/>
+          </a:xfrm>
+        </p:spPr>
+        <p:txBody>
+          <a:bodyPr anchor="ctr">
+            <a:normAutofit/>
+          </a:bodyPr>
           <a:lstStyle/>
           <a:p>
-            <a:pPr rtl="0"/>
+            <a:pPr rtl="0">
+              <a:spcAft>
+                <a:spcPts val="600"/>
+              </a:spcAft>
+            </a:pPr>
+            <a:r>
+              <a:rPr lang="es-ES"/>
+              <a:t>Título de la presentación</a:t>
+            </a:r>
+          </a:p>
+        </p:txBody>
+      </p:sp>
+      <p:sp>
+        <p:nvSpPr>
+          <p:cNvPr id="6" name="Slide Number Placeholder 5">
+            <a:extLst>
+              <a:ext uri="{FF2B5EF4-FFF2-40B4-BE49-F238E27FC236}">
+                <a16:creationId xmlns:a16="http://schemas.microsoft.com/office/drawing/2014/main" id="{60A4B7C3-31C8-AC98-E54B-FB7D6D8BA7A4}"/>
+              </a:ext>
+            </a:extLst>
+          </p:cNvPr>
+          <p:cNvSpPr>
+            <a:spLocks noGrp="1"/>
+          </p:cNvSpPr>
+          <p:nvPr>
+            <p:ph type="sldNum" sz="quarter" idx="29"/>
+          </p:nvPr>
+        </p:nvSpPr>
+        <p:spPr>
+          <a:xfrm>
+            <a:off x="11194169" y="6217920"/>
+            <a:ext cx="458592" cy="365125"/>
+          </a:xfrm>
+        </p:spPr>
+        <p:txBody>
+          <a:bodyPr anchor="ctr">
+            <a:normAutofit/>
+          </a:bodyPr>
+          <a:lstStyle/>
+          <a:p>
+            <a:pPr rtl="0">
+              <a:spcAft>
+                <a:spcPts val="600"/>
+              </a:spcAft>
+            </a:pPr>
             <a:fld id="{47FEACEE-25B4-4A2D-B147-27296E36371D}" type="slidenum">
-              <a:rPr lang="es-ES" altLang="zh-CN" noProof="0" smtClean="0"/>
-              <a:pPr rtl="0"/>
-              <a:t>6</a:t>
+              <a:rPr lang="es-ES" altLang="zh-CN" smtClean="0"/>
+              <a:pPr rtl="0">
+                <a:spcAft>
+                  <a:spcPts val="600"/>
+                </a:spcAft>
+              </a:pPr>
+              <a:t>4</a:t>
             </a:fld>
-            <a:endParaRPr lang="es-ES" altLang="zh-CN" noProof="0" dirty="0"/>
-          </a:p>
-        </p:txBody>
-      </p:sp>
+            <a:endParaRPr lang="es-ES" altLang="zh-CN"/>
+          </a:p>
+        </p:txBody>
+      </p:sp>
+      <p:pic>
+        <p:nvPicPr>
+          <p:cNvPr id="8" name="Picture 7">
+            <a:extLst>
+              <a:ext uri="{FF2B5EF4-FFF2-40B4-BE49-F238E27FC236}">
+                <a16:creationId xmlns:a16="http://schemas.microsoft.com/office/drawing/2014/main" id="{17A248CC-ACDC-2EFD-1ACD-D40BB4FA763A}"/>
+              </a:ext>
+            </a:extLst>
+          </p:cNvPr>
+          <p:cNvPicPr>
+            <a:picLocks noChangeAspect="1"/>
+          </p:cNvPicPr>
+          <p:nvPr/>
+        </p:nvPicPr>
+        <p:blipFill>
+          <a:blip r:embed="rId2"/>
+          <a:stretch>
+            <a:fillRect/>
+          </a:stretch>
+        </p:blipFill>
+        <p:spPr>
+          <a:xfrm>
+            <a:off x="-1" y="0"/>
+            <a:ext cx="12276161" cy="6858000"/>
+          </a:xfrm>
+          <a:prstGeom prst="rect">
+            <a:avLst/>
+          </a:prstGeom>
+        </p:spPr>
+      </p:pic>
     </p:spTree>
     <p:extLst>
       <p:ext uri="{BB962C8B-B14F-4D97-AF65-F5344CB8AC3E}">
-        <p14:creationId xmlns:p14="http://schemas.microsoft.com/office/powerpoint/2010/main" val="1948194618"/>
+        <p14:creationId xmlns:p14="http://schemas.microsoft.com/office/powerpoint/2010/main" val="3879834919"/>
       </p:ext>
     </p:extLst>
   </p:cSld>
@@ -28260,7 +26751,486 @@
 </p:sld>
 </file>
 
-<file path=ppt/slides/slide7.xml><?xml version="1.0" encoding="utf-8"?>
+<file path=ppt/slides/slide5.xml><?xml version="1.0" encoding="utf-8"?>
+<p:sld xmlns:a="http://schemas.openxmlformats.org/drawingml/2006/main" xmlns:r="http://schemas.openxmlformats.org/officeDocument/2006/relationships" xmlns:p="http://schemas.openxmlformats.org/presentationml/2006/main">
+  <p:cSld>
+    <p:spTree>
+      <p:nvGrpSpPr>
+        <p:cNvPr id="1" name=""/>
+        <p:cNvGrpSpPr/>
+        <p:nvPr/>
+      </p:nvGrpSpPr>
+      <p:grpSpPr>
+        <a:xfrm>
+          <a:off x="0" y="0"/>
+          <a:ext cx="0" cy="0"/>
+          <a:chOff x="0" y="0"/>
+          <a:chExt cx="0" cy="0"/>
+        </a:xfrm>
+      </p:grpSpPr>
+      <p:sp>
+        <p:nvSpPr>
+          <p:cNvPr id="5" name="Título 4">
+            <a:extLst>
+              <a:ext uri="{FF2B5EF4-FFF2-40B4-BE49-F238E27FC236}">
+                <a16:creationId xmlns:a16="http://schemas.microsoft.com/office/drawing/2014/main" id="{81D18537-D028-9E9C-FB87-93F24955DFC7}"/>
+              </a:ext>
+            </a:extLst>
+          </p:cNvPr>
+          <p:cNvSpPr>
+            <a:spLocks noGrp="1"/>
+          </p:cNvSpPr>
+          <p:nvPr>
+            <p:ph type="title"/>
+          </p:nvPr>
+        </p:nvSpPr>
+        <p:spPr>
+          <a:xfrm>
+            <a:off x="509574" y="977571"/>
+            <a:ext cx="5117162" cy="1325563"/>
+          </a:xfrm>
+        </p:spPr>
+        <p:txBody>
+          <a:bodyPr rtlCol="0"/>
+          <a:lstStyle>
+            <a:defPPr>
+              <a:defRPr lang="es-ES"/>
+            </a:defPPr>
+          </a:lstStyle>
+          <a:p>
+            <a:pPr rtl="0"/>
+            <a:r>
+              <a:rPr lang="es-ES" dirty="0"/>
+              <a:t>Introducción</a:t>
+            </a:r>
+          </a:p>
+        </p:txBody>
+      </p:sp>
+      <p:sp>
+        <p:nvSpPr>
+          <p:cNvPr id="20" name="Marcador de texto 19">
+            <a:extLst>
+              <a:ext uri="{FF2B5EF4-FFF2-40B4-BE49-F238E27FC236}">
+                <a16:creationId xmlns:a16="http://schemas.microsoft.com/office/drawing/2014/main" id="{CC0093B1-77CC-1E61-FB22-E136F94EABD2}"/>
+              </a:ext>
+            </a:extLst>
+          </p:cNvPr>
+          <p:cNvSpPr>
+            <a:spLocks noGrp="1"/>
+          </p:cNvSpPr>
+          <p:nvPr>
+            <p:ph type="body" sz="quarter" idx="28"/>
+          </p:nvPr>
+        </p:nvSpPr>
+        <p:spPr>
+          <a:xfrm>
+            <a:off x="509574" y="2047568"/>
+            <a:ext cx="4260180" cy="1843112"/>
+          </a:xfrm>
+        </p:spPr>
+        <p:txBody>
+          <a:bodyPr rtlCol="0"/>
+          <a:lstStyle>
+            <a:defPPr>
+              <a:defRPr lang="es-ES"/>
+            </a:defPPr>
+          </a:lstStyle>
+          <a:p>
+            <a:pPr marL="285750" indent="-285750" rtl="0">
+              <a:buFont typeface="Arial" panose="020B0604020202020204" pitchFamily="34" charset="0"/>
+              <a:buChar char="•"/>
+            </a:pPr>
+            <a:r>
+              <a:rPr lang="es-MX" dirty="0"/>
+              <a:t>Este proyecto se enfoca en el análisis del comportamiento histórico de las importaciones en toneladas métricas registradas en puertos de </a:t>
+            </a:r>
+            <a:r>
+              <a:rPr lang="es-MX" b="1" dirty="0"/>
+              <a:t>Estados Unidos </a:t>
+            </a:r>
+            <a:r>
+              <a:rPr lang="es-MX" dirty="0"/>
+              <a:t>entre los años </a:t>
+            </a:r>
+            <a:r>
+              <a:rPr lang="es-MX" b="1" dirty="0"/>
+              <a:t>2000 y 2017</a:t>
+            </a:r>
+            <a:r>
+              <a:rPr lang="es-MX" dirty="0"/>
+              <a:t>, utilizando un conjunto de datos obtenido de la plataforma </a:t>
+            </a:r>
+            <a:r>
+              <a:rPr lang="es-MX" b="1" dirty="0" err="1"/>
+              <a:t>Kaggle</a:t>
+            </a:r>
+            <a:r>
+              <a:rPr lang="es-MX" dirty="0"/>
+              <a:t>.</a:t>
+            </a:r>
+            <a:endParaRPr lang="es-ES" dirty="0"/>
+          </a:p>
+          <a:p>
+            <a:pPr rtl="0"/>
+            <a:endParaRPr lang="es-ES" dirty="0"/>
+          </a:p>
+        </p:txBody>
+      </p:sp>
+      <p:sp>
+        <p:nvSpPr>
+          <p:cNvPr id="4" name="Marcador de pie de página 3">
+            <a:extLst>
+              <a:ext uri="{FF2B5EF4-FFF2-40B4-BE49-F238E27FC236}">
+                <a16:creationId xmlns:a16="http://schemas.microsoft.com/office/drawing/2014/main" id="{0A01EC1F-42C9-66C4-9D49-F6AF79D5BE91}"/>
+              </a:ext>
+            </a:extLst>
+          </p:cNvPr>
+          <p:cNvSpPr>
+            <a:spLocks noGrp="1"/>
+          </p:cNvSpPr>
+          <p:nvPr>
+            <p:ph type="ftr" sz="quarter" idx="52"/>
+          </p:nvPr>
+        </p:nvSpPr>
+        <p:spPr/>
+        <p:txBody>
+          <a:bodyPr rtlCol="0"/>
+          <a:lstStyle>
+            <a:defPPr>
+              <a:defRPr lang="es-ES"/>
+            </a:defPPr>
+          </a:lstStyle>
+          <a:p>
+            <a:pPr rtl="0"/>
+            <a:r>
+              <a:rPr lang="es-ES"/>
+              <a:t>Título de la presentación</a:t>
+            </a:r>
+            <a:endParaRPr lang="es-ES" dirty="0"/>
+          </a:p>
+        </p:txBody>
+      </p:sp>
+      <p:pic>
+        <p:nvPicPr>
+          <p:cNvPr id="12" name="Marcador de posición de imagen 11" descr="Personas alrededor de una mesa con sus portátiles">
+            <a:extLst>
+              <a:ext uri="{FF2B5EF4-FFF2-40B4-BE49-F238E27FC236}">
+                <a16:creationId xmlns:a16="http://schemas.microsoft.com/office/drawing/2014/main" id="{8C4B5C6A-45B4-1976-622A-4CEB4E3211BC}"/>
+              </a:ext>
+            </a:extLst>
+          </p:cNvPr>
+          <p:cNvPicPr>
+            <a:picLocks noGrp="1" noChangeAspect="1"/>
+          </p:cNvPicPr>
+          <p:nvPr>
+            <p:ph type="pic" sz="quarter" idx="51"/>
+          </p:nvPr>
+        </p:nvPicPr>
+        <p:blipFill rotWithShape="1">
+          <a:blip r:embed="rId3" cstate="print">
+            <a:extLst>
+              <a:ext uri="{28A0092B-C50C-407E-A947-70E740481C1C}">
+                <a14:useLocalDpi xmlns:a14="http://schemas.microsoft.com/office/drawing/2010/main"/>
+              </a:ext>
+            </a:extLst>
+          </a:blip>
+          <a:srcRect/>
+          <a:stretch/>
+        </p:blipFill>
+        <p:spPr/>
+      </p:pic>
+      <p:sp>
+        <p:nvSpPr>
+          <p:cNvPr id="6" name="Forma libre: Forma 5">
+            <a:extLst>
+              <a:ext uri="{FF2B5EF4-FFF2-40B4-BE49-F238E27FC236}">
+                <a16:creationId xmlns:a16="http://schemas.microsoft.com/office/drawing/2014/main" id="{D91FB993-29E1-3DBD-8335-7970016F8DE7}"/>
+              </a:ext>
+              <a:ext uri="{C183D7F6-B498-43B3-948B-1728B52AA6E4}">
+                <adec:decorative xmlns:adec="http://schemas.microsoft.com/office/drawing/2017/decorative" val="1"/>
+              </a:ext>
+            </a:extLst>
+          </p:cNvPr>
+          <p:cNvSpPr/>
+          <p:nvPr/>
+        </p:nvSpPr>
+        <p:spPr>
+          <a:xfrm>
+            <a:off x="4584821" y="311581"/>
+            <a:ext cx="1896941" cy="2171612"/>
+          </a:xfrm>
+          <a:custGeom>
+            <a:avLst/>
+            <a:gdLst>
+              <a:gd name="connsiteX0" fmla="*/ 2187388 w 4398682"/>
+              <a:gd name="connsiteY0" fmla="*/ 0 h 5032188"/>
+              <a:gd name="connsiteX1" fmla="*/ 4386729 w 4398682"/>
+              <a:gd name="connsiteY1" fmla="*/ 1261035 h 5032188"/>
+              <a:gd name="connsiteX2" fmla="*/ 4398682 w 4398682"/>
+              <a:gd name="connsiteY2" fmla="*/ 3789083 h 5032188"/>
+              <a:gd name="connsiteX3" fmla="*/ 2193365 w 4398682"/>
+              <a:gd name="connsiteY3" fmla="*/ 5032188 h 5032188"/>
+              <a:gd name="connsiteX4" fmla="*/ 0 w 4398682"/>
+              <a:gd name="connsiteY4" fmla="*/ 3783106 h 5032188"/>
+              <a:gd name="connsiteX5" fmla="*/ 0 w 4398682"/>
+              <a:gd name="connsiteY5" fmla="*/ 1267012 h 5032188"/>
+              <a:gd name="connsiteX6" fmla="*/ 2187388 w 4398682"/>
+              <a:gd name="connsiteY6" fmla="*/ 0 h 5032188"/>
+            </a:gdLst>
+            <a:ahLst/>
+            <a:cxnLst>
+              <a:cxn ang="0">
+                <a:pos x="connsiteX0" y="connsiteY0"/>
+              </a:cxn>
+              <a:cxn ang="0">
+                <a:pos x="connsiteX1" y="connsiteY1"/>
+              </a:cxn>
+              <a:cxn ang="0">
+                <a:pos x="connsiteX2" y="connsiteY2"/>
+              </a:cxn>
+              <a:cxn ang="0">
+                <a:pos x="connsiteX3" y="connsiteY3"/>
+              </a:cxn>
+              <a:cxn ang="0">
+                <a:pos x="connsiteX4" y="connsiteY4"/>
+              </a:cxn>
+              <a:cxn ang="0">
+                <a:pos x="connsiteX5" y="connsiteY5"/>
+              </a:cxn>
+              <a:cxn ang="0">
+                <a:pos x="connsiteX6" y="connsiteY6"/>
+              </a:cxn>
+            </a:cxnLst>
+            <a:rect l="l" t="t" r="r" b="b"/>
+            <a:pathLst>
+              <a:path w="4398682" h="5032188">
+                <a:moveTo>
+                  <a:pt x="2187388" y="0"/>
+                </a:moveTo>
+                <a:lnTo>
+                  <a:pt x="4386729" y="1261035"/>
+                </a:lnTo>
+                <a:cubicBezTo>
+                  <a:pt x="4390713" y="2103718"/>
+                  <a:pt x="4394698" y="2946400"/>
+                  <a:pt x="4398682" y="3789083"/>
+                </a:cubicBezTo>
+                <a:lnTo>
+                  <a:pt x="2193365" y="5032188"/>
+                </a:lnTo>
+                <a:lnTo>
+                  <a:pt x="0" y="3783106"/>
+                </a:lnTo>
+                <a:lnTo>
+                  <a:pt x="0" y="1267012"/>
+                </a:lnTo>
+                <a:lnTo>
+                  <a:pt x="2187388" y="0"/>
+                </a:lnTo>
+                <a:close/>
+              </a:path>
+            </a:pathLst>
+          </a:custGeom>
+          <a:noFill/>
+          <a:ln w="19050" cap="flat" cmpd="sng" algn="ctr">
+            <a:solidFill>
+              <a:srgbClr val="C95B3A"/>
+            </a:solidFill>
+            <a:prstDash val="solid"/>
+            <a:miter lim="800000"/>
+          </a:ln>
+          <a:effectLst/>
+        </p:spPr>
+        <p:txBody>
+          <a:bodyPr rtlCol="0" anchor="ctr"/>
+          <a:lstStyle>
+            <a:defPPr>
+              <a:defRPr lang="es-ES"/>
+            </a:defPPr>
+          </a:lstStyle>
+          <a:p>
+            <a:pPr marL="0" marR="0" lvl="0" indent="0" algn="ctr" defTabSz="914400" rtl="0" eaLnBrk="1" fontAlgn="auto" latinLnBrk="0" hangingPunct="1">
+              <a:lnSpc>
+                <a:spcPct val="100000"/>
+              </a:lnSpc>
+              <a:spcBef>
+                <a:spcPts val="0"/>
+              </a:spcBef>
+              <a:spcAft>
+                <a:spcPts val="0"/>
+              </a:spcAft>
+              <a:buClrTx/>
+              <a:buSzTx/>
+              <a:buFontTx/>
+              <a:buNone/>
+              <a:tabLst/>
+              <a:defRPr lang="es-ES"/>
+            </a:pPr>
+            <a:endParaRPr kumimoji="0" lang="es-ES" sz="1800" b="0" i="0" u="none" strike="noStrike" kern="0" cap="none" spc="0" normalizeH="0" baseline="0" noProof="0" dirty="0">
+              <a:ln>
+                <a:noFill/>
+              </a:ln>
+              <a:solidFill>
+                <a:srgbClr val="F7D952"/>
+              </a:solidFill>
+              <a:effectLst/>
+              <a:uLnTx/>
+              <a:uFillTx/>
+              <a:latin typeface="Posterama Text SemiBold"/>
+              <a:ea typeface="+mn-ea"/>
+              <a:cs typeface="+mn-cs"/>
+            </a:endParaRPr>
+          </a:p>
+        </p:txBody>
+      </p:sp>
+      <p:sp>
+        <p:nvSpPr>
+          <p:cNvPr id="7" name="Marcador de número de diapositiva 6">
+            <a:extLst>
+              <a:ext uri="{FF2B5EF4-FFF2-40B4-BE49-F238E27FC236}">
+                <a16:creationId xmlns:a16="http://schemas.microsoft.com/office/drawing/2014/main" id="{7D6767F8-4670-E83D-85F4-1446B8B9D466}"/>
+              </a:ext>
+            </a:extLst>
+          </p:cNvPr>
+          <p:cNvSpPr>
+            <a:spLocks noGrp="1"/>
+          </p:cNvSpPr>
+          <p:nvPr>
+            <p:ph type="sldNum" sz="quarter" idx="53"/>
+          </p:nvPr>
+        </p:nvSpPr>
+        <p:spPr/>
+        <p:txBody>
+          <a:bodyPr rtlCol="0"/>
+          <a:lstStyle>
+            <a:defPPr>
+              <a:defRPr lang="es-ES"/>
+            </a:defPPr>
+          </a:lstStyle>
+          <a:p>
+            <a:pPr rtl="0"/>
+            <a:fld id="{47FEACEE-25B4-4A2D-B147-27296E36371D}" type="slidenum">
+              <a:rPr lang="es-ES" altLang="zh-CN" smtClean="0"/>
+              <a:pPr rtl="0"/>
+              <a:t>5</a:t>
+            </a:fld>
+            <a:endParaRPr lang="es-ES" altLang="zh-CN" dirty="0"/>
+          </a:p>
+        </p:txBody>
+      </p:sp>
+      <p:sp>
+        <p:nvSpPr>
+          <p:cNvPr id="3" name="TextBox 2">
+            <a:extLst>
+              <a:ext uri="{FF2B5EF4-FFF2-40B4-BE49-F238E27FC236}">
+                <a16:creationId xmlns:a16="http://schemas.microsoft.com/office/drawing/2014/main" id="{CEC0FFF5-C0F1-8A21-FC11-33CCECB870E8}"/>
+              </a:ext>
+            </a:extLst>
+          </p:cNvPr>
+          <p:cNvSpPr txBox="1"/>
+          <p:nvPr/>
+        </p:nvSpPr>
+        <p:spPr>
+          <a:xfrm>
+            <a:off x="509574" y="4098594"/>
+            <a:ext cx="4114800" cy="923330"/>
+          </a:xfrm>
+          <a:prstGeom prst="rect">
+            <a:avLst/>
+          </a:prstGeom>
+          <a:noFill/>
+        </p:spPr>
+        <p:txBody>
+          <a:bodyPr wrap="square">
+            <a:spAutoFit/>
+          </a:bodyPr>
+          <a:lstStyle/>
+          <a:p>
+            <a:pPr marL="285750" indent="-285750">
+              <a:buFont typeface="Arial" panose="020B0604020202020204" pitchFamily="34" charset="0"/>
+              <a:buChar char="•"/>
+            </a:pPr>
+            <a:r>
+              <a:rPr lang="es-PA" sz="1800" dirty="0">
+                <a:effectLst/>
+                <a:latin typeface="Aptos" panose="020B0004020202020204" pitchFamily="34" charset="0"/>
+                <a:ea typeface="Aptos" panose="020B0004020202020204" pitchFamily="34" charset="0"/>
+                <a:cs typeface="Times New Roman" panose="02020603050405020304" pitchFamily="18" charset="0"/>
+              </a:rPr>
+              <a:t>El objetivo principal es identificar </a:t>
+            </a:r>
+            <a:r>
+              <a:rPr lang="es-PA" sz="1800" b="1" dirty="0">
+                <a:effectLst/>
+                <a:latin typeface="Aptos" panose="020B0004020202020204" pitchFamily="34" charset="0"/>
+                <a:ea typeface="Aptos" panose="020B0004020202020204" pitchFamily="34" charset="0"/>
+                <a:cs typeface="Times New Roman" panose="02020603050405020304" pitchFamily="18" charset="0"/>
+              </a:rPr>
+              <a:t>patrones</a:t>
+            </a:r>
+            <a:r>
+              <a:rPr lang="es-PA" sz="1800" dirty="0">
+                <a:effectLst/>
+                <a:latin typeface="Aptos" panose="020B0004020202020204" pitchFamily="34" charset="0"/>
+                <a:ea typeface="Aptos" panose="020B0004020202020204" pitchFamily="34" charset="0"/>
+                <a:cs typeface="Times New Roman" panose="02020603050405020304" pitchFamily="18" charset="0"/>
+              </a:rPr>
+              <a:t> </a:t>
+            </a:r>
+            <a:r>
+              <a:rPr lang="es-MX" sz="1800" dirty="0">
+                <a:effectLst/>
+                <a:latin typeface="Aptos" panose="020B0004020202020204" pitchFamily="34" charset="0"/>
+                <a:ea typeface="Aptos" panose="020B0004020202020204" pitchFamily="34" charset="0"/>
+                <a:cs typeface="Times New Roman" panose="02020603050405020304" pitchFamily="18" charset="0"/>
+              </a:rPr>
+              <a:t>y realizar </a:t>
+            </a:r>
+            <a:r>
+              <a:rPr lang="es-MX" sz="1800" b="1" dirty="0">
+                <a:effectLst/>
+                <a:latin typeface="Aptos" panose="020B0004020202020204" pitchFamily="34" charset="0"/>
+                <a:ea typeface="Aptos" panose="020B0004020202020204" pitchFamily="34" charset="0"/>
+                <a:cs typeface="Times New Roman" panose="02020603050405020304" pitchFamily="18" charset="0"/>
+              </a:rPr>
+              <a:t>proyecciones</a:t>
+            </a:r>
+            <a:r>
+              <a:rPr lang="es-MX" sz="1800" dirty="0">
+                <a:effectLst/>
+                <a:latin typeface="Aptos" panose="020B0004020202020204" pitchFamily="34" charset="0"/>
+                <a:ea typeface="Aptos" panose="020B0004020202020204" pitchFamily="34" charset="0"/>
+                <a:cs typeface="Times New Roman" panose="02020603050405020304" pitchFamily="18" charset="0"/>
+              </a:rPr>
+              <a:t> para los años </a:t>
+            </a:r>
+            <a:r>
+              <a:rPr lang="es-MX" sz="1800" b="1" dirty="0">
+                <a:effectLst/>
+                <a:latin typeface="Aptos" panose="020B0004020202020204" pitchFamily="34" charset="0"/>
+                <a:ea typeface="Aptos" panose="020B0004020202020204" pitchFamily="34" charset="0"/>
+                <a:cs typeface="Times New Roman" panose="02020603050405020304" pitchFamily="18" charset="0"/>
+              </a:rPr>
+              <a:t>2018 al 2022</a:t>
+            </a:r>
+            <a:endParaRPr lang="es-PA" b="1" dirty="0"/>
+          </a:p>
+        </p:txBody>
+      </p:sp>
+    </p:spTree>
+    <p:extLst>
+      <p:ext uri="{BB962C8B-B14F-4D97-AF65-F5344CB8AC3E}">
+        <p14:creationId xmlns:p14="http://schemas.microsoft.com/office/powerpoint/2010/main" val="77554804"/>
+      </p:ext>
+    </p:extLst>
+  </p:cSld>
+  <p:clrMapOvr>
+    <a:masterClrMapping/>
+  </p:clrMapOvr>
+</p:sld>
+</file>
+
+<file path=ppt/slides/slide6.xml><?xml version="1.0" encoding="utf-8"?>
 <p:sld xmlns:a="http://schemas.openxmlformats.org/drawingml/2006/main" xmlns:r="http://schemas.openxmlformats.org/officeDocument/2006/relationships" xmlns:p="http://schemas.openxmlformats.org/presentationml/2006/main">
   <p:cSld>
     <p:spTree>
@@ -28483,7 +27453,7 @@
 </p:sld>
 </file>
 
-<file path=ppt/slides/slide8.xml><?xml version="1.0" encoding="utf-8"?>
+<file path=ppt/slides/slide7.xml><?xml version="1.0" encoding="utf-8"?>
 <p:sld xmlns:a="http://schemas.openxmlformats.org/drawingml/2006/main" xmlns:r="http://schemas.openxmlformats.org/officeDocument/2006/relationships" xmlns:p="http://schemas.openxmlformats.org/presentationml/2006/main">
   <p:cSld>
     <p:spTree>
@@ -28596,7 +27566,7 @@
             <a:fld id="{47FEACEE-25B4-4A2D-B147-27296E36371D}" type="slidenum">
               <a:rPr lang="es-ES" altLang="zh-CN" smtClean="0"/>
               <a:pPr rtl="0"/>
-              <a:t>8</a:t>
+              <a:t>7</a:t>
             </a:fld>
             <a:endParaRPr lang="es-ES" altLang="zh-CN" dirty="0"/>
           </a:p>
@@ -28645,18 +27615,12 @@
 </p:sld>
 </file>
 
-<file path=ppt/slides/slide9.xml><?xml version="1.0" encoding="utf-8"?>
+<file path=ppt/slides/slide8.xml><?xml version="1.0" encoding="utf-8"?>
 <p:sld xmlns:a="http://schemas.openxmlformats.org/drawingml/2006/main" xmlns:r="http://schemas.openxmlformats.org/officeDocument/2006/relationships" xmlns:p="http://schemas.openxmlformats.org/presentationml/2006/main">
   <p:cSld>
     <p:spTree>
       <p:nvGrpSpPr>
-        <p:cNvPr id="1" name="">
-          <a:extLst>
-            <a:ext uri="{FF2B5EF4-FFF2-40B4-BE49-F238E27FC236}">
-              <a16:creationId xmlns:a16="http://schemas.microsoft.com/office/drawing/2014/main" id="{6746BF47-E48F-1A96-699E-9CC547B5A1B2}"/>
-            </a:ext>
-          </a:extLst>
-        </p:cNvPr>
+        <p:cNvPr id="1" name=""/>
         <p:cNvGrpSpPr/>
         <p:nvPr/>
       </p:nvGrpSpPr>
@@ -28670,10 +27634,135 @@
       </p:grpSpPr>
       <p:sp>
         <p:nvSpPr>
-          <p:cNvPr id="2" name="Title 1">
-            <a:extLst>
-              <a:ext uri="{FF2B5EF4-FFF2-40B4-BE49-F238E27FC236}">
-                <a16:creationId xmlns:a16="http://schemas.microsoft.com/office/drawing/2014/main" id="{13A5A34E-C301-BDDE-A0DD-859F14A5EC2C}"/>
+          <p:cNvPr id="7" name="Marcador de número de diapositiva 6">
+            <a:extLst>
+              <a:ext uri="{FF2B5EF4-FFF2-40B4-BE49-F238E27FC236}">
+                <a16:creationId xmlns:a16="http://schemas.microsoft.com/office/drawing/2014/main" id="{8EA25C86-7BE3-4BC6-C0B8-7F7D7C3EC286}"/>
+              </a:ext>
+            </a:extLst>
+          </p:cNvPr>
+          <p:cNvSpPr>
+            <a:spLocks noGrp="1"/>
+          </p:cNvSpPr>
+          <p:nvPr>
+            <p:ph type="sldNum" sz="quarter" idx="29"/>
+          </p:nvPr>
+        </p:nvSpPr>
+        <p:spPr/>
+        <p:txBody>
+          <a:bodyPr rtlCol="0"/>
+          <a:lstStyle>
+            <a:defPPr>
+              <a:defRPr lang="es-ES"/>
+            </a:defPPr>
+          </a:lstStyle>
+          <a:p>
+            <a:pPr rtl="0"/>
+            <a:fld id="{47FEACEE-25B4-4A2D-B147-27296E36371D}" type="slidenum">
+              <a:rPr lang="es-ES" altLang="zh-CN" smtClean="0"/>
+              <a:pPr rtl="0"/>
+              <a:t>8</a:t>
+            </a:fld>
+            <a:endParaRPr lang="es-ES" altLang="zh-CN" dirty="0"/>
+          </a:p>
+        </p:txBody>
+      </p:sp>
+      <p:pic>
+        <p:nvPicPr>
+          <p:cNvPr id="9" name="Picture 8">
+            <a:extLst>
+              <a:ext uri="{FF2B5EF4-FFF2-40B4-BE49-F238E27FC236}">
+                <a16:creationId xmlns:a16="http://schemas.microsoft.com/office/drawing/2014/main" id="{6D25DC0E-B6BA-518F-2EE8-F88B0E7FB79E}"/>
+              </a:ext>
+            </a:extLst>
+          </p:cNvPr>
+          <p:cNvPicPr>
+            <a:picLocks noChangeAspect="1"/>
+          </p:cNvPicPr>
+          <p:nvPr/>
+        </p:nvPicPr>
+        <p:blipFill>
+          <a:blip r:embed="rId3"/>
+          <a:stretch>
+            <a:fillRect/>
+          </a:stretch>
+        </p:blipFill>
+        <p:spPr>
+          <a:xfrm>
+            <a:off x="145576" y="206970"/>
+            <a:ext cx="11900848" cy="1760406"/>
+          </a:xfrm>
+          <a:prstGeom prst="rect">
+            <a:avLst/>
+          </a:prstGeom>
+        </p:spPr>
+      </p:pic>
+      <p:pic>
+        <p:nvPicPr>
+          <p:cNvPr id="12" name="Picture 11">
+            <a:extLst>
+              <a:ext uri="{FF2B5EF4-FFF2-40B4-BE49-F238E27FC236}">
+                <a16:creationId xmlns:a16="http://schemas.microsoft.com/office/drawing/2014/main" id="{95D5CD4E-FF87-46D5-8EBA-75738BCE53CE}"/>
+              </a:ext>
+            </a:extLst>
+          </p:cNvPr>
+          <p:cNvPicPr>
+            <a:picLocks noChangeAspect="1"/>
+          </p:cNvPicPr>
+          <p:nvPr/>
+        </p:nvPicPr>
+        <p:blipFill>
+          <a:blip r:embed="rId4"/>
+          <a:stretch>
+            <a:fillRect/>
+          </a:stretch>
+        </p:blipFill>
+        <p:spPr>
+          <a:xfrm>
+            <a:off x="145576" y="2359447"/>
+            <a:ext cx="8583166" cy="4291583"/>
+          </a:xfrm>
+          <a:prstGeom prst="rect">
+            <a:avLst/>
+          </a:prstGeom>
+        </p:spPr>
+      </p:pic>
+    </p:spTree>
+    <p:extLst>
+      <p:ext uri="{BB962C8B-B14F-4D97-AF65-F5344CB8AC3E}">
+        <p14:creationId xmlns:p14="http://schemas.microsoft.com/office/powerpoint/2010/main" val="1246021298"/>
+      </p:ext>
+    </p:extLst>
+  </p:cSld>
+  <p:clrMapOvr>
+    <a:masterClrMapping/>
+  </p:clrMapOvr>
+</p:sld>
+</file>
+
+<file path=ppt/slides/slide9.xml><?xml version="1.0" encoding="utf-8"?>
+<p:sld xmlns:a="http://schemas.openxmlformats.org/drawingml/2006/main" xmlns:r="http://schemas.openxmlformats.org/officeDocument/2006/relationships" xmlns:p="http://schemas.openxmlformats.org/presentationml/2006/main">
+  <p:cSld>
+    <p:spTree>
+      <p:nvGrpSpPr>
+        <p:cNvPr id="1" name=""/>
+        <p:cNvGrpSpPr/>
+        <p:nvPr/>
+      </p:nvGrpSpPr>
+      <p:grpSpPr>
+        <a:xfrm>
+          <a:off x="0" y="0"/>
+          <a:ext cx="0" cy="0"/>
+          <a:chOff x="0" y="0"/>
+          <a:chExt cx="0" cy="0"/>
+        </a:xfrm>
+      </p:grpSpPr>
+      <p:sp>
+        <p:nvSpPr>
+          <p:cNvPr id="8" name="Título 7">
+            <a:extLst>
+              <a:ext uri="{FF2B5EF4-FFF2-40B4-BE49-F238E27FC236}">
+                <a16:creationId xmlns:a16="http://schemas.microsoft.com/office/drawing/2014/main" id="{721E73BA-53B9-C0C1-476A-00736A64AB79}"/>
               </a:ext>
             </a:extLst>
           </p:cNvPr>
@@ -28684,30 +27773,64 @@
             <p:ph type="title"/>
           </p:nvPr>
         </p:nvSpPr>
-        <p:spPr>
-          <a:xfrm>
-            <a:off x="6096000" y="767337"/>
-            <a:ext cx="4969974" cy="2120242"/>
-          </a:xfrm>
-        </p:spPr>
-        <p:txBody>
-          <a:bodyPr/>
-          <a:lstStyle/>
-          <a:p>
+        <p:spPr/>
+        <p:txBody>
+          <a:bodyPr rtlCol="0"/>
+          <a:lstStyle>
+            <a:defPPr>
+              <a:defRPr lang="es-ES"/>
+            </a:defPPr>
+          </a:lstStyle>
+          <a:p>
+            <a:pPr rtl="0"/>
             <a:r>
-              <a:rPr lang="es-MX" sz="3200" dirty="0"/>
-              <a:t>¿Qué lecciones aprendió al hacer el análisis descriptivo?</a:t>
+              <a:rPr lang="es-MX" sz="2400" dirty="0"/>
+              <a:t>Datos obtenidos del análisis estadístico 2000 al 2017</a:t>
             </a:r>
-            <a:endParaRPr lang="es-PA" sz="3200" dirty="0"/>
-          </a:p>
-        </p:txBody>
-      </p:sp>
-      <p:sp>
-        <p:nvSpPr>
-          <p:cNvPr id="4" name="Footer Placeholder 3">
-            <a:extLst>
-              <a:ext uri="{FF2B5EF4-FFF2-40B4-BE49-F238E27FC236}">
-                <a16:creationId xmlns:a16="http://schemas.microsoft.com/office/drawing/2014/main" id="{69653636-603F-28AD-126E-519F0B8E5AC7}"/>
+            <a:endParaRPr lang="es-ES" sz="2400" dirty="0"/>
+          </a:p>
+        </p:txBody>
+      </p:sp>
+      <p:pic>
+        <p:nvPicPr>
+          <p:cNvPr id="192" name="Marcador de posición de imagen 191" descr="Ábaco con relleno sólido">
+            <a:extLst>
+              <a:ext uri="{FF2B5EF4-FFF2-40B4-BE49-F238E27FC236}">
+                <a16:creationId xmlns:a16="http://schemas.microsoft.com/office/drawing/2014/main" id="{03D5E3D1-D423-EF5A-EE43-00CF1BD7FF63}"/>
+              </a:ext>
+            </a:extLst>
+          </p:cNvPr>
+          <p:cNvPicPr>
+            <a:picLocks noGrp="1" noChangeAspect="1"/>
+          </p:cNvPicPr>
+          <p:nvPr>
+            <p:ph type="pic" sz="quarter" idx="36"/>
+          </p:nvPr>
+        </p:nvPicPr>
+        <p:blipFill>
+          <a:blip r:embed="rId3" cstate="print">
+            <a:extLst>
+              <a:ext uri="{28A0092B-C50C-407E-A947-70E740481C1C}">
+                <a14:useLocalDpi xmlns:a14="http://schemas.microsoft.com/office/drawing/2010/main"/>
+              </a:ext>
+              <a:ext uri="{96DAC541-7B7A-43D3-8B79-37D633B846F1}">
+                <asvg:svgBlip xmlns:asvg="http://schemas.microsoft.com/office/drawing/2016/SVG/main" r:embed="rId4"/>
+              </a:ext>
+            </a:extLst>
+          </a:blip>
+          <a:srcRect l="5182" r="5182"/>
+          <a:stretch>
+            <a:fillRect/>
+          </a:stretch>
+        </p:blipFill>
+        <p:spPr/>
+      </p:pic>
+      <p:sp>
+        <p:nvSpPr>
+          <p:cNvPr id="9" name="Marcador de texto 8">
+            <a:extLst>
+              <a:ext uri="{FF2B5EF4-FFF2-40B4-BE49-F238E27FC236}">
+                <a16:creationId xmlns:a16="http://schemas.microsoft.com/office/drawing/2014/main" id="{FA96FE97-5E27-FC36-5E3A-511A31E6C789}"/>
               </a:ext>
             </a:extLst>
           </p:cNvPr>
@@ -28715,29 +27838,33 @@
             <a:spLocks noGrp="1"/>
           </p:cNvSpPr>
           <p:nvPr>
-            <p:ph type="ftr" sz="quarter" idx="30"/>
+            <p:ph type="body" sz="quarter" idx="27"/>
           </p:nvPr>
         </p:nvSpPr>
         <p:spPr/>
         <p:txBody>
-          <a:bodyPr/>
-          <a:lstStyle/>
+          <a:bodyPr rtlCol="0"/>
+          <a:lstStyle>
+            <a:defPPr>
+              <a:defRPr lang="es-ES"/>
+            </a:defPPr>
+          </a:lstStyle>
           <a:p>
             <a:pPr rtl="0"/>
             <a:r>
-              <a:rPr lang="es-ES" noProof="0"/>
-              <a:t>Título de la presentación</a:t>
+              <a:rPr lang="es-MX" dirty="0"/>
+              <a:t>Correlación de MIAMI y New York. (0.08)</a:t>
             </a:r>
-            <a:endParaRPr lang="es-ES" noProof="0" dirty="0"/>
-          </a:p>
-        </p:txBody>
-      </p:sp>
-      <p:sp>
-        <p:nvSpPr>
-          <p:cNvPr id="5" name="Slide Number Placeholder 4">
-            <a:extLst>
-              <a:ext uri="{FF2B5EF4-FFF2-40B4-BE49-F238E27FC236}">
-                <a16:creationId xmlns:a16="http://schemas.microsoft.com/office/drawing/2014/main" id="{B554755B-0EE7-2C34-8641-13FC0FB954BC}"/>
+            <a:endParaRPr lang="es-ES" dirty="0"/>
+          </a:p>
+        </p:txBody>
+      </p:sp>
+      <p:sp>
+        <p:nvSpPr>
+          <p:cNvPr id="10" name="Marcador de texto 9">
+            <a:extLst>
+              <a:ext uri="{FF2B5EF4-FFF2-40B4-BE49-F238E27FC236}">
+                <a16:creationId xmlns:a16="http://schemas.microsoft.com/office/drawing/2014/main" id="{4CE5DE1C-24E7-3841-9376-89E91B4A4762}"/>
               </a:ext>
             </a:extLst>
           </p:cNvPr>
@@ -28745,89 +27872,316 @@
             <a:spLocks noGrp="1"/>
           </p:cNvSpPr>
           <p:nvPr>
-            <p:ph type="sldNum" sz="quarter" idx="31"/>
+            <p:ph type="body" sz="quarter" idx="28"/>
           </p:nvPr>
         </p:nvSpPr>
         <p:spPr/>
         <p:txBody>
-          <a:bodyPr/>
-          <a:lstStyle/>
+          <a:bodyPr rtlCol="0"/>
+          <a:lstStyle>
+            <a:defPPr>
+              <a:defRPr lang="es-ES"/>
+            </a:defPPr>
+          </a:lstStyle>
+          <a:p>
+            <a:pPr rtl="0"/>
+            <a:r>
+              <a:rPr lang="es-MX" dirty="0"/>
+              <a:t>Correlación entre los puertos de MIAMI y New York. 8%</a:t>
+            </a:r>
+          </a:p>
+          <a:p>
+            <a:pPr rtl="0"/>
+            <a:r>
+              <a:rPr lang="es-MX" dirty="0"/>
+              <a:t>Esta baja relación puede deberse a que se enfocan en productos o tipos de carga distinta.</a:t>
+            </a:r>
+            <a:endParaRPr lang="es-ES" dirty="0"/>
+          </a:p>
+        </p:txBody>
+      </p:sp>
+      <p:pic>
+        <p:nvPicPr>
+          <p:cNvPr id="194" name="Marcador de posición de imagen 193" descr="Gráfico de barras con tendencia ascendente con relleno sólido">
+            <a:extLst>
+              <a:ext uri="{FF2B5EF4-FFF2-40B4-BE49-F238E27FC236}">
+                <a16:creationId xmlns:a16="http://schemas.microsoft.com/office/drawing/2014/main" id="{FAB9DE8A-4935-A3E0-0122-F76CDEAC29D1}"/>
+              </a:ext>
+            </a:extLst>
+          </p:cNvPr>
+          <p:cNvPicPr>
+            <a:picLocks noGrp="1" noChangeAspect="1"/>
+          </p:cNvPicPr>
+          <p:nvPr>
+            <p:ph type="pic" sz="quarter" idx="37"/>
+          </p:nvPr>
+        </p:nvPicPr>
+        <p:blipFill>
+          <a:blip r:embed="rId5" cstate="print">
+            <a:extLst>
+              <a:ext uri="{28A0092B-C50C-407E-A947-70E740481C1C}">
+                <a14:useLocalDpi xmlns:a14="http://schemas.microsoft.com/office/drawing/2010/main"/>
+              </a:ext>
+              <a:ext uri="{96DAC541-7B7A-43D3-8B79-37D633B846F1}">
+                <asvg:svgBlip xmlns:asvg="http://schemas.microsoft.com/office/drawing/2016/SVG/main" r:embed="rId6"/>
+              </a:ext>
+            </a:extLst>
+          </a:blip>
+          <a:srcRect l="2661" r="2661"/>
+          <a:stretch>
+            <a:fillRect/>
+          </a:stretch>
+        </p:blipFill>
+        <p:spPr/>
+      </p:pic>
+      <p:sp>
+        <p:nvSpPr>
+          <p:cNvPr id="11" name="Marcador de texto 10">
+            <a:extLst>
+              <a:ext uri="{FF2B5EF4-FFF2-40B4-BE49-F238E27FC236}">
+                <a16:creationId xmlns:a16="http://schemas.microsoft.com/office/drawing/2014/main" id="{DC774673-50D8-2D6F-C339-6E4B0A126B06}"/>
+              </a:ext>
+            </a:extLst>
+          </p:cNvPr>
+          <p:cNvSpPr>
+            <a:spLocks noGrp="1"/>
+          </p:cNvSpPr>
+          <p:nvPr>
+            <p:ph type="body" sz="quarter" idx="29"/>
+          </p:nvPr>
+        </p:nvSpPr>
+        <p:spPr/>
+        <p:txBody>
+          <a:bodyPr rtlCol="0"/>
+          <a:lstStyle>
+            <a:defPPr>
+              <a:defRPr lang="es-ES"/>
+            </a:defPPr>
+          </a:lstStyle>
+          <a:p>
+            <a:pPr rtl="0"/>
+            <a:r>
+              <a:rPr lang="es-MX" dirty="0"/>
+              <a:t>Correlación de Los </a:t>
+            </a:r>
+            <a:r>
+              <a:rPr lang="es-MX" dirty="0" err="1"/>
+              <a:t>Angeles</a:t>
+            </a:r>
+            <a:r>
+              <a:rPr lang="es-MX" dirty="0"/>
+              <a:t>, CA y New York, NY. (0.86)</a:t>
+            </a:r>
+            <a:endParaRPr lang="es-ES" dirty="0"/>
+          </a:p>
+        </p:txBody>
+      </p:sp>
+      <p:sp>
+        <p:nvSpPr>
+          <p:cNvPr id="13" name="Marcador de texto 12">
+            <a:extLst>
+              <a:ext uri="{FF2B5EF4-FFF2-40B4-BE49-F238E27FC236}">
+                <a16:creationId xmlns:a16="http://schemas.microsoft.com/office/drawing/2014/main" id="{DEB5763E-8BC0-F6C3-3814-6649A828C000}"/>
+              </a:ext>
+            </a:extLst>
+          </p:cNvPr>
+          <p:cNvSpPr>
+            <a:spLocks noGrp="1"/>
+          </p:cNvSpPr>
+          <p:nvPr>
+            <p:ph type="body" sz="quarter" idx="34"/>
+          </p:nvPr>
+        </p:nvSpPr>
+        <p:spPr/>
+        <p:txBody>
+          <a:bodyPr rtlCol="0"/>
+          <a:lstStyle>
+            <a:defPPr>
+              <a:defRPr lang="es-ES"/>
+            </a:defPPr>
+          </a:lstStyle>
+          <a:p>
+            <a:pPr rtl="0"/>
+            <a:r>
+              <a:rPr lang="es-MX" dirty="0"/>
+              <a:t>Lo que indica una fuerte correlación positiva entre las importaciones en estos dos puertos entre los años 2000 y 2017.</a:t>
+            </a:r>
+          </a:p>
+          <a:p>
+            <a:pPr rtl="0"/>
+            <a:r>
+              <a:rPr lang="es-MX" dirty="0"/>
+              <a:t>Esto sugiere que ambos puertos responden a dinámicas similares del comercio internacional</a:t>
+            </a:r>
+          </a:p>
+          <a:p>
+            <a:pPr rtl="0"/>
+            <a:endParaRPr lang="es-ES" dirty="0"/>
+          </a:p>
+        </p:txBody>
+      </p:sp>
+      <p:pic>
+        <p:nvPicPr>
+          <p:cNvPr id="196" name="Marcador de posición de imagen 195" descr="Vínculo con relleno sólido">
+            <a:extLst>
+              <a:ext uri="{FF2B5EF4-FFF2-40B4-BE49-F238E27FC236}">
+                <a16:creationId xmlns:a16="http://schemas.microsoft.com/office/drawing/2014/main" id="{B21D7164-3991-2960-0F80-CB302359CD8D}"/>
+              </a:ext>
+            </a:extLst>
+          </p:cNvPr>
+          <p:cNvPicPr>
+            <a:picLocks noGrp="1" noChangeAspect="1"/>
+          </p:cNvPicPr>
+          <p:nvPr>
+            <p:ph type="pic" sz="quarter" idx="38"/>
+          </p:nvPr>
+        </p:nvPicPr>
+        <p:blipFill>
+          <a:blip r:embed="rId7" cstate="print">
+            <a:extLst>
+              <a:ext uri="{28A0092B-C50C-407E-A947-70E740481C1C}">
+                <a14:useLocalDpi xmlns:a14="http://schemas.microsoft.com/office/drawing/2010/main"/>
+              </a:ext>
+              <a:ext uri="{96DAC541-7B7A-43D3-8B79-37D633B846F1}">
+                <asvg:svgBlip xmlns:asvg="http://schemas.microsoft.com/office/drawing/2016/SVG/main" r:embed="rId8"/>
+              </a:ext>
+            </a:extLst>
+          </a:blip>
+          <a:srcRect l="2528" r="2528"/>
+          <a:stretch>
+            <a:fillRect/>
+          </a:stretch>
+        </p:blipFill>
+        <p:spPr>
+          <a:xfrm>
+            <a:off x="4714070" y="4767142"/>
+            <a:ext cx="536270" cy="565882"/>
+          </a:xfrm>
+        </p:spPr>
+      </p:pic>
+      <p:sp>
+        <p:nvSpPr>
+          <p:cNvPr id="12" name="Marcador de texto 11">
+            <a:extLst>
+              <a:ext uri="{FF2B5EF4-FFF2-40B4-BE49-F238E27FC236}">
+                <a16:creationId xmlns:a16="http://schemas.microsoft.com/office/drawing/2014/main" id="{D3E02E0C-26E8-8160-D35F-2398015C051B}"/>
+              </a:ext>
+            </a:extLst>
+          </p:cNvPr>
+          <p:cNvSpPr>
+            <a:spLocks noGrp="1"/>
+          </p:cNvSpPr>
+          <p:nvPr>
+            <p:ph type="body" sz="quarter" idx="31"/>
+          </p:nvPr>
+        </p:nvSpPr>
+        <p:spPr>
+          <a:xfrm>
+            <a:off x="5271608" y="4733434"/>
+            <a:ext cx="5162709" cy="421399"/>
+          </a:xfrm>
+        </p:spPr>
+        <p:txBody>
+          <a:bodyPr rtlCol="0"/>
+          <a:lstStyle>
+            <a:defPPr>
+              <a:defRPr lang="es-ES"/>
+            </a:defPPr>
+          </a:lstStyle>
+          <a:p>
+            <a:pPr rtl="0"/>
+            <a:r>
+              <a:rPr lang="es-ES" dirty="0"/>
+              <a:t>Modelo ANOVA para los puertos de Costa Este</a:t>
+            </a:r>
+          </a:p>
+        </p:txBody>
+      </p:sp>
+      <p:sp>
+        <p:nvSpPr>
+          <p:cNvPr id="14" name="Marcador de texto 13">
+            <a:extLst>
+              <a:ext uri="{FF2B5EF4-FFF2-40B4-BE49-F238E27FC236}">
+                <a16:creationId xmlns:a16="http://schemas.microsoft.com/office/drawing/2014/main" id="{C78180D0-1AB6-8416-0EB1-10648E1A6050}"/>
+              </a:ext>
+            </a:extLst>
+          </p:cNvPr>
+          <p:cNvSpPr>
+            <a:spLocks noGrp="1"/>
+          </p:cNvSpPr>
+          <p:nvPr>
+            <p:ph type="body" sz="quarter" idx="35"/>
+          </p:nvPr>
+        </p:nvSpPr>
+        <p:spPr>
+          <a:xfrm>
+            <a:off x="5271608" y="5121764"/>
+            <a:ext cx="5162709" cy="1175998"/>
+          </a:xfrm>
+        </p:spPr>
+        <p:txBody>
+          <a:bodyPr rtlCol="0"/>
+          <a:lstStyle>
+            <a:defPPr>
+              <a:defRPr lang="es-ES"/>
+            </a:defPPr>
+          </a:lstStyle>
+          <a:p>
+            <a:pPr rtl="0"/>
+            <a:r>
+              <a:rPr lang="en-US" dirty="0"/>
+              <a:t>New York, NY, Savannah, GA, Charleston, SC</a:t>
+            </a:r>
+          </a:p>
+          <a:p>
+            <a:pPr rtl="0"/>
+            <a:r>
+              <a:rPr lang="es-MX" dirty="0"/>
+              <a:t>Como p &lt; 0.05 rechazamos la hipótesis nula de que los puertos tienen la misma media de importaciones.</a:t>
+            </a:r>
+            <a:endParaRPr lang="es-ES" dirty="0"/>
+          </a:p>
+        </p:txBody>
+      </p:sp>
+      <p:sp>
+        <p:nvSpPr>
+          <p:cNvPr id="5" name="Marcador de número de diapositiva 4">
+            <a:extLst>
+              <a:ext uri="{FF2B5EF4-FFF2-40B4-BE49-F238E27FC236}">
+                <a16:creationId xmlns:a16="http://schemas.microsoft.com/office/drawing/2014/main" id="{FD96C503-BABC-632E-06CA-12C8474920EB}"/>
+              </a:ext>
+            </a:extLst>
+          </p:cNvPr>
+          <p:cNvSpPr>
+            <a:spLocks noGrp="1"/>
+          </p:cNvSpPr>
+          <p:nvPr>
+            <p:ph type="sldNum" sz="quarter" idx="40"/>
+          </p:nvPr>
+        </p:nvSpPr>
+        <p:spPr/>
+        <p:txBody>
+          <a:bodyPr rtlCol="0"/>
+          <a:lstStyle>
+            <a:defPPr>
+              <a:defRPr lang="es-ES"/>
+            </a:defPPr>
+          </a:lstStyle>
           <a:p>
             <a:pPr rtl="0"/>
             <a:fld id="{47FEACEE-25B4-4A2D-B147-27296E36371D}" type="slidenum">
-              <a:rPr lang="es-ES" altLang="zh-CN" noProof="0" smtClean="0"/>
+              <a:rPr lang="es-ES" altLang="zh-CN" smtClean="0"/>
               <a:pPr rtl="0"/>
               <a:t>9</a:t>
             </a:fld>
-            <a:endParaRPr lang="es-ES" altLang="zh-CN" noProof="0" dirty="0"/>
-          </a:p>
-        </p:txBody>
-      </p:sp>
-      <p:sp>
-        <p:nvSpPr>
-          <p:cNvPr id="8" name="Título 2">
-            <a:extLst>
-              <a:ext uri="{FF2B5EF4-FFF2-40B4-BE49-F238E27FC236}">
-                <a16:creationId xmlns:a16="http://schemas.microsoft.com/office/drawing/2014/main" id="{DC659418-0B0B-43CC-F278-B9AAA698BCEE}"/>
-              </a:ext>
-            </a:extLst>
-          </p:cNvPr>
-          <p:cNvSpPr txBox="1">
-            <a:spLocks/>
-          </p:cNvSpPr>
-          <p:nvPr/>
-        </p:nvSpPr>
-        <p:spPr>
-          <a:xfrm>
-            <a:off x="3820026" y="4099437"/>
-            <a:ext cx="8980968" cy="1991226"/>
-          </a:xfrm>
-          <a:prstGeom prst="rect">
-            <a:avLst/>
-          </a:prstGeom>
-        </p:spPr>
-        <p:txBody>
-          <a:bodyPr vert="horz" lIns="91440" tIns="45720" rIns="91440" bIns="45720" rtlCol="0" anchor="b">
-            <a:noAutofit/>
-          </a:bodyPr>
-          <a:lstStyle>
-            <a:defPPr>
-              <a:defRPr lang="es-ES"/>
-            </a:defPPr>
-            <a:lvl1pPr algn="l" defTabSz="914400" rtl="0" eaLnBrk="1" latinLnBrk="0" hangingPunct="1">
-              <a:lnSpc>
-                <a:spcPct val="90000"/>
-              </a:lnSpc>
-              <a:spcBef>
-                <a:spcPct val="0"/>
-              </a:spcBef>
-              <a:buNone/>
-              <a:defRPr lang="es-ES" sz="2700" b="1" kern="1200">
-                <a:solidFill>
-                  <a:schemeClr val="accent6"/>
-                </a:solidFill>
-                <a:latin typeface="+mn-lt"/>
-                <a:ea typeface="+mj-ea"/>
-                <a:cs typeface="+mj-cs"/>
-              </a:defRPr>
-            </a:lvl1pPr>
-          </a:lstStyle>
-          <a:p>
-            <a:r>
-              <a:rPr lang="es-MX" sz="3200"/>
-              <a:t>¿Qué pasos realizó para hacer el análisis de los datos tanto descriptivo como predictivo? </a:t>
-            </a:r>
-            <a:br>
-              <a:rPr lang="es-MX" sz="3200"/>
-            </a:br>
-            <a:endParaRPr lang="es-MX" sz="3200" dirty="0"/>
+            <a:endParaRPr lang="es-ES" altLang="zh-CN" dirty="0"/>
           </a:p>
         </p:txBody>
       </p:sp>
     </p:spTree>
     <p:extLst>
       <p:ext uri="{BB962C8B-B14F-4D97-AF65-F5344CB8AC3E}">
-        <p14:creationId xmlns:p14="http://schemas.microsoft.com/office/powerpoint/2010/main" val="548319711"/>
+        <p14:creationId xmlns:p14="http://schemas.microsoft.com/office/powerpoint/2010/main" val="2519727083"/>
       </p:ext>
     </p:extLst>
   </p:cSld>
@@ -29654,6 +29008,15 @@
 </file>
 
 <file path=customXml/item1.xml><?xml version="1.0" encoding="utf-8"?>
+<?mso-contentType ?>
+<FormTemplates xmlns="http://schemas.microsoft.com/sharepoint/v3/contenttype/forms">
+  <Display>DocumentLibraryForm</Display>
+  <Edit>DocumentLibraryForm</Edit>
+  <New>DocumentLibraryForm</New>
+</FormTemplates>
+</file>
+
+<file path=customXml/item2.xml><?xml version="1.0" encoding="utf-8"?>
 <p:properties xmlns:p="http://schemas.microsoft.com/office/2006/metadata/properties" xmlns:xsi="http://www.w3.org/2001/XMLSchema-instance" xmlns:pc="http://schemas.microsoft.com/office/infopath/2007/PartnerControls">
   <documentManagement>
     <_ip_UnifiedCompliancePolicyUIAction xmlns="http://schemas.microsoft.com/sharepoint/v3" xsi:nil="true"/>
@@ -29671,15 +29034,6 @@
     <MediaServiceKeyPoints xmlns="71af3243-3dd4-4a8d-8c0d-dd76da1f02a5" xsi:nil="true"/>
   </documentManagement>
 </p:properties>
-</file>
-
-<file path=customXml/item2.xml><?xml version="1.0" encoding="utf-8"?>
-<?mso-contentType ?>
-<FormTemplates xmlns="http://schemas.microsoft.com/sharepoint/v3/contenttype/forms">
-  <Display>DocumentLibraryForm</Display>
-  <Edit>DocumentLibraryForm</Edit>
-  <New>DocumentLibraryForm</New>
-</FormTemplates>
 </file>
 
 <file path=customXml/item3.xml><?xml version="1.0" encoding="utf-8"?>
@@ -29995,6 +29349,14 @@
 </file>
 
 <file path=customXml/itemProps1.xml><?xml version="1.0" encoding="utf-8"?>
+<ds:datastoreItem xmlns:ds="http://schemas.openxmlformats.org/officeDocument/2006/customXml" ds:itemID="{45515263-A3DE-4193-B6AA-5C449C94519F}">
+  <ds:schemaRefs>
+    <ds:schemaRef ds:uri="http://schemas.microsoft.com/sharepoint/v3/contenttype/forms"/>
+  </ds:schemaRefs>
+</ds:datastoreItem>
+</file>
+
+<file path=customXml/itemProps2.xml><?xml version="1.0" encoding="utf-8"?>
 <ds:datastoreItem xmlns:ds="http://schemas.openxmlformats.org/officeDocument/2006/customXml" ds:itemID="{A0AD9BE2-6B3D-4616-B044-300A8177DEA5}">
   <ds:schemaRefs>
     <ds:schemaRef ds:uri="http://schemas.microsoft.com/office/2006/metadata/properties"/>
@@ -30002,14 +29364,6 @@
     <ds:schemaRef ds:uri="http://schemas.microsoft.com/sharepoint/v3"/>
     <ds:schemaRef ds:uri="71af3243-3dd4-4a8d-8c0d-dd76da1f02a5"/>
     <ds:schemaRef ds:uri="230e9df3-be65-4c73-a93b-d1236ebd677e"/>
-  </ds:schemaRefs>
-</ds:datastoreItem>
-</file>
-
-<file path=customXml/itemProps2.xml><?xml version="1.0" encoding="utf-8"?>
-<ds:datastoreItem xmlns:ds="http://schemas.openxmlformats.org/officeDocument/2006/customXml" ds:itemID="{45515263-A3DE-4193-B6AA-5C449C94519F}">
-  <ds:schemaRefs>
-    <ds:schemaRef ds:uri="http://schemas.microsoft.com/sharepoint/v3/contenttype/forms"/>
   </ds:schemaRefs>
 </ds:datastoreItem>
 </file>

--- a/docs/Presentacion.pptx
+++ b/docs/Presentacion.pptx
@@ -245,7 +245,7 @@
             <a:pPr rtl="0"/>
             <a:fld id="{A1B39F24-D372-49FA-92C4-AB388BC5B723}" type="datetime1">
               <a:rPr lang="es-ES" smtClean="0"/>
-              <a:t>08/04/2025</a:t>
+              <a:t>09/04/2025</a:t>
             </a:fld>
             <a:endParaRPr lang="es-ES" dirty="0"/>
           </a:p>
@@ -529,7 +529,7 @@
             <a:fld id="{F56CD306-C8D1-4677-B356-29ECCA1AC9DC}" type="datetime1">
               <a:rPr lang="es-ES" smtClean="0"/>
               <a:pPr/>
-              <a:t>08/04/2025</a:t>
+              <a:t>09/04/2025</a:t>
             </a:fld>
             <a:endParaRPr lang="es-ES" dirty="0"/>
           </a:p>
@@ -24606,7 +24606,7 @@
             <a:pPr rtl="0"/>
             <a:r>
               <a:rPr lang="es-ES" noProof="0" dirty="0"/>
-              <a:t>Aumento exponencial desde 2,816,217 a 3,180,696</a:t>
+              <a:t>Aumento exponencial desde 28,162,170 a 31,806,960</a:t>
             </a:r>
           </a:p>
           <a:p>
@@ -24795,7 +24795,7 @@
             <a:pPr rtl="0"/>
             <a:r>
               <a:rPr lang="es-ES" noProof="0" dirty="0"/>
-              <a:t>1,445,465 al 2,018,848</a:t>
+              <a:t>14,454,650 al 20,188,480</a:t>
             </a:r>
           </a:p>
           <a:p>
@@ -25089,7 +25089,12 @@
             <p:ph type="title"/>
           </p:nvPr>
         </p:nvSpPr>
-        <p:spPr/>
+        <p:spPr>
+          <a:xfrm>
+            <a:off x="625712" y="934940"/>
+            <a:ext cx="9823998" cy="1325563"/>
+          </a:xfrm>
+        </p:spPr>
         <p:txBody>
           <a:bodyPr rtlCol="0"/>
           <a:lstStyle>
@@ -25122,7 +25127,12 @@
             <p:ph type="body" sz="quarter" idx="28"/>
           </p:nvPr>
         </p:nvSpPr>
-        <p:spPr/>
+        <p:spPr>
+          <a:xfrm>
+            <a:off x="449970" y="1753232"/>
+            <a:ext cx="4959822" cy="2007158"/>
+          </a:xfrm>
+        </p:spPr>
         <p:txBody>
           <a:bodyPr rtlCol="0"/>
           <a:lstStyle>
@@ -25134,7 +25144,7 @@
             <a:pPr rtl="0"/>
             <a:r>
               <a:rPr lang="es-MX" dirty="0"/>
-              <a:t>El análisis de las importaciones en los principales puertos de la costa este de Estados Unidos entre 2000 y 2017 revela una tendencia de crecimiento sostenido, reflejo del fortalecimiento del comercio internacional y del rol estratégico que estos puertos desempeñan en la logística global. Puertos como New York, NY, Savannah, GA y Charleston, SC han mostrado aumentos significativos en el volumen de mercancías recibidas, impulsados por la creciente demanda de bienes de consumo, maquinaria y productos electrónicos, en su mayoría provenientes de Asia.</a:t>
+              <a:t>El análisis de las importaciones en los principales puertos de la costa este de Estados Unidos entre 2000 - 2017 y las estimaciones hasta 2022, revelan una tendencia de crecimiento sostenido, reflejo del fortalecimiento del comercio internacional. Puertos como New York, NY, Savannah, GA y Charleston, SC han mostrado aumentos significativos, en algunos casos exponencial en el volumen de carga importada, en su mayoría provenientes de Asia.</a:t>
             </a:r>
             <a:endParaRPr lang="es-ES" dirty="0"/>
           </a:p>
@@ -25424,6 +25434,63 @@
               <a:t>11</a:t>
             </a:fld>
             <a:endParaRPr lang="es-ES" altLang="zh-CN" dirty="0"/>
+          </a:p>
+        </p:txBody>
+      </p:sp>
+      <p:sp>
+        <p:nvSpPr>
+          <p:cNvPr id="2" name="Título 5">
+            <a:extLst>
+              <a:ext uri="{FF2B5EF4-FFF2-40B4-BE49-F238E27FC236}">
+                <a16:creationId xmlns:a16="http://schemas.microsoft.com/office/drawing/2014/main" id="{AF12EF0E-066E-70B7-4ED6-EB50E0E419C6}"/>
+              </a:ext>
+            </a:extLst>
+          </p:cNvPr>
+          <p:cNvSpPr txBox="1">
+            <a:spLocks/>
+          </p:cNvSpPr>
+          <p:nvPr/>
+        </p:nvSpPr>
+        <p:spPr>
+          <a:xfrm>
+            <a:off x="449970" y="4340507"/>
+            <a:ext cx="9823998" cy="1325563"/>
+          </a:xfrm>
+          <a:prstGeom prst="rect">
+            <a:avLst/>
+          </a:prstGeom>
+        </p:spPr>
+        <p:txBody>
+          <a:bodyPr vert="horz" lIns="91440" tIns="45720" rIns="91440" bIns="45720" rtlCol="0" anchor="t">
+            <a:noAutofit/>
+          </a:bodyPr>
+          <a:lstStyle>
+            <a:defPPr>
+              <a:defRPr lang="es-ES"/>
+            </a:defPPr>
+            <a:lvl1pPr algn="l" defTabSz="914400" rtl="0" eaLnBrk="1" latinLnBrk="0" hangingPunct="1">
+              <a:lnSpc>
+                <a:spcPct val="90000"/>
+              </a:lnSpc>
+              <a:spcBef>
+                <a:spcPct val="0"/>
+              </a:spcBef>
+              <a:buNone/>
+              <a:defRPr lang="es-ES" sz="4400" b="1" kern="1200">
+                <a:solidFill>
+                  <a:schemeClr val="accent6"/>
+                </a:solidFill>
+                <a:latin typeface="Arial Black" panose="020B0A04020102020204" pitchFamily="34" charset="0"/>
+                <a:ea typeface="+mj-ea"/>
+                <a:cs typeface="+mj-cs"/>
+              </a:defRPr>
+            </a:lvl1pPr>
+          </a:lstStyle>
+          <a:p>
+            <a:r>
+              <a:rPr lang="es-PA" sz="2800" dirty="0"/>
+              <a:t>- Lecciones aprendidas</a:t>
+            </a:r>
           </a:p>
         </p:txBody>
       </p:sp>
@@ -27500,40 +27567,6 @@
               <a:rPr lang="es-ES" dirty="0"/>
               <a:t>Puertos de la Costa Este</a:t>
             </a:r>
-          </a:p>
-        </p:txBody>
-      </p:sp>
-      <p:sp>
-        <p:nvSpPr>
-          <p:cNvPr id="4" name="Marcador de pie de página 3">
-            <a:extLst>
-              <a:ext uri="{FF2B5EF4-FFF2-40B4-BE49-F238E27FC236}">
-                <a16:creationId xmlns:a16="http://schemas.microsoft.com/office/drawing/2014/main" id="{8FD23934-4A07-2183-483D-999C4EEC4F76}"/>
-              </a:ext>
-            </a:extLst>
-          </p:cNvPr>
-          <p:cNvSpPr>
-            <a:spLocks noGrp="1"/>
-          </p:cNvSpPr>
-          <p:nvPr>
-            <p:ph type="ftr" sz="quarter" idx="28"/>
-          </p:nvPr>
-        </p:nvSpPr>
-        <p:spPr/>
-        <p:txBody>
-          <a:bodyPr rtlCol="0"/>
-          <a:lstStyle>
-            <a:defPPr>
-              <a:defRPr lang="es-ES"/>
-            </a:defPPr>
-          </a:lstStyle>
-          <a:p>
-            <a:pPr rtl="0"/>
-            <a:r>
-              <a:rPr lang="es-ES"/>
-              <a:t>Título de la presentación</a:t>
-            </a:r>
-            <a:endParaRPr lang="es-ES" dirty="0"/>
           </a:p>
         </p:txBody>
       </p:sp>
@@ -29008,15 +29041,6 @@
 </file>
 
 <file path=customXml/item1.xml><?xml version="1.0" encoding="utf-8"?>
-<?mso-contentType ?>
-<FormTemplates xmlns="http://schemas.microsoft.com/sharepoint/v3/contenttype/forms">
-  <Display>DocumentLibraryForm</Display>
-  <Edit>DocumentLibraryForm</Edit>
-  <New>DocumentLibraryForm</New>
-</FormTemplates>
-</file>
-
-<file path=customXml/item2.xml><?xml version="1.0" encoding="utf-8"?>
 <p:properties xmlns:p="http://schemas.microsoft.com/office/2006/metadata/properties" xmlns:xsi="http://www.w3.org/2001/XMLSchema-instance" xmlns:pc="http://schemas.microsoft.com/office/infopath/2007/PartnerControls">
   <documentManagement>
     <_ip_UnifiedCompliancePolicyUIAction xmlns="http://schemas.microsoft.com/sharepoint/v3" xsi:nil="true"/>
@@ -29034,6 +29058,15 @@
     <MediaServiceKeyPoints xmlns="71af3243-3dd4-4a8d-8c0d-dd76da1f02a5" xsi:nil="true"/>
   </documentManagement>
 </p:properties>
+</file>
+
+<file path=customXml/item2.xml><?xml version="1.0" encoding="utf-8"?>
+<?mso-contentType ?>
+<FormTemplates xmlns="http://schemas.microsoft.com/sharepoint/v3/contenttype/forms">
+  <Display>DocumentLibraryForm</Display>
+  <Edit>DocumentLibraryForm</Edit>
+  <New>DocumentLibraryForm</New>
+</FormTemplates>
 </file>
 
 <file path=customXml/item3.xml><?xml version="1.0" encoding="utf-8"?>
@@ -29349,14 +29382,6 @@
 </file>
 
 <file path=customXml/itemProps1.xml><?xml version="1.0" encoding="utf-8"?>
-<ds:datastoreItem xmlns:ds="http://schemas.openxmlformats.org/officeDocument/2006/customXml" ds:itemID="{45515263-A3DE-4193-B6AA-5C449C94519F}">
-  <ds:schemaRefs>
-    <ds:schemaRef ds:uri="http://schemas.microsoft.com/sharepoint/v3/contenttype/forms"/>
-  </ds:schemaRefs>
-</ds:datastoreItem>
-</file>
-
-<file path=customXml/itemProps2.xml><?xml version="1.0" encoding="utf-8"?>
 <ds:datastoreItem xmlns:ds="http://schemas.openxmlformats.org/officeDocument/2006/customXml" ds:itemID="{A0AD9BE2-6B3D-4616-B044-300A8177DEA5}">
   <ds:schemaRefs>
     <ds:schemaRef ds:uri="http://schemas.microsoft.com/office/2006/metadata/properties"/>
@@ -29364,6 +29389,14 @@
     <ds:schemaRef ds:uri="http://schemas.microsoft.com/sharepoint/v3"/>
     <ds:schemaRef ds:uri="71af3243-3dd4-4a8d-8c0d-dd76da1f02a5"/>
     <ds:schemaRef ds:uri="230e9df3-be65-4c73-a93b-d1236ebd677e"/>
+  </ds:schemaRefs>
+</ds:datastoreItem>
+</file>
+
+<file path=customXml/itemProps2.xml><?xml version="1.0" encoding="utf-8"?>
+<ds:datastoreItem xmlns:ds="http://schemas.openxmlformats.org/officeDocument/2006/customXml" ds:itemID="{45515263-A3DE-4193-B6AA-5C449C94519F}">
+  <ds:schemaRefs>
+    <ds:schemaRef ds:uri="http://schemas.microsoft.com/sharepoint/v3/contenttype/forms"/>
   </ds:schemaRefs>
 </ds:datastoreItem>
 </file>
